--- a/קורס בסיסי AI/שיעור 2/מצגת שיעור 2.pptx
+++ b/קורס בסיסי AI/שיעור 2/מצגת שיעור 2.pptx
@@ -1541,12 +1541,17 @@
           </a:p>
           <a:p>
             <a:r>
+              <a:t>וארבע, חשוב מאוד: פותחים מראש חשבונות חינמיים בכלים של השיעור הבא: Gamma, Canva, HeyGen ו-ElevenLabs. ככה בשיעור לא מבזבזים זמן על הרשמות, רק יוצרים. אשלח לכם הודעה עם כל הקישורים.</a:t>
+            </a:r>
+          </a:p>
+          <a:p>
+            <a:r>
               <a:t>ורמז למפגש הבא: האפיון שלכם הופך למותג, לאפליקציה, למצגת, לתמונת פרופיל, ואפילו לסרטון שבו אתם מדברים. תביאו סלפי טוב.</a:t>
             </a:r>
           </a:p>
           <a:p>
             <a:r>
-              <a:t>(מדביקים את משימת הבית בצ'אט ושולחים במייל)</a:t>
+              <a:t>(מדביקים את משימת הבית בצ'אט. יומיים לפני המפגש הבא שולחים את הודעת ההכנה)</a:t>
             </a:r>
           </a:p>
           <a:p/>
@@ -13305,12 +13310,12 @@
         </p:nvSpPr>
         <p:spPr>
           <a:xfrm>
-            <a:off x="658368" y="1920240"/>
-            <a:ext cx="5120640" cy="3383280"/>
+            <a:off x="11027664" y="4581144"/>
+            <a:ext cx="457200" cy="457200"/>
           </a:xfrm>
           <a:prstGeom prst="roundRect">
             <a:avLst>
-              <a:gd name="adj" fmla="val 3000"/>
+              <a:gd name="adj" fmla="val 20000"/>
             </a:avLst>
           </a:prstGeom>
           <a:solidFill>
@@ -13338,9 +13343,26 @@
           </a:fontRef>
         </p:style>
         <p:txBody>
-          <a:bodyPr rtlCol="0" anchor="ctr"/>
-          <a:lstStyle/>
-          <a:p/>
+          <a:bodyPr rtlCol="0" anchor="ctr" lIns="0" rIns="0" tIns="0" bIns="0"/>
+          <a:lstStyle/>
+          <a:p>
+            <a:pPr rtl="1" algn="ctr" marL="0" indent="0">
+              <a:lnSpc>
+                <a:spcPct val="108000"/>
+              </a:lnSpc>
+              <a:buNone/>
+            </a:pPr>
+            <a:r>
+              <a:rPr sz="1500" b="1" i="0" lang="he-IL">
+                <a:solidFill>
+                  <a:srgbClr val="F2F5FA"/>
+                </a:solidFill>
+                <a:latin typeface="Arial"/>
+                <a:cs typeface="Arial"/>
+              </a:rPr>
+              <a:t>4</a:t>
+            </a:r>
+          </a:p>
         </p:txBody>
       </p:sp>
       <p:sp>
@@ -13351,8 +13373,8 @@
         </p:nvSpPr>
         <p:spPr>
           <a:xfrm>
-            <a:off x="886968" y="2103120"/>
-            <a:ext cx="4663440" cy="365760"/>
+            <a:off x="6309360" y="4608576"/>
+            <a:ext cx="4572000" cy="365760"/>
           </a:xfrm>
           <a:prstGeom prst="rect">
             <a:avLst/>
@@ -13372,14 +13394,14 @@
               <a:buNone/>
             </a:pPr>
             <a:r>
-              <a:rPr sz="1600" b="1" i="0" lang="he-IL">
-                <a:solidFill>
-                  <a:srgbClr val="F2F5FA"/>
+              <a:rPr sz="1700" b="1" i="0" lang="he-IL">
+                <a:solidFill>
+                  <a:srgbClr val="EBEDF0"/>
                 </a:solidFill>
                 <a:latin typeface="Arial"/>
                 <a:cs typeface="Arial"/>
               </a:rPr>
-              <a:t>🔮  רמז למפגש 3</a:t>
+              <a:t>פותחים חשבונות לשיעור הבא</a:t>
             </a:r>
           </a:p>
         </p:txBody>
@@ -13392,8 +13414,8 @@
         </p:nvSpPr>
         <p:spPr>
           <a:xfrm>
-            <a:off x="886968" y="2651760"/>
-            <a:ext cx="4663440" cy="2560320"/>
+            <a:off x="6309360" y="5001768"/>
+            <a:ext cx="4572000" cy="548640"/>
           </a:xfrm>
           <a:prstGeom prst="rect">
             <a:avLst/>
@@ -13408,18 +13430,146 @@
           <a:p>
             <a:pPr rtl="1" algn="r" marL="0" indent="0">
               <a:lnSpc>
-                <a:spcPct val="125000"/>
-              </a:lnSpc>
-              <a:buNone/>
-            </a:pPr>
-            <a:r>
-              <a:rPr sz="1600" b="0" i="0" lang="he-IL">
-                <a:solidFill>
-                  <a:srgbClr val="EBEDF0"/>
+                <a:spcPct val="108000"/>
+              </a:lnSpc>
+              <a:buNone/>
+            </a:pPr>
+            <a:r>
+              <a:rPr sz="1350" b="0" i="0" lang="he-IL">
+                <a:solidFill>
+                  <a:srgbClr val="A9B4C6"/>
                 </a:solidFill>
                 <a:latin typeface="Arial"/>
                 <a:cs typeface="Arial"/>
               </a:rPr>
+              <a:t>Gamma, Canva, HeyGen, ElevenLabs. הקישורים בחוברת</a:t>
+            </a:r>
+          </a:p>
+        </p:txBody>
+      </p:sp>
+      <p:sp>
+        <p:nvSpPr>
+          <p:cNvPr id="16" name="Rounded Rectangle 15"/>
+          <p:cNvSpPr/>
+          <p:nvPr/>
+        </p:nvSpPr>
+        <p:spPr>
+          <a:xfrm>
+            <a:off x="658368" y="1920240"/>
+            <a:ext cx="5120640" cy="3383280"/>
+          </a:xfrm>
+          <a:prstGeom prst="roundRect">
+            <a:avLst>
+              <a:gd name="adj" fmla="val 3000"/>
+            </a:avLst>
+          </a:prstGeom>
+          <a:solidFill>
+            <a:srgbClr val="022349"/>
+          </a:solidFill>
+          <a:ln w="19050">
+            <a:solidFill>
+              <a:srgbClr val="487CFF"/>
+            </a:solidFill>
+          </a:ln>
+          <a:effectLst/>
+        </p:spPr>
+        <p:style>
+          <a:lnRef idx="1">
+            <a:schemeClr val="accent1"/>
+          </a:lnRef>
+          <a:fillRef idx="3">
+            <a:schemeClr val="accent1"/>
+          </a:fillRef>
+          <a:effectRef idx="2">
+            <a:schemeClr val="accent1"/>
+          </a:effectRef>
+          <a:fontRef idx="minor">
+            <a:schemeClr val="lt1"/>
+          </a:fontRef>
+        </p:style>
+        <p:txBody>
+          <a:bodyPr rtlCol="0" anchor="ctr"/>
+          <a:lstStyle/>
+          <a:p/>
+        </p:txBody>
+      </p:sp>
+      <p:sp>
+        <p:nvSpPr>
+          <p:cNvPr id="17" name="TextBox 16"/>
+          <p:cNvSpPr txBox="1"/>
+          <p:nvPr/>
+        </p:nvSpPr>
+        <p:spPr>
+          <a:xfrm>
+            <a:off x="886968" y="2103120"/>
+            <a:ext cx="4663440" cy="365760"/>
+          </a:xfrm>
+          <a:prstGeom prst="rect">
+            <a:avLst/>
+          </a:prstGeom>
+          <a:noFill/>
+        </p:spPr>
+        <p:txBody>
+          <a:bodyPr wrap="square" lIns="0" rIns="0" tIns="0" bIns="0" anchor="t" rtlCol="0">
+            <a:spAutoFit/>
+          </a:bodyPr>
+          <a:lstStyle/>
+          <a:p>
+            <a:pPr rtl="1" algn="r" marL="0" indent="0">
+              <a:lnSpc>
+                <a:spcPct val="108000"/>
+              </a:lnSpc>
+              <a:buNone/>
+            </a:pPr>
+            <a:r>
+              <a:rPr sz="1600" b="1" i="0" lang="he-IL">
+                <a:solidFill>
+                  <a:srgbClr val="F2F5FA"/>
+                </a:solidFill>
+                <a:latin typeface="Arial"/>
+                <a:cs typeface="Arial"/>
+              </a:rPr>
+              <a:t>🔮  רמז למפגש 3</a:t>
+            </a:r>
+          </a:p>
+        </p:txBody>
+      </p:sp>
+      <p:sp>
+        <p:nvSpPr>
+          <p:cNvPr id="18" name="TextBox 17"/>
+          <p:cNvSpPr txBox="1"/>
+          <p:nvPr/>
+        </p:nvSpPr>
+        <p:spPr>
+          <a:xfrm>
+            <a:off x="886968" y="2651760"/>
+            <a:ext cx="4663440" cy="2560320"/>
+          </a:xfrm>
+          <a:prstGeom prst="rect">
+            <a:avLst/>
+          </a:prstGeom>
+          <a:noFill/>
+        </p:spPr>
+        <p:txBody>
+          <a:bodyPr wrap="square" lIns="0" rIns="0" tIns="0" bIns="0" anchor="t" rtlCol="0">
+            <a:spAutoFit/>
+          </a:bodyPr>
+          <a:lstStyle/>
+          <a:p>
+            <a:pPr rtl="1" algn="r" marL="0" indent="0">
+              <a:lnSpc>
+                <a:spcPct val="125000"/>
+              </a:lnSpc>
+              <a:buNone/>
+            </a:pPr>
+            <a:r>
+              <a:rPr sz="1600" b="0" i="0" lang="he-IL">
+                <a:solidFill>
+                  <a:srgbClr val="EBEDF0"/>
+                </a:solidFill>
+                <a:latin typeface="Arial"/>
+                <a:cs typeface="Arial"/>
+              </a:rPr>
               <a:t>האפיון שכתבתם הופך למותג, לאפליקציה, למצגת, לתמונת פרופיל ואפילו לסרטון שבו אתם מדברים. תביאו סלפי טוב.</a:t>
             </a:r>
           </a:p>
@@ -13427,7 +13577,7 @@
       </p:sp>
       <p:sp>
         <p:nvSpPr>
-          <p:cNvPr id="16" name="Rounded Rectangle 15"/>
+          <p:cNvPr id="19" name="Rounded Rectangle 18"/>
           <p:cNvSpPr/>
           <p:nvPr/>
         </p:nvSpPr>
@@ -13471,7 +13621,7 @@
       </p:sp>
       <p:sp>
         <p:nvSpPr>
-          <p:cNvPr id="17" name="TextBox 16"/>
+          <p:cNvPr id="20" name="TextBox 19"/>
           <p:cNvSpPr txBox="1"/>
           <p:nvPr/>
         </p:nvSpPr>
@@ -13505,14 +13655,14 @@
                 <a:latin typeface="Arial"/>
                 <a:cs typeface="Arial"/>
               </a:rPr>
-              <a:t>📤  את האפיון מדביקים גם באפליקציית הקורס. הוא ישמש אותנו בשני המפגשים הבאים.</a:t>
-            </a:r>
-          </a:p>
-        </p:txBody>
-      </p:sp>
-      <p:sp>
-        <p:nvSpPr>
-          <p:cNvPr id="18" name="TextBox 17"/>
+              <a:t>📲  פותחים חשבונות מראש = יותר זמן ליצור בשיעור. הודעה עם כל הקישורים תגיע אליכם לפני המפגש.</a:t>
+            </a:r>
+          </a:p>
+        </p:txBody>
+      </p:sp>
+      <p:sp>
+        <p:nvSpPr>
+          <p:cNvPr id="21" name="TextBox 20"/>
           <p:cNvSpPr txBox="1"/>
           <p:nvPr/>
         </p:nvSpPr>

--- a/קורס בסיסי AI/שיעור 2/מצגת שיעור 2.pptx
+++ b/קורס בסיסי AI/שיעור 2/מצגת שיעור 2.pptx
@@ -10,7 +10,6 @@
     <p:sldId id="297" r:id="rId50"/>
     <p:sldId id="284" r:id="rId37"/>
     <p:sldId id="257" r:id="rId3"/>
-    <p:sldId id="259" r:id="rId5"/>
     <p:sldId id="260" r:id="rId6"/>
     <p:sldId id="261" r:id="rId7"/>
     <p:sldId id="262" r:id="rId8"/>
@@ -18,6 +17,8 @@
     <p:sldId id="264" r:id="rId10"/>
     <p:sldId id="265" r:id="rId11"/>
     <p:sldId id="266" r:id="rId12"/>
+    <p:sldId id="303" r:id="rId56"/>
+    <p:sldId id="304" r:id="rId57"/>
     <p:sldId id="298" r:id="rId51"/>
     <p:sldId id="286" r:id="rId39"/>
     <p:sldId id="267" r:id="rId13"/>
@@ -28,11 +29,12 @@
     <p:sldId id="278" r:id="rIdS39"/>
     <p:sldId id="279" r:id="rIdS310"/>
     <p:sldId id="300" r:id="rId53"/>
+    <p:sldId id="305" r:id="rId58"/>
     <p:sldId id="301" r:id="rId54"/>
     <p:sldId id="293" r:id="rId46"/>
     <p:sldId id="294" r:id="rId47"/>
     <p:sldId id="302" r:id="rId55"/>
-    <p:sldId id="303" r:id="rId56"/>
+    <p:sldId id="306" r:id="rId59"/>
     <p:sldId id="295" r:id="rId48"/>
   </p:sldIdLst>
   <p:notesMasterIdLst>
@@ -1018,7 +1020,7 @@
           <a:lstStyle/>
           <a:p>
             <a:r>
-              <a:t>⏱ 4 דקות  |  🎯 להבין מתי משוחחים צעד אחרי צעד ומתי כותבים הנחיה מלאה מראש.</a:t>
+              <a:t>⏱ 4 דקות  |  🎯 להבין את ההיגיון: טוקנים, חלון הקשר וניחוש טוקן אחרי טוקן.</a:t>
             </a:r>
           </a:p>
           <a:p/>
@@ -1029,33 +1031,43 @@
           </a:p>
           <a:p>
             <a:r>
-              <a:t>שתי דרכים לעבוד עם AI.</a:t>
-            </a:r>
-          </a:p>
-          <a:p>
-            <a:r>
-              <a:t>כתיבה בלייב: שיחה. כותבים שורה, רואים מה יצא, ומשפרים. "קצר יותר", "עכשיו כטבלה". מושלם למייל קצר, לרעיון, לתשובה מהירה.</a:t>
-            </a:r>
-          </a:p>
-          <a:p>
-            <a:r>
-              <a:t>בניית משימה: הנחיה אחת מלאה, מראש. תפקיד, הקשר, משימה, פורמט, גבולות, ומצרפים חומר ודוגמה. מתאים לאפיון, להצעת מחיר, למסמך ארוך.</a:t>
-            </a:r>
-          </a:p>
-          <a:p>
-            <a:r>
-              <a:t>והכלל: משימה של דקה? בלייב. משימה של שעה? בונים משימה. ומשימה שחוזרת? שומרים בבנק.</a:t>
-            </a:r>
-          </a:p>
-          <a:p>
-            <a:r>
-              <a:t>כתבו בצ'אט: משימה אחת שלכם, ולידה "לייב" או "משימה".</a:t>
+              <a:t>רגע של היגיון. מה קורה בשנייה שאתם לוחצים אנטר?</a:t>
+            </a:r>
+          </a:p>
+          <a:p>
+            <a:r>
+              <a:t>אחת: הטקסט נחתך לחתיכות קטנות שנקראות טוקנים. מילה היא טוקן אחד עד שלושה.</a:t>
+            </a:r>
+          </a:p>
+          <a:p>
+            <a:r>
+              <a:t>שתיים: וזה מפתיע: בכל הודעה, כל השיחה נשלחת מההתחלה. ה-AI לא "זוכר" כמו בן אדם. הוא קורא הכול מחדש. לזה קוראים חלון ההקשר, הזיכרון לטווח קצר שלו.</a:t>
+            </a:r>
+          </a:p>
+          <a:p>
+            <a:r>
+              <a:t>שלוש: הוא מנחש את הטוקן הבא, ואז את הבא, בדיוק כמו משחק המילה הבאה מהמפגש הראשון.</a:t>
+            </a:r>
+          </a:p>
+          <a:p>
+            <a:r>
+              <a:t>ארבע: ולכן התשובה "מוקלדת" מול העיניים, ולכן כל פעם יוצאת קצת אחרת.</a:t>
+            </a:r>
+          </a:p>
+          <a:p>
+            <a:r>
+              <a:t>שני דברים לזכור: שיחה ארוכה מדי? ההתחלה נשכחת. ועברית "יקרה": אותו משפט בעברית צורך בערך פי 2 טוקנים.</a:t>
+            </a:r>
+          </a:p>
+          <a:p>
+            <a:r>
+              <a:t>שאלה לצ'אט: מי כבר הרגיש שהצ'אט "שכח" משהו שאמרתם בהתחלה? כתבו 🙋.</a:t>
             </a:r>
           </a:p>
           <a:p/>
           <a:p>
             <a:r>
-              <a:t>➡️ מעבר: ומה עושים כשלא יודעים מה לכתוב בכלל?</a:t>
+              <a:t>➡️ מעבר: אז איך חוסכים בטוקנים?</a:t>
             </a:r>
           </a:p>
         </p:txBody>
@@ -1125,61 +1137,64 @@
           <a:lstStyle/>
           <a:p>
             <a:r>
-              <a:t>⏱ 6 דקות  |  🎯 לתרגל סקירה של כמה מיילים, סדר עדיפויות וטיוטות תשובה.</a:t>
+              <a:t>⏱ 3 דקות  |  🎯 שישה הרגלים שחוסכים טוקנים ומשפרים תשובות.</a:t>
             </a:r>
           </a:p>
           <a:p/>
           <a:p>
             <a:r>
-              <a:t>🧰 הכנה מראש: 5 מיילים לדוגמה בקובץ ההדבקות.</a:t>
+              <a:t>🗣 מה לומר:</a:t>
+            </a:r>
+          </a:p>
+          <a:p>
+            <a:r>
+              <a:t>שישה הרגלים.</a:t>
+            </a:r>
+          </a:p>
+          <a:p>
+            <a:r>
+              <a:t>שיחה חדשה לכל נושא. לא ממשיכים צ'אט של שבוע שלם.</a:t>
+            </a:r>
+          </a:p>
+          <a:p>
+            <a:r>
+              <a:t>שיחה ארוכה? מבקשים "סכם את השיחה ב-10 שורות", ומדביקים בשיחה חדשה.</a:t>
+            </a:r>
+          </a:p>
+          <a:p>
+            <a:r>
+              <a:t>טעיתם בהנחיה? לוחצים "ערוך" על ההודעה, במקום לשלוח תיקון. ככה השיחה נשארת נקייה.</a:t>
+            </a:r>
+          </a:p>
+          <a:p>
+            <a:r>
+              <a:t>מצרפים רק את הקטע הרלוונטי, לא קובץ של 80 עמודים.</a:t>
+            </a:r>
+          </a:p>
+          <a:p>
+            <a:r>
+              <a:t>מבקשים תשובה קצרה: "עד 5 שורות, בלי הקדמה".</a:t>
+            </a:r>
+          </a:p>
+          <a:p>
+            <a:r>
+              <a:t>ומודל "חושב" שומרים לבעיות קשות. הוא צורך הרבה יותר.</a:t>
+            </a:r>
+          </a:p>
+          <a:p>
+            <a:r>
+              <a:t>למה זה חשוב? בחשבון חינמי יש מכסה. מי שחוסך, עובד יותר בלי לשלם.</a:t>
+            </a:r>
+          </a:p>
+          <a:p>
+            <a:r>
+              <a:t>(משתפים מסך ומראים איפה כפתור "ערוך" בצ'אט ג'יפיטי ובקלוד)</a:t>
             </a:r>
           </a:p>
           <a:p/>
           <a:p>
             <a:r>
-              <a:t>🏆 אפליקציית הקורס: פותחים את האתגר "מענה למייל עצבני".</a:t>
-            </a:r>
-          </a:p>
-          <a:p/>
-          <a:p>
-            <a:r>
-              <a:t>🗣 מה לומר:</a:t>
-            </a:r>
-          </a:p>
-          <a:p>
-            <a:r>
-              <a:t>תיבה מלאה, ואין זמן. מדביקים ומקבלים סדר.</a:t>
-            </a:r>
-          </a:p>
-          <a:p>
-            <a:r>
-              <a:t>ההנחיה בצ'אט: מדביקים 5 מיילים, ומבקשים טבלה: שולח, נושא, ומה לעשות, דחוף, לענות או לארכיון. ולשניים הדחופים, טיוטת תשובה.</a:t>
-            </a:r>
-          </a:p>
-          <a:p>
-            <a:r>
-              <a:t>(מדביקים בצ'אט את ההנחיה ואת 5 המיילים לדוגמה, ומריצים בשידור חי)</a:t>
-            </a:r>
-          </a:p>
-          <a:p>
-            <a:r>
-              <a:t>ראיתם? שלושים שניות, ויש סדר.</a:t>
-            </a:r>
-          </a:p>
-          <a:p>
-            <a:r>
-              <a:t>זהירות: מעתיקים בלי פרטים רגישים של לקוחות. ואם אתם לא רוצים להעתיק, אפשר גם לצלם מסך.</a:t>
-            </a:r>
-          </a:p>
-          <a:p>
-            <a:r>
-              <a:t>ועכשיו אתגר באפליקציה: אחד המיילים לדוגמה הוא של לקוח עצבני. כתבו את ההנחיה שתוציא ממנו תשובה מושלמת. שלוש דקות.</a:t>
-            </a:r>
-          </a:p>
-          <a:p/>
-          <a:p>
-            <a:r>
-              <a:t>➡️ מעבר: תחנה שנייה: ההנחיה שהכי הרבה אנשים אומרים לי שחסכה להם זמן.</a:t>
+              <a:t>➡️ מעבר: ויש שתי דרכים לעבוד עם כל מה שלמדנו.</a:t>
             </a:r>
           </a:p>
         </p:txBody>
@@ -1249,7 +1264,7 @@
           <a:lstStyle/>
           <a:p>
             <a:r>
-              <a:t>⏱ 3 דקות  |  🎯 להכיר הכתבה קולית חכמה, שעוזרת לכתוב הנחיות ארוכות.</a:t>
+              <a:t>⏱ 4 דקות  |  🎯 להבין מתי משוחחים צעד אחרי צעד ומתי כותבים הנחיה מלאה מראש.</a:t>
             </a:r>
           </a:p>
           <a:p/>
@@ -1260,38 +1275,33 @@
           </a:p>
           <a:p>
             <a:r>
-              <a:t>כמה מכם כותבים הנחיות קצרות, רק כי מתעצלים להקליד? כולנו.</a:t>
-            </a:r>
-          </a:p>
-          <a:p>
-            <a:r>
-              <a:t>Wispr Flow הוא אפליקציה חינמית למחשב. מחזיקים מקש, מדברים, ומשחררים. והוא כותב, מנקה את ה"אממ" ומוסיף פיסוק.</a:t>
-            </a:r>
-          </a:p>
-          <a:p>
-            <a:r>
-              <a:t>והוא עובד בכל מקום: בצ'אט ג'יפיטי, בקלוד, בוואטסאפ ובמייל.</a:t>
-            </a:r>
-          </a:p>
-          <a:p>
-            <a:r>
-              <a:t>בעברית: בהגדרות בוחרים עברית כשפה.</a:t>
-            </a:r>
-          </a:p>
-          <a:p>
-            <a:r>
-              <a:t>(מדגימים: מכתיבים הנחיה ארוכה בקול)</a:t>
-            </a:r>
-          </a:p>
-          <a:p>
-            <a:r>
-              <a:t>ושימו לב לטריק: כשמדברים, כותבים הנחיות ארוכות ומפורטות יותר. וזה בדיוק מה שצריך.</a:t>
+              <a:t>שתי דרכים לעבוד עם AI.</a:t>
+            </a:r>
+          </a:p>
+          <a:p>
+            <a:r>
+              <a:t>כתיבה בלייב: שיחה. כותבים שורה, רואים מה יצא, ומשפרים. "קצר יותר", "עכשיו כטבלה". מושלם למייל קצר, לרעיון, לתשובה מהירה.</a:t>
+            </a:r>
+          </a:p>
+          <a:p>
+            <a:r>
+              <a:t>בניית משימה: הנחיה אחת מלאה, מראש. תפקיד, הקשר, משימה, פורמט, גבולות, ומצרפים חומר ודוגמה. מתאים לאפיון, להצעת מחיר, למסמך ארוך.</a:t>
+            </a:r>
+          </a:p>
+          <a:p>
+            <a:r>
+              <a:t>והכלל: משימה של דקה? בלייב. משימה של שעה? בונים משימה. ומשימה שחוזרת? שומרים בבנק.</a:t>
+            </a:r>
+          </a:p>
+          <a:p>
+            <a:r>
+              <a:t>כתבו בצ'אט: משימה אחת שלכם, ולידה "לייב" או "משימה".</a:t>
             </a:r>
           </a:p>
           <a:p/>
           <a:p>
             <a:r>
-              <a:t>➡️ מעבר: ועכשיו, החלק הכי חשוב של היום: הסדנה.</a:t>
+              <a:t>➡️ מעבר: ומה עושים כשלא יודעים מה לכתוב בכלל?</a:t>
             </a:r>
           </a:p>
         </p:txBody>
@@ -1361,19 +1371,19 @@
           <a:lstStyle/>
           <a:p>
             <a:r>
-              <a:t>⏱ 20 דקות  |  🎯 שכל משתתף ייצא עם אפיון של עמוד לעסק או למותג שלו.</a:t>
+              <a:t>⏱ 6 דקות  |  🎯 לתרגל סקירה של כמה מיילים, סדר עדיפויות וטיוטות תשובה.</a:t>
             </a:r>
           </a:p>
           <a:p/>
           <a:p>
             <a:r>
-              <a:t>🧰 הכנה מראש: חדרי עבודה ל-12 דקות (אופציונלי), עם הודעת דקה לסיום.</a:t>
+              <a:t>🧰 הכנה מראש: 5 מיילים לדוגמה בקובץ ההדבקות.</a:t>
             </a:r>
           </a:p>
           <a:p/>
           <a:p>
             <a:r>
-              <a:t>🏆 אפליקציית הקורס: פותחים את האתגר "אפיון העסק שלי במשפט אחד".</a:t>
+              <a:t>🏆 אפליקציית הקורס: פותחים את האתגר "מענה למייל עצבני".</a:t>
             </a:r>
           </a:p>
           <a:p/>
@@ -1384,63 +1394,38 @@
           </a:p>
           <a:p>
             <a:r>
-              <a:t>עכשיו כל אחד בונה את הבסיס לכל הקורס: אפיון של העסק או המותג שלכם.</a:t>
-            </a:r>
-          </a:p>
-          <a:p>
-            <a:r>
-              <a:t>אין לכם עסק? בחרו רעיון שתמיד רציתם, או מותג אישי.</a:t>
-            </a:r>
-          </a:p>
-          <a:p>
-            <a:r>
-              <a:t>ונשתמש בטכניקת הראיון: ה-AI ישאל, ואתם תענו. ההנחיה בצ'אט.</a:t>
-            </a:r>
-          </a:p>
-          <a:p>
-            <a:r>
-              <a:t>(מדביקים את ההנחיה בצ'אט)</a:t>
-            </a:r>
-          </a:p>
-          <a:p>
-            <a:r>
-              <a:t>אחת: מדביקים בקלוד או בצ'אט ג'יפיטי, ועונים בכנות. אפשר גם בקול, עם Wispr.</a:t>
-            </a:r>
-          </a:p>
-          <a:p>
-            <a:r>
-              <a:t>שתיים: אחרי 8 שאלות מקבלים אפיון של עמוד: לקוח, בעיה, פתרון, ייחוד, מחירים וטון.</a:t>
-            </a:r>
-          </a:p>
-          <a:p>
-            <a:r>
-              <a:t>שלוש: משפרים פעם אחת: "מה חסר? מה לא ברור ללקוח?"</a:t>
-            </a:r>
-          </a:p>
-          <a:p>
-            <a:r>
-              <a:t>ארבע: שומרים בבנק. במפגש הבא האפיון הזה יקבל צבעים, אפליקציה, מצגת וסרטון.</a:t>
-            </a:r>
-          </a:p>
-          <a:p>
-            <a:r>
-              <a:t>יש לכם 15 דקות.</a:t>
-            </a:r>
-          </a:p>
-          <a:p>
-            <a:r>
-              <a:t>(טיימר. עוזרים בצ'אט, או נכנסים לחדרי העבודה)</a:t>
-            </a:r>
-          </a:p>
-          <a:p>
-            <a:r>
-              <a:t>ובסוף: כתבו באתגר את העסק שלכם במשפט אחד. הכי ברור וחד מנצח.</a:t>
+              <a:t>תיבה מלאה, ואין זמן. מדביקים ומקבלים סדר.</a:t>
+            </a:r>
+          </a:p>
+          <a:p>
+            <a:r>
+              <a:t>ההנחיה בצ'אט: מדביקים 5 מיילים, ומבקשים טבלה: שולח, נושא, ומה לעשות, דחוף, לענות או לארכיון. ולשניים הדחופים, טיוטת תשובה.</a:t>
+            </a:r>
+          </a:p>
+          <a:p>
+            <a:r>
+              <a:t>(מדביקים בצ'אט את ההנחיה ואת 5 המיילים לדוגמה, ומריצים בשידור חי)</a:t>
+            </a:r>
+          </a:p>
+          <a:p>
+            <a:r>
+              <a:t>ראיתם? שלושים שניות, ויש סדר.</a:t>
+            </a:r>
+          </a:p>
+          <a:p>
+            <a:r>
+              <a:t>זהירות: מעתיקים בלי פרטים רגישים של לקוחות. ואם אתם לא רוצים להעתיק, אפשר גם לצלם מסך.</a:t>
+            </a:r>
+          </a:p>
+          <a:p>
+            <a:r>
+              <a:t>ועכשיו אתגר באפליקציה: אחד המיילים לדוגמה הוא של לקוח עצבני. כתבו את ההנחיה שתוציא ממנו תשובה מושלמת. שלוש דקות.</a:t>
             </a:r>
           </a:p>
           <a:p/>
           <a:p>
             <a:r>
-              <a:t>➡️ מעבר: וכשכולם סיימו, הגיע הזמן לגלריה.</a:t>
+              <a:t>➡️ מעבר: תחנה שנייה: ההנחיה שהכי הרבה אנשים אומרים לי שחסכה להם זמן.</a:t>
             </a:r>
           </a:p>
         </p:txBody>
@@ -1510,7 +1495,7 @@
           <a:lstStyle/>
           <a:p>
             <a:r>
-              <a:t>⏱ 2 דקות  |  🎯 לסיים את האפיון ולבנות הרגל.</a:t>
+              <a:t>⏱ 2 דקות  |  🎯 להכיר הכתבה קולית חכמה, שעוזרת לכתוב הנחיות ארוכות.</a:t>
             </a:r>
           </a:p>
           <a:p/>
@@ -1521,43 +1506,38 @@
           </a:p>
           <a:p>
             <a:r>
-              <a:t>שלושה דברים לשבוע הקרוב.</a:t>
-            </a:r>
-          </a:p>
-          <a:p>
-            <a:r>
-              <a:t>אחת: מסיימים את האפיון. עמוד אחד, ברור, שמור בבנק.</a:t>
-            </a:r>
-          </a:p>
-          <a:p>
-            <a:r>
-              <a:t>שתיים: 5 הנחיות לבנק, ואחת מהן עם תפקיד: "אתה...".</a:t>
-            </a:r>
-          </a:p>
-          <a:p>
-            <a:r>
-              <a:t>שלוש: עונים על 3 מיילים אמיתיים בעזרת AI, ומתקנים לפני ששולחים.</a:t>
-            </a:r>
-          </a:p>
-          <a:p>
-            <a:r>
-              <a:t>וארבע, חשוב מאוד: פותחים מראש חשבונות חינמיים בכלים של השיעור הבא: Gamma, Canva, HeyGen ו-ElevenLabs. ככה בשיעור לא מבזבזים זמן על הרשמות, רק יוצרים. אשלח לכם הודעה עם כל הקישורים.</a:t>
-            </a:r>
-          </a:p>
-          <a:p>
-            <a:r>
-              <a:t>ורמז למפגש הבא: האפיון שלכם הופך למותג, לאפליקציה, למצגת, לתמונת פרופיל, ואפילו לסרטון שבו אתם מדברים. תביאו סלפי טוב.</a:t>
-            </a:r>
-          </a:p>
-          <a:p>
-            <a:r>
-              <a:t>(מדביקים את משימת הבית בצ'אט. יומיים לפני המפגש הבא שולחים את הודעת ההכנה)</a:t>
+              <a:t>כמה מכם כותבים הנחיות קצרות, רק כי מתעצלים להקליד? כולנו.</a:t>
+            </a:r>
+          </a:p>
+          <a:p>
+            <a:r>
+              <a:t>Wispr Flow הוא אפליקציה חינמית למחשב. מחזיקים מקש, מדברים, ומשחררים. והוא כותב, מנקה את ה"אממ" ומוסיף פיסוק.</a:t>
+            </a:r>
+          </a:p>
+          <a:p>
+            <a:r>
+              <a:t>והוא עובד בכל מקום: בצ'אט ג'יפיטי, בקלוד, בוואטסאפ ובמייל.</a:t>
+            </a:r>
+          </a:p>
+          <a:p>
+            <a:r>
+              <a:t>בעברית: בהגדרות בוחרים עברית כשפה.</a:t>
+            </a:r>
+          </a:p>
+          <a:p>
+            <a:r>
+              <a:t>(מדגימים: מכתיבים הנחיה ארוכה בקול)</a:t>
+            </a:r>
+          </a:p>
+          <a:p>
+            <a:r>
+              <a:t>ושימו לב לטריק: כשמדברים, כותבים הנחיות ארוכות ומפורטות יותר. וזה בדיוק מה שצריך.</a:t>
             </a:r>
           </a:p>
           <a:p/>
           <a:p>
             <a:r>
-              <a:t>➡️ מעבר: וכל הכלים של היום, במקום אחד.</a:t>
+              <a:t>➡️ מעבר: וזה רק אחד משמונה טריקים שחוסכים שעות.</a:t>
             </a:r>
           </a:p>
         </p:txBody>
@@ -1583,6 +1563,409 @@
 </file>
 
 <file path=ppt/notesSlides/notesSlide40.xml><?xml version="1.0" encoding="utf-8"?>
+<p:notes xmlns:a="http://schemas.openxmlformats.org/drawingml/2006/main" xmlns:p="http://schemas.openxmlformats.org/presentationml/2006/main" xmlns:r="http://schemas.openxmlformats.org/officeDocument/2006/relationships">
+  <p:cSld>
+    <p:spTree>
+      <p:nvGrpSpPr>
+        <p:cNvPr id="1" name=""/>
+        <p:cNvGrpSpPr/>
+        <p:nvPr/>
+      </p:nvGrpSpPr>
+      <p:grpSpPr>
+        <a:xfrm>
+          <a:off x="0" y="0"/>
+          <a:ext cx="0" cy="0"/>
+          <a:chOff x="0" y="0"/>
+          <a:chExt cx="0" cy="0"/>
+        </a:xfrm>
+      </p:grpSpPr>
+      <p:sp>
+        <p:nvSpPr>
+          <p:cNvPr id="2" name="Slide Image Placeholder 1"/>
+          <p:cNvSpPr>
+            <a:spLocks noGrp="1"/>
+          </p:cNvSpPr>
+          <p:nvPr>
+            <p:ph type="sldImg" idx="2"/>
+          </p:nvPr>
+        </p:nvSpPr>
+        <p:spPr/>
+      </p:sp>
+      <p:sp>
+        <p:nvSpPr>
+          <p:cNvPr id="3" name="Notes Placeholder 2"/>
+          <p:cNvSpPr>
+            <a:spLocks noGrp="1"/>
+          </p:cNvSpPr>
+          <p:nvPr>
+            <p:ph type="body" idx="3" sz="quarter"/>
+          </p:nvPr>
+        </p:nvSpPr>
+        <p:spPr/>
+        <p:txBody>
+          <a:bodyPr/>
+          <a:lstStyle/>
+          <a:p>
+            <a:r>
+              <a:t>⏱ 4 דקות  |  🎯 הרגלי עבודה של משתמשים מנוסים, להטמעה מיידית.</a:t>
+            </a:r>
+          </a:p>
+          <a:p/>
+          <a:p>
+            <a:r>
+              <a:t>🗣 מה לומר:</a:t>
+            </a:r>
+          </a:p>
+          <a:p>
+            <a:r>
+              <a:t>שמונה טריקים שמשתמשים מנוסים עושים.</a:t>
+            </a:r>
+          </a:p>
+          <a:p>
+            <a:r>
+              <a:t>הוראות קבועות: בהגדרות של צ'אט ג'יפיטי, ג'מיני או קלוד כותבים פעם אחת מי אתם ואיך לכתוב לכם.</a:t>
+            </a:r>
+          </a:p>
+          <a:p>
+            <a:r>
+              <a:t>בנק הנחיות: מסמך אחד עם כל מה שעבד.</a:t>
+            </a:r>
+          </a:p>
+          <a:p>
+            <a:r>
+              <a:t>מדברים במקום להקליד: פי 3 מהר.</a:t>
+            </a:r>
+          </a:p>
+          <a:p>
+            <a:r>
+              <a:t>מצלמים מסך: במקום להסביר שגיאה, מדביקים תמונה.</a:t>
+            </a:r>
+          </a:p>
+          <a:p>
+            <a:r>
+              <a:t>"תן 3 גרסאות שונות", ובוחרים.</a:t>
+            </a:r>
+          </a:p>
+          <a:p>
+            <a:r>
+              <a:t>"בטבלה שאפשר להדביק באקסל": חוסך העתקות.</a:t>
+            </a:r>
+          </a:p>
+          <a:p>
+            <a:r>
+              <a:t>"לפני שאתה עונה, מה חסר לך?": תשובה מדויקת מהפעם הראשונה.</a:t>
+            </a:r>
+          </a:p>
+          <a:p>
+            <a:r>
+              <a:t>ומשימה שחוזרת? שומרים כעוזר קבוע. נלמד את זה במפגש 4.</a:t>
+            </a:r>
+          </a:p>
+          <a:p>
+            <a:r>
+              <a:t>(משתפים מסך ומראים איפה ההוראות הקבועות בהגדרות)</a:t>
+            </a:r>
+          </a:p>
+          <a:p>
+            <a:r>
+              <a:t>כתבו בצ'אט: איזה טריק אתם מנסים כבר השבוע?</a:t>
+            </a:r>
+          </a:p>
+          <a:p/>
+          <a:p>
+            <a:r>
+              <a:t>➡️ מעבר: ועכשיו, החלק הכי חשוב של היום: הסדנה.</a:t>
+            </a:r>
+          </a:p>
+        </p:txBody>
+      </p:sp>
+      <p:sp>
+        <p:nvSpPr>
+          <p:cNvPr id="4" name="Slide Number Placeholder 3"/>
+          <p:cNvSpPr>
+            <a:spLocks noGrp="1"/>
+          </p:cNvSpPr>
+          <p:nvPr>
+            <p:ph type="sldNum" idx="5" sz="quarter"/>
+          </p:nvPr>
+        </p:nvSpPr>
+        <p:spPr/>
+      </p:sp>
+    </p:spTree>
+  </p:cSld>
+  <p:clrMapOvr>
+    <a:masterClrMapping/>
+  </p:clrMapOvr>
+</p:notes>
+</file>
+
+<file path=ppt/notesSlides/notesSlide41.xml><?xml version="1.0" encoding="utf-8"?>
+<p:notes xmlns:a="http://schemas.openxmlformats.org/drawingml/2006/main" xmlns:p="http://schemas.openxmlformats.org/presentationml/2006/main" xmlns:r="http://schemas.openxmlformats.org/officeDocument/2006/relationships">
+  <p:cSld>
+    <p:spTree>
+      <p:nvGrpSpPr>
+        <p:cNvPr id="1" name=""/>
+        <p:cNvGrpSpPr/>
+        <p:nvPr/>
+      </p:nvGrpSpPr>
+      <p:grpSpPr>
+        <a:xfrm>
+          <a:off x="0" y="0"/>
+          <a:ext cx="0" cy="0"/>
+          <a:chOff x="0" y="0"/>
+          <a:chExt cx="0" cy="0"/>
+        </a:xfrm>
+      </p:grpSpPr>
+      <p:sp>
+        <p:nvSpPr>
+          <p:cNvPr id="2" name="Slide Image Placeholder 1"/>
+          <p:cNvSpPr>
+            <a:spLocks noGrp="1"/>
+          </p:cNvSpPr>
+          <p:nvPr>
+            <p:ph type="sldImg" idx="2"/>
+          </p:nvPr>
+        </p:nvSpPr>
+        <p:spPr/>
+      </p:sp>
+      <p:sp>
+        <p:nvSpPr>
+          <p:cNvPr id="3" name="Notes Placeholder 2"/>
+          <p:cNvSpPr>
+            <a:spLocks noGrp="1"/>
+          </p:cNvSpPr>
+          <p:nvPr>
+            <p:ph type="body" idx="3" sz="quarter"/>
+          </p:nvPr>
+        </p:nvSpPr>
+        <p:spPr/>
+        <p:txBody>
+          <a:bodyPr/>
+          <a:lstStyle/>
+          <a:p>
+            <a:r>
+              <a:t>⏱ 20 דקות  |  🎯 שכל משתתף ייצא עם אפיון של עמוד לעסק או למותג שלו.</a:t>
+            </a:r>
+          </a:p>
+          <a:p/>
+          <a:p>
+            <a:r>
+              <a:t>🧰 הכנה מראש: חדרי עבודה ל-12 דקות (אופציונלי), עם הודעת דקה לסיום.</a:t>
+            </a:r>
+          </a:p>
+          <a:p/>
+          <a:p>
+            <a:r>
+              <a:t>🏆 אפליקציית הקורס: פותחים את האתגר "אפיון העסק שלי במשפט אחד".</a:t>
+            </a:r>
+          </a:p>
+          <a:p/>
+          <a:p>
+            <a:r>
+              <a:t>🗣 מה לומר:</a:t>
+            </a:r>
+          </a:p>
+          <a:p>
+            <a:r>
+              <a:t>עכשיו כל אחד בונה את הבסיס לכל הקורס: אפיון של העסק או המותג שלכם.</a:t>
+            </a:r>
+          </a:p>
+          <a:p>
+            <a:r>
+              <a:t>אין לכם עסק? בחרו רעיון שתמיד רציתם, או מותג אישי.</a:t>
+            </a:r>
+          </a:p>
+          <a:p>
+            <a:r>
+              <a:t>ונשתמש בטכניקת הראיון: ה-AI ישאל, ואתם תענו. ההנחיה בצ'אט.</a:t>
+            </a:r>
+          </a:p>
+          <a:p>
+            <a:r>
+              <a:t>(מדביקים את ההנחיה בצ'אט)</a:t>
+            </a:r>
+          </a:p>
+          <a:p>
+            <a:r>
+              <a:t>אחת: מדביקים בקלוד או בצ'אט ג'יפיטי, ועונים בכנות. אפשר גם בקול, עם Wispr.</a:t>
+            </a:r>
+          </a:p>
+          <a:p>
+            <a:r>
+              <a:t>שתיים: אחרי 8 שאלות מקבלים אפיון של עמוד: לקוח, בעיה, פתרון, ייחוד, מחירים וטון.</a:t>
+            </a:r>
+          </a:p>
+          <a:p>
+            <a:r>
+              <a:t>שלוש: משפרים פעם אחת: "מה חסר? מה לא ברור ללקוח?"</a:t>
+            </a:r>
+          </a:p>
+          <a:p>
+            <a:r>
+              <a:t>ארבע: שומרים בבנק. במפגש הבא האפיון הזה יקבל צבעים, אפליקציה, מצגת וסרטון.</a:t>
+            </a:r>
+          </a:p>
+          <a:p>
+            <a:r>
+              <a:t>יש לכם 15 דקות.</a:t>
+            </a:r>
+          </a:p>
+          <a:p>
+            <a:r>
+              <a:t>(טיימר. עוזרים בצ'אט, או נכנסים לחדרי העבודה)</a:t>
+            </a:r>
+          </a:p>
+          <a:p>
+            <a:r>
+              <a:t>ובסוף: כתבו באתגר את העסק שלכם במשפט אחד. הכי ברור וחד מנצח.</a:t>
+            </a:r>
+          </a:p>
+          <a:p/>
+          <a:p>
+            <a:r>
+              <a:t>➡️ מעבר: וכשכולם סיימו, הגיע הזמן לגלריה.</a:t>
+            </a:r>
+          </a:p>
+        </p:txBody>
+      </p:sp>
+      <p:sp>
+        <p:nvSpPr>
+          <p:cNvPr id="4" name="Slide Number Placeholder 3"/>
+          <p:cNvSpPr>
+            <a:spLocks noGrp="1"/>
+          </p:cNvSpPr>
+          <p:nvPr>
+            <p:ph type="sldNum" idx="5" sz="quarter"/>
+          </p:nvPr>
+        </p:nvSpPr>
+        <p:spPr/>
+      </p:sp>
+    </p:spTree>
+  </p:cSld>
+  <p:clrMapOvr>
+    <a:masterClrMapping/>
+  </p:clrMapOvr>
+</p:notes>
+</file>
+
+<file path=ppt/notesSlides/notesSlide42.xml><?xml version="1.0" encoding="utf-8"?>
+<p:notes xmlns:a="http://schemas.openxmlformats.org/drawingml/2006/main" xmlns:p="http://schemas.openxmlformats.org/presentationml/2006/main" xmlns:r="http://schemas.openxmlformats.org/officeDocument/2006/relationships">
+  <p:cSld>
+    <p:spTree>
+      <p:nvGrpSpPr>
+        <p:cNvPr id="1" name=""/>
+        <p:cNvGrpSpPr/>
+        <p:nvPr/>
+      </p:nvGrpSpPr>
+      <p:grpSpPr>
+        <a:xfrm>
+          <a:off x="0" y="0"/>
+          <a:ext cx="0" cy="0"/>
+          <a:chOff x="0" y="0"/>
+          <a:chExt cx="0" cy="0"/>
+        </a:xfrm>
+      </p:grpSpPr>
+      <p:sp>
+        <p:nvSpPr>
+          <p:cNvPr id="2" name="Slide Image Placeholder 1"/>
+          <p:cNvSpPr>
+            <a:spLocks noGrp="1"/>
+          </p:cNvSpPr>
+          <p:nvPr>
+            <p:ph type="sldImg" idx="2"/>
+          </p:nvPr>
+        </p:nvSpPr>
+        <p:spPr/>
+      </p:sp>
+      <p:sp>
+        <p:nvSpPr>
+          <p:cNvPr id="3" name="Notes Placeholder 2"/>
+          <p:cNvSpPr>
+            <a:spLocks noGrp="1"/>
+          </p:cNvSpPr>
+          <p:nvPr>
+            <p:ph type="body" idx="3" sz="quarter"/>
+          </p:nvPr>
+        </p:nvSpPr>
+        <p:spPr/>
+        <p:txBody>
+          <a:bodyPr/>
+          <a:lstStyle/>
+          <a:p>
+            <a:r>
+              <a:t>⏱ 2 דקות  |  🎯 לסיים את האפיון ולבנות הרגל.</a:t>
+            </a:r>
+          </a:p>
+          <a:p/>
+          <a:p>
+            <a:r>
+              <a:t>🗣 מה לומר:</a:t>
+            </a:r>
+          </a:p>
+          <a:p>
+            <a:r>
+              <a:t>שלושה דברים לשבוע הקרוב.</a:t>
+            </a:r>
+          </a:p>
+          <a:p>
+            <a:r>
+              <a:t>אחת: מסיימים את האפיון. עמוד אחד, ברור, שמור בבנק.</a:t>
+            </a:r>
+          </a:p>
+          <a:p>
+            <a:r>
+              <a:t>שתיים: 5 הנחיות לבנק, ואחת מהן עם תפקיד: "אתה...".</a:t>
+            </a:r>
+          </a:p>
+          <a:p>
+            <a:r>
+              <a:t>שלוש: עונים על 3 מיילים אמיתיים בעזרת AI, ומתקנים לפני ששולחים.</a:t>
+            </a:r>
+          </a:p>
+          <a:p>
+            <a:r>
+              <a:t>וארבע, חשוב מאוד: פותחים מראש חשבונות חינמיים בכלים של השיעור הבא: Gamma, Canva, HeyGen ו-ElevenLabs. ככה בשיעור לא מבזבזים זמן על הרשמות, רק יוצרים. אשלח לכם הודעה עם כל הקישורים.</a:t>
+            </a:r>
+          </a:p>
+          <a:p>
+            <a:r>
+              <a:t>ורמז למפגש הבא: האפיון שלכם הופך למותג, לאפליקציה, למצגת, לתמונת פרופיל, ואפילו לסרטון שבו אתם מדברים. תביאו סלפי טוב.</a:t>
+            </a:r>
+          </a:p>
+          <a:p>
+            <a:r>
+              <a:t>(מדביקים את משימת הבית בצ'אט. יומיים לפני המפגש הבא שולחים את הודעת ההכנה)</a:t>
+            </a:r>
+          </a:p>
+          <a:p/>
+          <a:p>
+            <a:r>
+              <a:t>➡️ מעבר: וכל הכלים של היום, במקום אחד.</a:t>
+            </a:r>
+          </a:p>
+        </p:txBody>
+      </p:sp>
+      <p:sp>
+        <p:nvSpPr>
+          <p:cNvPr id="4" name="Slide Number Placeholder 3"/>
+          <p:cNvSpPr>
+            <a:spLocks noGrp="1"/>
+          </p:cNvSpPr>
+          <p:nvPr>
+            <p:ph type="sldNum" idx="5" sz="quarter"/>
+          </p:nvPr>
+        </p:nvSpPr>
+        <p:spPr/>
+      </p:sp>
+    </p:spTree>
+  </p:cSld>
+  <p:clrMapOvr>
+    <a:masterClrMapping/>
+  </p:clrMapOvr>
+</p:notes>
+</file>
+
+<file path=ppt/notesSlides/notesSlide43.xml><?xml version="1.0" encoding="utf-8"?>
 <p:notes xmlns:a="http://schemas.openxmlformats.org/drawingml/2006/main" xmlns:p="http://schemas.openxmlformats.org/presentationml/2006/main" xmlns:r="http://schemas.openxmlformats.org/officeDocument/2006/relationships">
   <p:cSld>
     <p:spTree>
@@ -2136,10 +2519,15 @@
               <a:t>אותו כלי, אותו נושא. ההבדל היחיד: מה כתבנו.</a:t>
             </a:r>
           </a:p>
+          <a:p>
+            <a:r>
+              <a:t>והמסקנה הכי חשובה של הערב: ההנחיה היא 80% מהתוצאה.</a:t>
+            </a:r>
+          </a:p>
           <a:p/>
           <a:p>
             <a:r>
-              <a:t>➡️ מעבר: והנה מה שיצא, שחור על גבי לבן.</a:t>
+              <a:t>➡️ מעבר: אז איך כותבים הנחיה טובה? יש נוסחה.</a:t>
             </a:r>
           </a:p>
         </p:txBody>
@@ -2162,124 +2550,6 @@
             <a:fld id="{F7021451-1387-4CA6-816F-3879F97B5CBC}" type="slidenum">
               <a:rPr lang="en-US"/>
               <a:t>2</a:t>
-            </a:fld>
-            <a:endParaRPr lang="en-US"/>
-          </a:p>
-        </p:txBody>
-      </p:sp>
-    </p:spTree>
-    <p:extLst>
-      <p:ext uri="{BB962C8B-B14F-4D97-AF65-F5344CB8AC3E}">
-        <p14:creationId xmlns:p14="http://schemas.microsoft.com/office/powerpoint/2010/main" val="1024086991"/>
-      </p:ext>
-    </p:extLst>
-  </p:cSld>
-  <p:clrMapOvr>
-    <a:masterClrMapping/>
-  </p:clrMapOvr>
-</p:notes>
-</file>
-
-<file path=ppt/notesSlides/notesSlide904.xml><?xml version="1.0" encoding="utf-8"?>
-<p:notes xmlns:a="http://schemas.openxmlformats.org/drawingml/2006/main" xmlns:r="http://schemas.openxmlformats.org/officeDocument/2006/relationships" xmlns:p="http://schemas.openxmlformats.org/presentationml/2006/main">
-  <p:cSld>
-    <p:spTree>
-      <p:nvGrpSpPr>
-        <p:cNvPr id="1" name=""/>
-        <p:cNvGrpSpPr/>
-        <p:nvPr/>
-      </p:nvGrpSpPr>
-      <p:grpSpPr>
-        <a:xfrm>
-          <a:off x="0" y="0"/>
-          <a:ext cx="0" cy="0"/>
-          <a:chOff x="0" y="0"/>
-          <a:chExt cx="0" cy="0"/>
-        </a:xfrm>
-      </p:grpSpPr>
-      <p:sp>
-        <p:nvSpPr>
-          <p:cNvPr id="2" name="Slide Image Placeholder 1"/>
-          <p:cNvSpPr>
-            <a:spLocks noGrp="1" noRot="1" noChangeAspect="1"/>
-          </p:cNvSpPr>
-          <p:nvPr>
-            <p:ph type="sldImg"/>
-          </p:nvPr>
-        </p:nvSpPr>
-        <p:spPr/>
-      </p:sp>
-      <p:sp>
-        <p:nvSpPr>
-          <p:cNvPr id="3" name="Notes Placeholder 2"/>
-          <p:cNvSpPr>
-            <a:spLocks noGrp="1"/>
-          </p:cNvSpPr>
-          <p:nvPr>
-            <p:ph type="body" idx="1"/>
-          </p:nvPr>
-        </p:nvSpPr>
-        <p:spPr/>
-        <p:txBody>
-          <a:bodyPr/>
-          <a:lstStyle/>
-          <a:p>
-            <a:r>
-              <a:t>⏱ 2 דקות  |  🎯 לסגור את הניסוי עם מסקנה אחת ברורה.</a:t>
-            </a:r>
-          </a:p>
-          <a:p/>
-          <a:p>
-            <a:r>
-              <a:t>🗣 מה לומר:</a:t>
-            </a:r>
-          </a:p>
-          <a:p>
-            <a:r>
-              <a:t>מימין, מה שיצא מהנחיה א': "שלום, אנא שלם את חשבונך. תודה." מייל גנרי, חסר ערך.</a:t>
-            </a:r>
-          </a:p>
-          <a:p>
-            <a:r>
-              <a:t>משמאל, מהנחיה ב': מייל עם מספר חשבון, תאריך, הצעת פריסה. מוכן לשליחה.</a:t>
-            </a:r>
-          </a:p>
-          <a:p>
-            <a:r>
-              <a:t>אותו כלי. כמעט אותו מאמץ. פער עצום.</a:t>
-            </a:r>
-          </a:p>
-          <a:p>
-            <a:r>
-              <a:t>והמסקנה הכי חשובה של הערב: ההנחיה היא 80% מהתוצאה.</a:t>
-            </a:r>
-          </a:p>
-          <a:p/>
-          <a:p>
-            <a:r>
-              <a:t>➡️ מעבר: אז איך כותבים הנחיה טובה? יש נוסחה.</a:t>
-            </a:r>
-          </a:p>
-        </p:txBody>
-      </p:sp>
-      <p:sp>
-        <p:nvSpPr>
-          <p:cNvPr id="4" name="Slide Number Placeholder 3"/>
-          <p:cNvSpPr>
-            <a:spLocks noGrp="1"/>
-          </p:cNvSpPr>
-          <p:nvPr>
-            <p:ph type="sldNum" sz="quarter" idx="10"/>
-          </p:nvPr>
-        </p:nvSpPr>
-        <p:spPr/>
-        <p:txBody>
-          <a:bodyPr/>
-          <a:lstStyle/>
-          <a:p>
-            <a:fld id="{F7021451-1387-4CA6-816F-3879F97B5CBC}" type="slidenum">
-              <a:rPr lang="en-US"/>
-              <a:t>4</a:t>
             </a:fld>
             <a:endParaRPr lang="en-US"/>
           </a:p>
@@ -2727,7 +2997,7 @@
           <a:lstStyle/>
           <a:p>
             <a:r>
-              <a:t>⏱ 6 דקות  |  🎯 תרגול ראשון של הנוסחה על משימה אמיתית.</a:t>
+              <a:t>⏱ 5 דקות  |  🎯 תרגול ראשון של הנוסחה על משימה אמיתית.</a:t>
             </a:r>
           </a:p>
           <a:p/>
@@ -3152,7 +3422,7 @@
           <a:p/>
           <a:p>
             <a:r>
-              <a:t>➡️ מעבר: ויש שתי דרכים לעבוד עם כל מה שלמדנו.</a:t>
+              <a:t>➡️ מעבר: ועכשיו, רגע של היגיון: מה בעצם קורה כשלוחצים אנטר?</a:t>
             </a:r>
           </a:p>
         </p:txBody>
@@ -3355,7 +3625,7 @@
           <a:lstStyle/>
           <a:p>
             <a:r>
-              <a:t>⏱ 6 דקות  |  🎯 לתרגל זיהוי ותיקון של הנחיות חלשות, בצורת משחק.</a:t>
+              <a:t>⏱ 5 דקות  |  🎯 לתרגל זיהוי ותיקון של הנחיות חלשות, בצורת משחק.</a:t>
             </a:r>
           </a:p>
           <a:p/>
@@ -4143,7 +4413,7 @@
           <a:lstStyle/>
           <a:p>
             <a:r>
-              <a:t>⏱ 5 דקות  |  🎯 ללמוד מההנחיות הטובות של המשתתפים עצמם.</a:t>
+              <a:t>⏱ 4 דקות  |  🎯 ללמוד מההנחיות הטובות של המשתתפים עצמם.</a:t>
             </a:r>
           </a:p>
           <a:p/>
@@ -8147,7 +8417,7 @@
                 <a:latin typeface="Arial"/>
                 <a:cs typeface="Arial"/>
               </a:rPr>
-              <a:t>נוסחת הזהב וחמשת הכללים</a:t>
+              <a:t>נוסחה, כללים, ואיך זה עובד מבפנים</a:t>
             </a:r>
           </a:p>
         </p:txBody>
@@ -8188,7 +8458,7 @@
                 <a:latin typeface="Arial"/>
                 <a:cs typeface="Arial"/>
               </a:rPr>
-              <a:t>25 דק'</a:t>
+              <a:t>30 דק'</a:t>
             </a:r>
           </a:p>
         </p:txBody>
@@ -8727,7 +8997,7 @@
                 <a:latin typeface="Arial"/>
                 <a:cs typeface="Arial"/>
               </a:rPr>
-              <a:t>לדבר במקום להקליד: Wispr Flow</a:t>
+              <a:t>Wispr Flow ו-8 טריקים לייעול</a:t>
             </a:r>
           </a:p>
         </p:txBody>
@@ -8768,7 +9038,7 @@
                 <a:latin typeface="Arial"/>
                 <a:cs typeface="Arial"/>
               </a:rPr>
-              <a:t>3 דק'</a:t>
+              <a:t>6 דק'</a:t>
             </a:r>
           </a:p>
         </p:txBody>
@@ -13750,7 +14020,7 @@
                 <a:latin typeface="Arial"/>
                 <a:cs typeface="Arial"/>
               </a:rPr>
-              <a:t>🧰 ארגז הכלים של היום</a:t>
+              <a:t>🧠 מה קורה כשלוחצים אנטר?</a:t>
             </a:r>
           </a:p>
         </p:txBody>
@@ -13791,7 +14061,7 @@
                 <a:latin typeface="Arial"/>
                 <a:cs typeface="Arial"/>
               </a:rPr>
-              <a:t>הקישורים להעתקה. חלקם נותנים לכם קרדיטים או ניסיון חינם</a:t>
+              <a:t>ההיגיון שמאחורי הקלעים, בארבעה שלבים</a:t>
             </a:r>
           </a:p>
         </p:txBody>
@@ -13804,13 +14074,57 @@
         </p:nvSpPr>
         <p:spPr>
           <a:xfrm>
-            <a:off x="6208776" y="1874519"/>
-            <a:ext cx="5321808" cy="566928"/>
+            <a:off x="8915400" y="1874519"/>
+            <a:ext cx="2615184" cy="2971800"/>
           </a:xfrm>
           <a:prstGeom prst="roundRect">
             <a:avLst>
-              <a:gd name="adj" fmla="val 25000"/>
+              <a:gd name="adj" fmla="val 3000"/>
             </a:avLst>
+          </a:prstGeom>
+          <a:solidFill>
+            <a:srgbClr val="101620"/>
+          </a:solidFill>
+          <a:ln w="19050">
+            <a:solidFill>
+              <a:srgbClr val="002A80"/>
+            </a:solidFill>
+          </a:ln>
+          <a:effectLst/>
+        </p:spPr>
+        <p:style>
+          <a:lnRef idx="1">
+            <a:schemeClr val="accent1"/>
+          </a:lnRef>
+          <a:fillRef idx="3">
+            <a:schemeClr val="accent1"/>
+          </a:fillRef>
+          <a:effectRef idx="2">
+            <a:schemeClr val="accent1"/>
+          </a:effectRef>
+          <a:fontRef idx="minor">
+            <a:schemeClr val="lt1"/>
+          </a:fontRef>
+        </p:style>
+        <p:txBody>
+          <a:bodyPr rtlCol="0" anchor="ctr"/>
+          <a:lstStyle/>
+          <a:p/>
+        </p:txBody>
+      </p:sp>
+      <p:sp>
+        <p:nvSpPr>
+          <p:cNvPr id="5" name="Oval 4"/>
+          <p:cNvSpPr/>
+          <p:nvPr/>
+        </p:nvSpPr>
+        <p:spPr>
+          <a:xfrm>
+            <a:off x="9857232" y="2057400"/>
+            <a:ext cx="731520" cy="731520"/>
+          </a:xfrm>
+          <a:prstGeom prst="ellipse">
+            <a:avLst/>
           </a:prstGeom>
           <a:solidFill>
             <a:srgbClr val="022349"/>
@@ -13837,107 +14151,165 @@
           </a:fontRef>
         </p:style>
         <p:txBody>
-          <a:bodyPr rtlCol="0" anchor="ctr"/>
-          <a:lstStyle/>
-          <a:p/>
-        </p:txBody>
-      </p:sp>
-      <p:sp>
-        <p:nvSpPr>
-          <p:cNvPr id="5" name="TextBox 4"/>
+          <a:bodyPr rtlCol="0" anchor="ctr" lIns="0" rIns="0" tIns="0" bIns="0"/>
+          <a:lstStyle/>
+          <a:p>
+            <a:pPr rtl="1" algn="ctr" marL="0" indent="0">
+              <a:lnSpc>
+                <a:spcPct val="108000"/>
+              </a:lnSpc>
+              <a:buNone/>
+            </a:pPr>
+            <a:r>
+              <a:rPr sz="2200" b="1" i="0" lang="he-IL">
+                <a:solidFill>
+                  <a:srgbClr val="F2F5FA"/>
+                </a:solidFill>
+                <a:latin typeface="Arial"/>
+                <a:cs typeface="Arial"/>
+              </a:rPr>
+              <a:t>✂️</a:t>
+            </a:r>
+          </a:p>
+        </p:txBody>
+      </p:sp>
+      <p:sp>
+        <p:nvSpPr>
+          <p:cNvPr id="6" name="TextBox 5"/>
           <p:cNvSpPr txBox="1"/>
           <p:nvPr/>
         </p:nvSpPr>
         <p:spPr>
           <a:xfrm>
-            <a:off x="9610344" y="1874519"/>
-            <a:ext cx="1783080" cy="566928"/>
-          </a:xfrm>
-          <a:prstGeom prst="rect">
-            <a:avLst/>
-          </a:prstGeom>
-          <a:noFill/>
-        </p:spPr>
-        <p:txBody>
-          <a:bodyPr wrap="square" lIns="0" rIns="0" tIns="0" bIns="0" anchor="ctr" rtlCol="0">
+            <a:off x="9052560" y="2926080"/>
+            <a:ext cx="2340864" cy="411480"/>
+          </a:xfrm>
+          <a:prstGeom prst="rect">
+            <a:avLst/>
+          </a:prstGeom>
+          <a:noFill/>
+        </p:spPr>
+        <p:txBody>
+          <a:bodyPr wrap="square" lIns="0" rIns="0" tIns="0" bIns="0" anchor="t" rtlCol="0">
             <a:spAutoFit/>
           </a:bodyPr>
           <a:lstStyle/>
           <a:p>
-            <a:pPr rtl="1" algn="r" marL="0" indent="0">
-              <a:lnSpc>
-                <a:spcPct val="108000"/>
-              </a:lnSpc>
-              <a:buNone/>
-            </a:pPr>
-            <a:r>
-              <a:rPr sz="1400" b="1" i="0" lang="he-IL">
-                <a:solidFill>
-                  <a:srgbClr val="F2F5FA"/>
+            <a:pPr rtl="1" algn="ctr" marL="0" indent="0">
+              <a:lnSpc>
+                <a:spcPct val="108000"/>
+              </a:lnSpc>
+              <a:buNone/>
+            </a:pPr>
+            <a:r>
+              <a:rPr sz="1650" b="1" i="0" lang="he-IL">
+                <a:solidFill>
+                  <a:srgbClr val="EBEDF0"/>
                 </a:solidFill>
                 <a:latin typeface="Arial"/>
                 <a:cs typeface="Arial"/>
               </a:rPr>
-              <a:t>ChatGPT</a:t>
-            </a:r>
-          </a:p>
-        </p:txBody>
-      </p:sp>
-      <p:sp>
-        <p:nvSpPr>
-          <p:cNvPr id="6" name="TextBox 5"/>
+              <a:t>חותך לטוקנים</a:t>
+            </a:r>
+          </a:p>
+        </p:txBody>
+      </p:sp>
+      <p:sp>
+        <p:nvSpPr>
+          <p:cNvPr id="7" name="TextBox 6"/>
           <p:cNvSpPr txBox="1"/>
           <p:nvPr/>
         </p:nvSpPr>
         <p:spPr>
           <a:xfrm>
-            <a:off x="6318504" y="1874519"/>
-            <a:ext cx="3264408" cy="566928"/>
-          </a:xfrm>
-          <a:prstGeom prst="rect">
-            <a:avLst/>
-          </a:prstGeom>
-          <a:noFill/>
-        </p:spPr>
-        <p:txBody>
-          <a:bodyPr wrap="square" lIns="0" rIns="0" tIns="0" bIns="0" anchor="ctr" rtlCol="0">
+            <a:off x="9098280" y="3429000"/>
+            <a:ext cx="2249424" cy="1325880"/>
+          </a:xfrm>
+          <a:prstGeom prst="rect">
+            <a:avLst/>
+          </a:prstGeom>
+          <a:noFill/>
+        </p:spPr>
+        <p:txBody>
+          <a:bodyPr wrap="square" lIns="0" rIns="0" tIns="0" bIns="0" anchor="t" rtlCol="0">
             <a:spAutoFit/>
           </a:bodyPr>
           <a:lstStyle/>
           <a:p>
-            <a:pPr rtl="1" algn="l" marL="0" indent="0">
-              <a:lnSpc>
-                <a:spcPct val="108000"/>
-              </a:lnSpc>
-              <a:buNone/>
-            </a:pPr>
-            <a:r>
-              <a:rPr sz="1300" b="0" i="0" lang="he-IL">
-                <a:solidFill>
-                  <a:srgbClr val="6296FF"/>
+            <a:pPr rtl="1" algn="ctr" marL="0" indent="0">
+              <a:lnSpc>
+                <a:spcPct val="115000"/>
+              </a:lnSpc>
+              <a:buNone/>
+            </a:pPr>
+            <a:r>
+              <a:rPr sz="1350" b="0" i="0" lang="he-IL">
+                <a:solidFill>
+                  <a:srgbClr val="A9B4C6"/>
                 </a:solidFill>
                 <a:latin typeface="Arial"/>
                 <a:cs typeface="Arial"/>
               </a:rPr>
-              <a:t>chatgpt.com</a:t>
-            </a:r>
-          </a:p>
-        </p:txBody>
-      </p:sp>
-      <p:sp>
-        <p:nvSpPr>
-          <p:cNvPr id="7" name="Rounded Rectangle 6"/>
-          <p:cNvSpPr/>
-          <p:nvPr/>
-        </p:nvSpPr>
-        <p:spPr>
-          <a:xfrm>
-            <a:off x="6208776" y="2569463"/>
-            <a:ext cx="5321808" cy="566928"/>
+              <a:t>הטקסט נחתך לחתיכות קטנות. מילה = 1 עד 3 טוקנים</a:t>
+            </a:r>
+          </a:p>
+        </p:txBody>
+      </p:sp>
+      <p:sp>
+        <p:nvSpPr>
+          <p:cNvPr id="8" name="TextBox 7"/>
+          <p:cNvSpPr txBox="1"/>
+          <p:nvPr/>
+        </p:nvSpPr>
+        <p:spPr>
+          <a:xfrm>
+            <a:off x="8622792" y="3108960"/>
+            <a:ext cx="274320" cy="457200"/>
+          </a:xfrm>
+          <a:prstGeom prst="rect">
+            <a:avLst/>
+          </a:prstGeom>
+          <a:noFill/>
+        </p:spPr>
+        <p:txBody>
+          <a:bodyPr wrap="square" lIns="0" rIns="0" tIns="0" bIns="0" anchor="t" rtlCol="0">
+            <a:spAutoFit/>
+          </a:bodyPr>
+          <a:lstStyle/>
+          <a:p>
+            <a:pPr rtl="1" algn="ctr" marL="0" indent="0">
+              <a:lnSpc>
+                <a:spcPct val="108000"/>
+              </a:lnSpc>
+              <a:buNone/>
+            </a:pPr>
+            <a:r>
+              <a:rPr sz="2200" b="1" i="0" lang="he-IL">
+                <a:solidFill>
+                  <a:srgbClr val="6296FF"/>
+                </a:solidFill>
+                <a:latin typeface="Arial"/>
+                <a:cs typeface="Arial"/>
+              </a:rPr>
+              <a:t>←</a:t>
+            </a:r>
+          </a:p>
+        </p:txBody>
+      </p:sp>
+      <p:sp>
+        <p:nvSpPr>
+          <p:cNvPr id="9" name="Rounded Rectangle 8"/>
+          <p:cNvSpPr/>
+          <p:nvPr/>
+        </p:nvSpPr>
+        <p:spPr>
+          <a:xfrm>
+            <a:off x="6172200" y="1874519"/>
+            <a:ext cx="2615184" cy="2971800"/>
           </a:xfrm>
           <a:prstGeom prst="roundRect">
             <a:avLst>
-              <a:gd name="adj" fmla="val 25000"/>
+              <a:gd name="adj" fmla="val 3000"/>
             </a:avLst>
           </a:prstGeom>
           <a:solidFill>
@@ -13972,101 +14344,17 @@
       </p:sp>
       <p:sp>
         <p:nvSpPr>
-          <p:cNvPr id="8" name="TextBox 7"/>
-          <p:cNvSpPr txBox="1"/>
-          <p:nvPr/>
-        </p:nvSpPr>
-        <p:spPr>
-          <a:xfrm>
-            <a:off x="9610344" y="2569463"/>
-            <a:ext cx="1783080" cy="566928"/>
-          </a:xfrm>
-          <a:prstGeom prst="rect">
-            <a:avLst/>
-          </a:prstGeom>
-          <a:noFill/>
-        </p:spPr>
-        <p:txBody>
-          <a:bodyPr wrap="square" lIns="0" rIns="0" tIns="0" bIns="0" anchor="ctr" rtlCol="0">
-            <a:spAutoFit/>
-          </a:bodyPr>
-          <a:lstStyle/>
-          <a:p>
-            <a:pPr rtl="1" algn="r" marL="0" indent="0">
-              <a:lnSpc>
-                <a:spcPct val="108000"/>
-              </a:lnSpc>
-              <a:buNone/>
-            </a:pPr>
-            <a:r>
-              <a:rPr sz="1400" b="1" i="0" lang="he-IL">
-                <a:solidFill>
-                  <a:srgbClr val="F2F5FA"/>
-                </a:solidFill>
-                <a:latin typeface="Arial"/>
-                <a:cs typeface="Arial"/>
-              </a:rPr>
-              <a:t>Claude</a:t>
-            </a:r>
-          </a:p>
-        </p:txBody>
-      </p:sp>
-      <p:sp>
-        <p:nvSpPr>
-          <p:cNvPr id="9" name="TextBox 8"/>
-          <p:cNvSpPr txBox="1"/>
-          <p:nvPr/>
-        </p:nvSpPr>
-        <p:spPr>
-          <a:xfrm>
-            <a:off x="6318504" y="2569463"/>
-            <a:ext cx="3264408" cy="566928"/>
-          </a:xfrm>
-          <a:prstGeom prst="rect">
-            <a:avLst/>
-          </a:prstGeom>
-          <a:noFill/>
-        </p:spPr>
-        <p:txBody>
-          <a:bodyPr wrap="square" lIns="0" rIns="0" tIns="0" bIns="0" anchor="ctr" rtlCol="0">
-            <a:spAutoFit/>
-          </a:bodyPr>
-          <a:lstStyle/>
-          <a:p>
-            <a:pPr rtl="1" algn="l" marL="0" indent="0">
-              <a:lnSpc>
-                <a:spcPct val="108000"/>
-              </a:lnSpc>
-              <a:buNone/>
-            </a:pPr>
-            <a:r>
-              <a:rPr sz="1300" b="0" i="0" lang="he-IL">
-                <a:solidFill>
-                  <a:srgbClr val="6296FF"/>
-                </a:solidFill>
-                <a:latin typeface="Arial"/>
-                <a:cs typeface="Arial"/>
-              </a:rPr>
-              <a:t>claude.ai</a:t>
-            </a:r>
-          </a:p>
-        </p:txBody>
-      </p:sp>
-      <p:sp>
-        <p:nvSpPr>
-          <p:cNvPr id="10" name="Rounded Rectangle 9"/>
-          <p:cNvSpPr/>
-          <p:nvPr/>
-        </p:nvSpPr>
-        <p:spPr>
-          <a:xfrm>
-            <a:off x="6208776" y="3264408"/>
-            <a:ext cx="5321808" cy="566928"/>
-          </a:xfrm>
-          <a:prstGeom prst="roundRect">
-            <a:avLst>
-              <a:gd name="adj" fmla="val 25000"/>
-            </a:avLst>
+          <p:cNvPr id="10" name="Oval 9"/>
+          <p:cNvSpPr/>
+          <p:nvPr/>
+        </p:nvSpPr>
+        <p:spPr>
+          <a:xfrm>
+            <a:off x="7114031" y="2057400"/>
+            <a:ext cx="731520" cy="731520"/>
+          </a:xfrm>
+          <a:prstGeom prst="ellipse">
+            <a:avLst/>
           </a:prstGeom>
           <a:solidFill>
             <a:srgbClr val="022349"/>
@@ -14093,9 +14381,26 @@
           </a:fontRef>
         </p:style>
         <p:txBody>
-          <a:bodyPr rtlCol="0" anchor="ctr"/>
-          <a:lstStyle/>
-          <a:p/>
+          <a:bodyPr rtlCol="0" anchor="ctr" lIns="0" rIns="0" tIns="0" bIns="0"/>
+          <a:lstStyle/>
+          <a:p>
+            <a:pPr rtl="1" algn="ctr" marL="0" indent="0">
+              <a:lnSpc>
+                <a:spcPct val="108000"/>
+              </a:lnSpc>
+              <a:buNone/>
+            </a:pPr>
+            <a:r>
+              <a:rPr sz="2200" b="1" i="0" lang="he-IL">
+                <a:solidFill>
+                  <a:srgbClr val="F2F5FA"/>
+                </a:solidFill>
+                <a:latin typeface="Arial"/>
+                <a:cs typeface="Arial"/>
+              </a:rPr>
+              <a:t>📚</a:t>
+            </a:r>
+          </a:p>
         </p:txBody>
       </p:sp>
       <p:sp>
@@ -14106,35 +14411,35 @@
         </p:nvSpPr>
         <p:spPr>
           <a:xfrm>
-            <a:off x="9610344" y="3264408"/>
-            <a:ext cx="1783080" cy="566928"/>
-          </a:xfrm>
-          <a:prstGeom prst="rect">
-            <a:avLst/>
-          </a:prstGeom>
-          <a:noFill/>
-        </p:spPr>
-        <p:txBody>
-          <a:bodyPr wrap="square" lIns="0" rIns="0" tIns="0" bIns="0" anchor="ctr" rtlCol="0">
+            <a:off x="6309360" y="2926080"/>
+            <a:ext cx="2340864" cy="411480"/>
+          </a:xfrm>
+          <a:prstGeom prst="rect">
+            <a:avLst/>
+          </a:prstGeom>
+          <a:noFill/>
+        </p:spPr>
+        <p:txBody>
+          <a:bodyPr wrap="square" lIns="0" rIns="0" tIns="0" bIns="0" anchor="t" rtlCol="0">
             <a:spAutoFit/>
           </a:bodyPr>
           <a:lstStyle/>
           <a:p>
-            <a:pPr rtl="1" algn="r" marL="0" indent="0">
-              <a:lnSpc>
-                <a:spcPct val="108000"/>
-              </a:lnSpc>
-              <a:buNone/>
-            </a:pPr>
-            <a:r>
-              <a:rPr sz="1400" b="1" i="0" lang="he-IL">
-                <a:solidFill>
-                  <a:srgbClr val="F2F5FA"/>
+            <a:pPr rtl="1" algn="ctr" marL="0" indent="0">
+              <a:lnSpc>
+                <a:spcPct val="108000"/>
+              </a:lnSpc>
+              <a:buNone/>
+            </a:pPr>
+            <a:r>
+              <a:rPr sz="1650" b="1" i="0" lang="he-IL">
+                <a:solidFill>
+                  <a:srgbClr val="EBEDF0"/>
                 </a:solidFill>
                 <a:latin typeface="Arial"/>
                 <a:cs typeface="Arial"/>
               </a:rPr>
-              <a:t>Gemini</a:t>
+              <a:t>קורא את כל השיחה</a:t>
             </a:r>
           </a:p>
         </p:txBody>
@@ -14147,54 +14452,139 @@
         </p:nvSpPr>
         <p:spPr>
           <a:xfrm>
-            <a:off x="6318504" y="3264408"/>
-            <a:ext cx="3264408" cy="566928"/>
-          </a:xfrm>
-          <a:prstGeom prst="rect">
-            <a:avLst/>
-          </a:prstGeom>
-          <a:noFill/>
-        </p:spPr>
-        <p:txBody>
-          <a:bodyPr wrap="square" lIns="0" rIns="0" tIns="0" bIns="0" anchor="ctr" rtlCol="0">
+            <a:off x="6355080" y="3429000"/>
+            <a:ext cx="2249424" cy="1325880"/>
+          </a:xfrm>
+          <a:prstGeom prst="rect">
+            <a:avLst/>
+          </a:prstGeom>
+          <a:noFill/>
+        </p:spPr>
+        <p:txBody>
+          <a:bodyPr wrap="square" lIns="0" rIns="0" tIns="0" bIns="0" anchor="t" rtlCol="0">
             <a:spAutoFit/>
           </a:bodyPr>
           <a:lstStyle/>
           <a:p>
-            <a:pPr rtl="1" algn="l" marL="0" indent="0">
-              <a:lnSpc>
-                <a:spcPct val="108000"/>
-              </a:lnSpc>
-              <a:buNone/>
-            </a:pPr>
-            <a:r>
-              <a:rPr sz="1300" b="0" i="0" lang="he-IL">
-                <a:solidFill>
-                  <a:srgbClr val="6296FF"/>
+            <a:pPr rtl="1" algn="ctr" marL="0" indent="0">
+              <a:lnSpc>
+                <a:spcPct val="115000"/>
+              </a:lnSpc>
+              <a:buNone/>
+            </a:pPr>
+            <a:r>
+              <a:rPr sz="1350" b="0" i="0" lang="he-IL">
+                <a:solidFill>
+                  <a:srgbClr val="A9B4C6"/>
                 </a:solidFill>
                 <a:latin typeface="Arial"/>
                 <a:cs typeface="Arial"/>
               </a:rPr>
-              <a:t>gemini.google.com</a:t>
-            </a:r>
-          </a:p>
-        </p:txBody>
-      </p:sp>
-      <p:sp>
-        <p:nvSpPr>
-          <p:cNvPr id="13" name="Rounded Rectangle 12"/>
-          <p:cNvSpPr/>
-          <p:nvPr/>
-        </p:nvSpPr>
-        <p:spPr>
-          <a:xfrm>
-            <a:off x="658368" y="1874519"/>
-            <a:ext cx="5321808" cy="566928"/>
+              <a:t>בכל הודעה נשלחת כל השיחה מההתחלה: חלון ההקשר</a:t>
+            </a:r>
+          </a:p>
+        </p:txBody>
+      </p:sp>
+      <p:sp>
+        <p:nvSpPr>
+          <p:cNvPr id="13" name="TextBox 12"/>
+          <p:cNvSpPr txBox="1"/>
+          <p:nvPr/>
+        </p:nvSpPr>
+        <p:spPr>
+          <a:xfrm>
+            <a:off x="5879592" y="3108960"/>
+            <a:ext cx="274320" cy="457200"/>
+          </a:xfrm>
+          <a:prstGeom prst="rect">
+            <a:avLst/>
+          </a:prstGeom>
+          <a:noFill/>
+        </p:spPr>
+        <p:txBody>
+          <a:bodyPr wrap="square" lIns="0" rIns="0" tIns="0" bIns="0" anchor="t" rtlCol="0">
+            <a:spAutoFit/>
+          </a:bodyPr>
+          <a:lstStyle/>
+          <a:p>
+            <a:pPr rtl="1" algn="ctr" marL="0" indent="0">
+              <a:lnSpc>
+                <a:spcPct val="108000"/>
+              </a:lnSpc>
+              <a:buNone/>
+            </a:pPr>
+            <a:r>
+              <a:rPr sz="2200" b="1" i="0" lang="he-IL">
+                <a:solidFill>
+                  <a:srgbClr val="6296FF"/>
+                </a:solidFill>
+                <a:latin typeface="Arial"/>
+                <a:cs typeface="Arial"/>
+              </a:rPr>
+              <a:t>←</a:t>
+            </a:r>
+          </a:p>
+        </p:txBody>
+      </p:sp>
+      <p:sp>
+        <p:nvSpPr>
+          <p:cNvPr id="14" name="Rounded Rectangle 13"/>
+          <p:cNvSpPr/>
+          <p:nvPr/>
+        </p:nvSpPr>
+        <p:spPr>
+          <a:xfrm>
+            <a:off x="3429000" y="1874519"/>
+            <a:ext cx="2615184" cy="2971800"/>
           </a:xfrm>
           <a:prstGeom prst="roundRect">
             <a:avLst>
-              <a:gd name="adj" fmla="val 25000"/>
+              <a:gd name="adj" fmla="val 3000"/>
             </a:avLst>
+          </a:prstGeom>
+          <a:solidFill>
+            <a:srgbClr val="101620"/>
+          </a:solidFill>
+          <a:ln w="19050">
+            <a:solidFill>
+              <a:srgbClr val="002A80"/>
+            </a:solidFill>
+          </a:ln>
+          <a:effectLst/>
+        </p:spPr>
+        <p:style>
+          <a:lnRef idx="1">
+            <a:schemeClr val="accent1"/>
+          </a:lnRef>
+          <a:fillRef idx="3">
+            <a:schemeClr val="accent1"/>
+          </a:fillRef>
+          <a:effectRef idx="2">
+            <a:schemeClr val="accent1"/>
+          </a:effectRef>
+          <a:fontRef idx="minor">
+            <a:schemeClr val="lt1"/>
+          </a:fontRef>
+        </p:style>
+        <p:txBody>
+          <a:bodyPr rtlCol="0" anchor="ctr"/>
+          <a:lstStyle/>
+          <a:p/>
+        </p:txBody>
+      </p:sp>
+      <p:sp>
+        <p:nvSpPr>
+          <p:cNvPr id="15" name="Oval 14"/>
+          <p:cNvSpPr/>
+          <p:nvPr/>
+        </p:nvSpPr>
+        <p:spPr>
+          <a:xfrm>
+            <a:off x="4370831" y="2057400"/>
+            <a:ext cx="731520" cy="731520"/>
+          </a:xfrm>
+          <a:prstGeom prst="ellipse">
+            <a:avLst/>
           </a:prstGeom>
           <a:solidFill>
             <a:srgbClr val="022349"/>
@@ -14221,108 +14611,210 @@
           </a:fontRef>
         </p:style>
         <p:txBody>
-          <a:bodyPr rtlCol="0" anchor="ctr"/>
-          <a:lstStyle/>
-          <a:p/>
-        </p:txBody>
-      </p:sp>
-      <p:sp>
-        <p:nvSpPr>
-          <p:cNvPr id="14" name="TextBox 13"/>
+          <a:bodyPr rtlCol="0" anchor="ctr" lIns="0" rIns="0" tIns="0" bIns="0"/>
+          <a:lstStyle/>
+          <a:p>
+            <a:pPr rtl="1" algn="ctr" marL="0" indent="0">
+              <a:lnSpc>
+                <a:spcPct val="108000"/>
+              </a:lnSpc>
+              <a:buNone/>
+            </a:pPr>
+            <a:r>
+              <a:rPr sz="2200" b="1" i="0" lang="he-IL">
+                <a:solidFill>
+                  <a:srgbClr val="F2F5FA"/>
+                </a:solidFill>
+                <a:latin typeface="Arial"/>
+                <a:cs typeface="Arial"/>
+              </a:rPr>
+              <a:t>🎲</a:t>
+            </a:r>
+          </a:p>
+        </p:txBody>
+      </p:sp>
+      <p:sp>
+        <p:nvSpPr>
+          <p:cNvPr id="16" name="TextBox 15"/>
           <p:cNvSpPr txBox="1"/>
           <p:nvPr/>
         </p:nvSpPr>
         <p:spPr>
           <a:xfrm>
-            <a:off x="4059936" y="1874519"/>
-            <a:ext cx="1783080" cy="566928"/>
-          </a:xfrm>
-          <a:prstGeom prst="rect">
-            <a:avLst/>
-          </a:prstGeom>
-          <a:noFill/>
-        </p:spPr>
-        <p:txBody>
-          <a:bodyPr wrap="square" lIns="0" rIns="0" tIns="0" bIns="0" anchor="ctr" rtlCol="0">
+            <a:off x="3566160" y="2926080"/>
+            <a:ext cx="2340864" cy="411480"/>
+          </a:xfrm>
+          <a:prstGeom prst="rect">
+            <a:avLst/>
+          </a:prstGeom>
+          <a:noFill/>
+        </p:spPr>
+        <p:txBody>
+          <a:bodyPr wrap="square" lIns="0" rIns="0" tIns="0" bIns="0" anchor="t" rtlCol="0">
             <a:spAutoFit/>
           </a:bodyPr>
           <a:lstStyle/>
           <a:p>
-            <a:pPr rtl="1" algn="r" marL="0" indent="0">
-              <a:lnSpc>
-                <a:spcPct val="108000"/>
-              </a:lnSpc>
-              <a:buNone/>
-            </a:pPr>
-            <a:r>
-              <a:rPr sz="1400" b="1" i="0" lang="he-IL">
-                <a:solidFill>
-                  <a:srgbClr val="F2F5FA"/>
+            <a:pPr rtl="1" algn="ctr" marL="0" indent="0">
+              <a:lnSpc>
+                <a:spcPct val="108000"/>
+              </a:lnSpc>
+              <a:buNone/>
+            </a:pPr>
+            <a:r>
+              <a:rPr sz="1650" b="1" i="0" lang="he-IL">
+                <a:solidFill>
+                  <a:srgbClr val="EBEDF0"/>
                 </a:solidFill>
                 <a:latin typeface="Arial"/>
                 <a:cs typeface="Arial"/>
               </a:rPr>
-              <a:t>Perplexity</a:t>
-            </a:r>
-          </a:p>
-        </p:txBody>
-      </p:sp>
-      <p:sp>
-        <p:nvSpPr>
-          <p:cNvPr id="15" name="TextBox 14"/>
+              <a:t>מנחש טוקן אחרי טוקן</a:t>
+            </a:r>
+          </a:p>
+        </p:txBody>
+      </p:sp>
+      <p:sp>
+        <p:nvSpPr>
+          <p:cNvPr id="17" name="TextBox 16"/>
           <p:cNvSpPr txBox="1"/>
           <p:nvPr/>
         </p:nvSpPr>
         <p:spPr>
           <a:xfrm>
-            <a:off x="768096" y="1874519"/>
-            <a:ext cx="3264408" cy="566928"/>
-          </a:xfrm>
-          <a:prstGeom prst="rect">
-            <a:avLst/>
-          </a:prstGeom>
-          <a:noFill/>
-        </p:spPr>
-        <p:txBody>
-          <a:bodyPr wrap="square" lIns="0" rIns="0" tIns="0" bIns="0" anchor="ctr" rtlCol="0">
+            <a:off x="3611880" y="3429000"/>
+            <a:ext cx="2249424" cy="1325880"/>
+          </a:xfrm>
+          <a:prstGeom prst="rect">
+            <a:avLst/>
+          </a:prstGeom>
+          <a:noFill/>
+        </p:spPr>
+        <p:txBody>
+          <a:bodyPr wrap="square" lIns="0" rIns="0" tIns="0" bIns="0" anchor="t" rtlCol="0">
             <a:spAutoFit/>
           </a:bodyPr>
           <a:lstStyle/>
           <a:p>
-            <a:pPr rtl="1" algn="l" marL="0" indent="0">
-              <a:lnSpc>
-                <a:spcPct val="108000"/>
-              </a:lnSpc>
-              <a:buNone/>
-            </a:pPr>
-            <a:r>
-              <a:rPr sz="1300" b="0" i="0" lang="he-IL">
-                <a:solidFill>
-                  <a:srgbClr val="6296FF"/>
+            <a:pPr rtl="1" algn="ctr" marL="0" indent="0">
+              <a:lnSpc>
+                <a:spcPct val="115000"/>
+              </a:lnSpc>
+              <a:buNone/>
+            </a:pPr>
+            <a:r>
+              <a:rPr sz="1350" b="0" i="0" lang="he-IL">
+                <a:solidFill>
+                  <a:srgbClr val="A9B4C6"/>
                 </a:solidFill>
                 <a:latin typeface="Arial"/>
                 <a:cs typeface="Arial"/>
               </a:rPr>
-              <a:t>perplexity.ai</a:t>
-            </a:r>
-          </a:p>
-        </p:txBody>
-      </p:sp>
-      <p:sp>
-        <p:nvSpPr>
-          <p:cNvPr id="16" name="Rounded Rectangle 15"/>
-          <p:cNvSpPr/>
-          <p:nvPr/>
-        </p:nvSpPr>
-        <p:spPr>
-          <a:xfrm>
-            <a:off x="658368" y="2569463"/>
-            <a:ext cx="5321808" cy="566928"/>
+              <a:t>כל פעם בוחר את ההמשך הכי סביר, כמו במשחק המילה הבאה</a:t>
+            </a:r>
+          </a:p>
+        </p:txBody>
+      </p:sp>
+      <p:sp>
+        <p:nvSpPr>
+          <p:cNvPr id="18" name="TextBox 17"/>
+          <p:cNvSpPr txBox="1"/>
+          <p:nvPr/>
+        </p:nvSpPr>
+        <p:spPr>
+          <a:xfrm>
+            <a:off x="3136392" y="3108960"/>
+            <a:ext cx="274320" cy="457200"/>
+          </a:xfrm>
+          <a:prstGeom prst="rect">
+            <a:avLst/>
+          </a:prstGeom>
+          <a:noFill/>
+        </p:spPr>
+        <p:txBody>
+          <a:bodyPr wrap="square" lIns="0" rIns="0" tIns="0" bIns="0" anchor="t" rtlCol="0">
+            <a:spAutoFit/>
+          </a:bodyPr>
+          <a:lstStyle/>
+          <a:p>
+            <a:pPr rtl="1" algn="ctr" marL="0" indent="0">
+              <a:lnSpc>
+                <a:spcPct val="108000"/>
+              </a:lnSpc>
+              <a:buNone/>
+            </a:pPr>
+            <a:r>
+              <a:rPr sz="2200" b="1" i="0" lang="he-IL">
+                <a:solidFill>
+                  <a:srgbClr val="6296FF"/>
+                </a:solidFill>
+                <a:latin typeface="Arial"/>
+                <a:cs typeface="Arial"/>
+              </a:rPr>
+              <a:t>←</a:t>
+            </a:r>
+          </a:p>
+        </p:txBody>
+      </p:sp>
+      <p:sp>
+        <p:nvSpPr>
+          <p:cNvPr id="19" name="Rounded Rectangle 18"/>
+          <p:cNvSpPr/>
+          <p:nvPr/>
+        </p:nvSpPr>
+        <p:spPr>
+          <a:xfrm>
+            <a:off x="685800" y="1874519"/>
+            <a:ext cx="2615184" cy="2971800"/>
           </a:xfrm>
           <a:prstGeom prst="roundRect">
             <a:avLst>
-              <a:gd name="adj" fmla="val 25000"/>
+              <a:gd name="adj" fmla="val 3000"/>
             </a:avLst>
+          </a:prstGeom>
+          <a:solidFill>
+            <a:srgbClr val="101620"/>
+          </a:solidFill>
+          <a:ln w="19050">
+            <a:solidFill>
+              <a:srgbClr val="002A80"/>
+            </a:solidFill>
+          </a:ln>
+          <a:effectLst/>
+        </p:spPr>
+        <p:style>
+          <a:lnRef idx="1">
+            <a:schemeClr val="accent1"/>
+          </a:lnRef>
+          <a:fillRef idx="3">
+            <a:schemeClr val="accent1"/>
+          </a:fillRef>
+          <a:effectRef idx="2">
+            <a:schemeClr val="accent1"/>
+          </a:effectRef>
+          <a:fontRef idx="minor">
+            <a:schemeClr val="lt1"/>
+          </a:fontRef>
+        </p:style>
+        <p:txBody>
+          <a:bodyPr rtlCol="0" anchor="ctr"/>
+          <a:lstStyle/>
+          <a:p/>
+        </p:txBody>
+      </p:sp>
+      <p:sp>
+        <p:nvSpPr>
+          <p:cNvPr id="20" name="Oval 19"/>
+          <p:cNvSpPr/>
+          <p:nvPr/>
+        </p:nvSpPr>
+        <p:spPr>
+          <a:xfrm>
+            <a:off x="1627631" y="2057400"/>
+            <a:ext cx="731520" cy="731520"/>
+          </a:xfrm>
+          <a:prstGeom prst="ellipse">
+            <a:avLst/>
           </a:prstGeom>
           <a:solidFill>
             <a:srgbClr val="022349"/>
@@ -14349,6 +14841,149 @@
           </a:fontRef>
         </p:style>
         <p:txBody>
+          <a:bodyPr rtlCol="0" anchor="ctr" lIns="0" rIns="0" tIns="0" bIns="0"/>
+          <a:lstStyle/>
+          <a:p>
+            <a:pPr rtl="1" algn="ctr" marL="0" indent="0">
+              <a:lnSpc>
+                <a:spcPct val="108000"/>
+              </a:lnSpc>
+              <a:buNone/>
+            </a:pPr>
+            <a:r>
+              <a:rPr sz="2200" b="1" i="0" lang="he-IL">
+                <a:solidFill>
+                  <a:srgbClr val="F2F5FA"/>
+                </a:solidFill>
+                <a:latin typeface="Arial"/>
+                <a:cs typeface="Arial"/>
+              </a:rPr>
+              <a:t>⌨️</a:t>
+            </a:r>
+          </a:p>
+        </p:txBody>
+      </p:sp>
+      <p:sp>
+        <p:nvSpPr>
+          <p:cNvPr id="21" name="TextBox 20"/>
+          <p:cNvSpPr txBox="1"/>
+          <p:nvPr/>
+        </p:nvSpPr>
+        <p:spPr>
+          <a:xfrm>
+            <a:off x="822960" y="2926080"/>
+            <a:ext cx="2340864" cy="411480"/>
+          </a:xfrm>
+          <a:prstGeom prst="rect">
+            <a:avLst/>
+          </a:prstGeom>
+          <a:noFill/>
+        </p:spPr>
+        <p:txBody>
+          <a:bodyPr wrap="square" lIns="0" rIns="0" tIns="0" bIns="0" anchor="t" rtlCol="0">
+            <a:spAutoFit/>
+          </a:bodyPr>
+          <a:lstStyle/>
+          <a:p>
+            <a:pPr rtl="1" algn="ctr" marL="0" indent="0">
+              <a:lnSpc>
+                <a:spcPct val="108000"/>
+              </a:lnSpc>
+              <a:buNone/>
+            </a:pPr>
+            <a:r>
+              <a:rPr sz="1650" b="1" i="0" lang="he-IL">
+                <a:solidFill>
+                  <a:srgbClr val="EBEDF0"/>
+                </a:solidFill>
+                <a:latin typeface="Arial"/>
+                <a:cs typeface="Arial"/>
+              </a:rPr>
+              <a:t>כותב מול העיניים</a:t>
+            </a:r>
+          </a:p>
+        </p:txBody>
+      </p:sp>
+      <p:sp>
+        <p:nvSpPr>
+          <p:cNvPr id="22" name="TextBox 21"/>
+          <p:cNvSpPr txBox="1"/>
+          <p:nvPr/>
+        </p:nvSpPr>
+        <p:spPr>
+          <a:xfrm>
+            <a:off x="868680" y="3429000"/>
+            <a:ext cx="2249424" cy="1325880"/>
+          </a:xfrm>
+          <a:prstGeom prst="rect">
+            <a:avLst/>
+          </a:prstGeom>
+          <a:noFill/>
+        </p:spPr>
+        <p:txBody>
+          <a:bodyPr wrap="square" lIns="0" rIns="0" tIns="0" bIns="0" anchor="t" rtlCol="0">
+            <a:spAutoFit/>
+          </a:bodyPr>
+          <a:lstStyle/>
+          <a:p>
+            <a:pPr rtl="1" algn="ctr" marL="0" indent="0">
+              <a:lnSpc>
+                <a:spcPct val="115000"/>
+              </a:lnSpc>
+              <a:buNone/>
+            </a:pPr>
+            <a:r>
+              <a:rPr sz="1350" b="0" i="0" lang="he-IL">
+                <a:solidFill>
+                  <a:srgbClr val="A9B4C6"/>
+                </a:solidFill>
+                <a:latin typeface="Arial"/>
+                <a:cs typeface="Arial"/>
+              </a:rPr>
+              <a:t>לכן התשובה "מוקלדת" לאט, ולכן היא שונה בכל פעם</a:t>
+            </a:r>
+          </a:p>
+        </p:txBody>
+      </p:sp>
+      <p:sp>
+        <p:nvSpPr>
+          <p:cNvPr id="23" name="Rounded Rectangle 22"/>
+          <p:cNvSpPr/>
+          <p:nvPr/>
+        </p:nvSpPr>
+        <p:spPr>
+          <a:xfrm>
+            <a:off x="658368" y="5029200"/>
+            <a:ext cx="10872216" cy="548640"/>
+          </a:xfrm>
+          <a:prstGeom prst="roundRect">
+            <a:avLst>
+              <a:gd name="adj" fmla="val 3000"/>
+            </a:avLst>
+          </a:prstGeom>
+          <a:solidFill>
+            <a:srgbClr val="022349"/>
+          </a:solidFill>
+          <a:ln>
+            <a:noFill/>
+          </a:ln>
+          <a:effectLst/>
+        </p:spPr>
+        <p:style>
+          <a:lnRef idx="1">
+            <a:schemeClr val="accent1"/>
+          </a:lnRef>
+          <a:fillRef idx="3">
+            <a:schemeClr val="accent1"/>
+          </a:fillRef>
+          <a:effectRef idx="2">
+            <a:schemeClr val="accent1"/>
+          </a:effectRef>
+          <a:fontRef idx="minor">
+            <a:schemeClr val="lt1"/>
+          </a:fontRef>
+        </p:style>
+        <p:txBody>
           <a:bodyPr rtlCol="0" anchor="ctr"/>
           <a:lstStyle/>
           <a:p/>
@@ -14356,14 +14991,14 @@
       </p:sp>
       <p:sp>
         <p:nvSpPr>
-          <p:cNvPr id="17" name="TextBox 16"/>
+          <p:cNvPr id="24" name="TextBox 23"/>
           <p:cNvSpPr txBox="1"/>
           <p:nvPr/>
         </p:nvSpPr>
         <p:spPr>
           <a:xfrm>
-            <a:off x="4059936" y="2569463"/>
-            <a:ext cx="1783080" cy="566928"/>
+            <a:off x="886968" y="5029200"/>
+            <a:ext cx="10415016" cy="548640"/>
           </a:xfrm>
           <a:prstGeom prst="rect">
             <a:avLst/>
@@ -14383,28 +15018,72 @@
               <a:buNone/>
             </a:pPr>
             <a:r>
-              <a:rPr sz="1400" b="1" i="0" lang="he-IL">
-                <a:solidFill>
-                  <a:srgbClr val="F2F5FA"/>
+              <a:rPr sz="1400" b="0" i="0" lang="he-IL">
+                <a:solidFill>
+                  <a:srgbClr val="EBEDF0"/>
                 </a:solidFill>
                 <a:latin typeface="Arial"/>
                 <a:cs typeface="Arial"/>
               </a:rPr>
-              <a:t>NotebookLM</a:t>
-            </a:r>
-          </a:p>
-        </p:txBody>
-      </p:sp>
-      <p:sp>
-        <p:nvSpPr>
-          <p:cNvPr id="18" name="TextBox 17"/>
+              <a:t>📏  חלון ההקשר = הזיכרון לטווח קצר. שיחה ארוכה מדי? ההתחלה "נשכחת".</a:t>
+            </a:r>
+          </a:p>
+        </p:txBody>
+      </p:sp>
+      <p:sp>
+        <p:nvSpPr>
+          <p:cNvPr id="25" name="Rounded Rectangle 24"/>
+          <p:cNvSpPr/>
+          <p:nvPr/>
+        </p:nvSpPr>
+        <p:spPr>
+          <a:xfrm>
+            <a:off x="658368" y="5669280"/>
+            <a:ext cx="10872216" cy="548640"/>
+          </a:xfrm>
+          <a:prstGeom prst="roundRect">
+            <a:avLst>
+              <a:gd name="adj" fmla="val 3000"/>
+            </a:avLst>
+          </a:prstGeom>
+          <a:solidFill>
+            <a:srgbClr val="4B3F02"/>
+          </a:solidFill>
+          <a:ln>
+            <a:noFill/>
+          </a:ln>
+          <a:effectLst/>
+        </p:spPr>
+        <p:style>
+          <a:lnRef idx="1">
+            <a:schemeClr val="accent1"/>
+          </a:lnRef>
+          <a:fillRef idx="3">
+            <a:schemeClr val="accent1"/>
+          </a:fillRef>
+          <a:effectRef idx="2">
+            <a:schemeClr val="accent1"/>
+          </a:effectRef>
+          <a:fontRef idx="minor">
+            <a:schemeClr val="lt1"/>
+          </a:fontRef>
+        </p:style>
+        <p:txBody>
+          <a:bodyPr rtlCol="0" anchor="ctr"/>
+          <a:lstStyle/>
+          <a:p/>
+        </p:txBody>
+      </p:sp>
+      <p:sp>
+        <p:nvSpPr>
+          <p:cNvPr id="26" name="TextBox 25"/>
           <p:cNvSpPr txBox="1"/>
           <p:nvPr/>
         </p:nvSpPr>
         <p:spPr>
           <a:xfrm>
-            <a:off x="768096" y="2569463"/>
-            <a:ext cx="3264408" cy="566928"/>
+            <a:off x="886968" y="5669280"/>
+            <a:ext cx="10415016" cy="548640"/>
           </a:xfrm>
           <a:prstGeom prst="rect">
             <a:avLst/>
@@ -14417,40 +15096,220 @@
           </a:bodyPr>
           <a:lstStyle/>
           <a:p>
-            <a:pPr rtl="1" algn="l" marL="0" indent="0">
-              <a:lnSpc>
-                <a:spcPct val="108000"/>
-              </a:lnSpc>
-              <a:buNone/>
-            </a:pPr>
-            <a:r>
-              <a:rPr sz="1300" b="0" i="0" lang="he-IL">
-                <a:solidFill>
-                  <a:srgbClr val="6296FF"/>
+            <a:pPr rtl="1" algn="r" marL="0" indent="0">
+              <a:lnSpc>
+                <a:spcPct val="108000"/>
+              </a:lnSpc>
+              <a:buNone/>
+            </a:pPr>
+            <a:r>
+              <a:rPr sz="1400" b="0" i="0" lang="he-IL">
+                <a:solidFill>
+                  <a:srgbClr val="EBEDF0"/>
                 </a:solidFill>
                 <a:latin typeface="Arial"/>
                 <a:cs typeface="Arial"/>
               </a:rPr>
-              <a:t>notebooklm.google.com</a:t>
-            </a:r>
-          </a:p>
-        </p:txBody>
-      </p:sp>
-      <p:sp>
-        <p:nvSpPr>
-          <p:cNvPr id="19" name="Rounded Rectangle 18"/>
-          <p:cNvSpPr/>
-          <p:nvPr/>
-        </p:nvSpPr>
-        <p:spPr>
-          <a:xfrm>
-            <a:off x="658368" y="3264408"/>
-            <a:ext cx="5321808" cy="566928"/>
+              <a:t>🇮🇱  עברית "יקרה" יותר: אותו משפט בעברית צורך בערך פי 2 טוקנים מאשר באנגלית.</a:t>
+            </a:r>
+          </a:p>
+        </p:txBody>
+      </p:sp>
+      <p:sp>
+        <p:nvSpPr>
+          <p:cNvPr id="27" name="TextBox 26"/>
+          <p:cNvSpPr txBox="1"/>
+          <p:nvPr/>
+        </p:nvSpPr>
+        <p:spPr>
+          <a:xfrm>
+            <a:off x="6675120" y="6473952"/>
+            <a:ext cx="4846320" cy="292608"/>
+          </a:xfrm>
+          <a:prstGeom prst="rect">
+            <a:avLst/>
+          </a:prstGeom>
+          <a:noFill/>
+        </p:spPr>
+        <p:txBody>
+          <a:bodyPr wrap="none" lIns="0" rIns="0" tIns="0" bIns="0">
+            <a:spAutoFit/>
+          </a:bodyPr>
+          <a:lstStyle/>
+          <a:p>
+            <a:pPr algn="r" rtl="1"/>
+            <a:r>
+              <a:rPr sz="1000">
+                <a:solidFill>
+                  <a:srgbClr val="8A96AA"/>
+                </a:solidFill>
+                <a:latin typeface="Arial"/>
+                <a:cs typeface="Arial"/>
+              </a:rPr>
+              <a:t>© נערך על ידי AI Finance</a:t>
+            </a:r>
+          </a:p>
+        </p:txBody>
+      </p:sp>
+    </p:spTree>
+  </p:cSld>
+  <p:clrMapOvr>
+    <a:masterClrMapping/>
+  </p:clrMapOvr>
+</p:sld>
+</file>
+
+<file path=ppt/slides/slide2009.xml><?xml version="1.0" encoding="utf-8"?>
+<p:sld xmlns:a="http://schemas.openxmlformats.org/drawingml/2006/main" xmlns:p="http://schemas.openxmlformats.org/presentationml/2006/main" xmlns:r="http://schemas.openxmlformats.org/officeDocument/2006/relationships">
+  <p:cSld>
+    <p:spTree>
+      <p:nvGrpSpPr>
+        <p:cNvPr id="1" name=""/>
+        <p:cNvGrpSpPr/>
+        <p:nvPr/>
+      </p:nvGrpSpPr>
+      <p:grpSpPr/>
+      <p:sp>
+        <p:nvSpPr>
+          <p:cNvPr id="2" name="Title"/>
+          <p:cNvSpPr txBox="1"/>
+          <p:nvPr/>
+        </p:nvSpPr>
+        <p:spPr>
+          <a:xfrm>
+            <a:off x="658368" y="502920"/>
+            <a:ext cx="10872216" cy="640080"/>
+          </a:xfrm>
+          <a:prstGeom prst="rect">
+            <a:avLst/>
+          </a:prstGeom>
+          <a:noFill/>
+        </p:spPr>
+        <p:txBody>
+          <a:bodyPr wrap="square" lIns="0" rIns="0" tIns="0" bIns="0" anchor="t" rtlCol="0">
+            <a:spAutoFit/>
+          </a:bodyPr>
+          <a:lstStyle/>
+          <a:p>
+            <a:pPr rtl="1" algn="r" marL="0" indent="0">
+              <a:lnSpc>
+                <a:spcPct val="108000"/>
+              </a:lnSpc>
+              <a:buNone/>
+            </a:pPr>
+            <a:r>
+              <a:rPr sz="3700" b="1" i="0" lang="he-IL">
+                <a:solidFill>
+                  <a:srgbClr val="F2F5FA"/>
+                </a:solidFill>
+                <a:latin typeface="Arial"/>
+                <a:cs typeface="Arial"/>
+              </a:rPr>
+              <a:t>💰 איך חוסכים בטוקנים</a:t>
+            </a:r>
+          </a:p>
+        </p:txBody>
+      </p:sp>
+      <p:sp>
+        <p:nvSpPr>
+          <p:cNvPr id="3" name="TextBox 2"/>
+          <p:cNvSpPr txBox="1"/>
+          <p:nvPr/>
+        </p:nvSpPr>
+        <p:spPr>
+          <a:xfrm>
+            <a:off x="658368" y="1280160"/>
+            <a:ext cx="10872216" cy="365760"/>
+          </a:xfrm>
+          <a:prstGeom prst="rect">
+            <a:avLst/>
+          </a:prstGeom>
+          <a:noFill/>
+        </p:spPr>
+        <p:txBody>
+          <a:bodyPr wrap="square" lIns="0" rIns="0" tIns="0" bIns="0" anchor="t" rtlCol="0">
+            <a:spAutoFit/>
+          </a:bodyPr>
+          <a:lstStyle/>
+          <a:p>
+            <a:pPr rtl="1" algn="r" marL="0" indent="0">
+              <a:lnSpc>
+                <a:spcPct val="108000"/>
+              </a:lnSpc>
+              <a:buNone/>
+            </a:pPr>
+            <a:r>
+              <a:rPr sz="1450" b="0" i="0" lang="he-IL">
+                <a:solidFill>
+                  <a:srgbClr val="FAC496"/>
+                </a:solidFill>
+                <a:latin typeface="Arial"/>
+                <a:cs typeface="Arial"/>
+              </a:rPr>
+              <a:t>פחות טוקנים = פחות הגבלות, תשובות מדויקות יותר, ושיחות שלא "שוכחות"</a:t>
+            </a:r>
+          </a:p>
+        </p:txBody>
+      </p:sp>
+      <p:sp>
+        <p:nvSpPr>
+          <p:cNvPr id="4" name="Rounded Rectangle 3"/>
+          <p:cNvSpPr/>
+          <p:nvPr/>
+        </p:nvSpPr>
+        <p:spPr>
+          <a:xfrm>
+            <a:off x="8071104" y="1874519"/>
+            <a:ext cx="3459480" cy="1600200"/>
           </a:xfrm>
           <a:prstGeom prst="roundRect">
             <a:avLst>
-              <a:gd name="adj" fmla="val 25000"/>
+              <a:gd name="adj" fmla="val 3000"/>
             </a:avLst>
+          </a:prstGeom>
+          <a:solidFill>
+            <a:srgbClr val="101620"/>
+          </a:solidFill>
+          <a:ln w="19050">
+            <a:solidFill>
+              <a:srgbClr val="002A80"/>
+            </a:solidFill>
+          </a:ln>
+          <a:effectLst/>
+        </p:spPr>
+        <p:style>
+          <a:lnRef idx="1">
+            <a:schemeClr val="accent1"/>
+          </a:lnRef>
+          <a:fillRef idx="3">
+            <a:schemeClr val="accent1"/>
+          </a:fillRef>
+          <a:effectRef idx="2">
+            <a:schemeClr val="accent1"/>
+          </a:effectRef>
+          <a:fontRef idx="minor">
+            <a:schemeClr val="lt1"/>
+          </a:fontRef>
+        </p:style>
+        <p:txBody>
+          <a:bodyPr rtlCol="0" anchor="ctr"/>
+          <a:lstStyle/>
+          <a:p/>
+        </p:txBody>
+      </p:sp>
+      <p:sp>
+        <p:nvSpPr>
+          <p:cNvPr id="5" name="Oval 4"/>
+          <p:cNvSpPr/>
+          <p:nvPr/>
+        </p:nvSpPr>
+        <p:spPr>
+          <a:xfrm>
+            <a:off x="10799064" y="2057400"/>
+            <a:ext cx="548640" cy="548640"/>
+          </a:xfrm>
+          <a:prstGeom prst="ellipse">
+            <a:avLst/>
           </a:prstGeom>
           <a:solidFill>
             <a:srgbClr val="022349"/>
@@ -14477,6 +15336,151 @@
           </a:fontRef>
         </p:style>
         <p:txBody>
+          <a:bodyPr rtlCol="0" anchor="ctr" lIns="0" rIns="0" tIns="0" bIns="0"/>
+          <a:lstStyle/>
+          <a:p>
+            <a:pPr rtl="1" algn="ctr" marL="0" indent="0">
+              <a:lnSpc>
+                <a:spcPct val="108000"/>
+              </a:lnSpc>
+              <a:buNone/>
+            </a:pPr>
+            <a:r>
+              <a:rPr sz="1700" b="1" i="0" lang="he-IL">
+                <a:solidFill>
+                  <a:srgbClr val="F2F5FA"/>
+                </a:solidFill>
+                <a:latin typeface="Arial"/>
+                <a:cs typeface="Arial"/>
+              </a:rPr>
+              <a:t>🆕</a:t>
+            </a:r>
+          </a:p>
+        </p:txBody>
+      </p:sp>
+      <p:sp>
+        <p:nvSpPr>
+          <p:cNvPr id="6" name="TextBox 5"/>
+          <p:cNvSpPr txBox="1"/>
+          <p:nvPr/>
+        </p:nvSpPr>
+        <p:spPr>
+          <a:xfrm>
+            <a:off x="8253984" y="2112263"/>
+            <a:ext cx="2499360" cy="365760"/>
+          </a:xfrm>
+          <a:prstGeom prst="rect">
+            <a:avLst/>
+          </a:prstGeom>
+          <a:noFill/>
+        </p:spPr>
+        <p:txBody>
+          <a:bodyPr wrap="square" lIns="0" rIns="0" tIns="0" bIns="0" anchor="t" rtlCol="0">
+            <a:spAutoFit/>
+          </a:bodyPr>
+          <a:lstStyle/>
+          <a:p>
+            <a:pPr rtl="1" algn="r" marL="0" indent="0">
+              <a:lnSpc>
+                <a:spcPct val="108000"/>
+              </a:lnSpc>
+              <a:buNone/>
+            </a:pPr>
+            <a:r>
+              <a:rPr sz="1650" b="1" i="0" lang="he-IL">
+                <a:solidFill>
+                  <a:srgbClr val="EBEDF0"/>
+                </a:solidFill>
+                <a:latin typeface="Arial"/>
+                <a:cs typeface="Arial"/>
+              </a:rPr>
+              <a:t>שיחה חדשה לכל נושא</a:t>
+            </a:r>
+          </a:p>
+        </p:txBody>
+      </p:sp>
+      <p:sp>
+        <p:nvSpPr>
+          <p:cNvPr id="7" name="TextBox 6"/>
+          <p:cNvSpPr txBox="1"/>
+          <p:nvPr/>
+        </p:nvSpPr>
+        <p:spPr>
+          <a:xfrm>
+            <a:off x="8253984" y="2624327"/>
+            <a:ext cx="3093720" cy="731520"/>
+          </a:xfrm>
+          <a:prstGeom prst="rect">
+            <a:avLst/>
+          </a:prstGeom>
+          <a:noFill/>
+        </p:spPr>
+        <p:txBody>
+          <a:bodyPr wrap="square" lIns="0" rIns="0" tIns="0" bIns="0" anchor="t" rtlCol="0">
+            <a:spAutoFit/>
+          </a:bodyPr>
+          <a:lstStyle/>
+          <a:p>
+            <a:pPr rtl="1" algn="r" marL="0" indent="0">
+              <a:lnSpc>
+                <a:spcPct val="108000"/>
+              </a:lnSpc>
+              <a:buNone/>
+            </a:pPr>
+            <a:r>
+              <a:rPr sz="1350" b="0" i="0" lang="he-IL">
+                <a:solidFill>
+                  <a:srgbClr val="EBEDF0"/>
+                </a:solidFill>
+                <a:latin typeface="Arial"/>
+                <a:cs typeface="Arial"/>
+              </a:rPr>
+              <a:t>לא ממשיכים שיחה של שבוע. נושא חדש, צ'אט חדש.</a:t>
+            </a:r>
+          </a:p>
+        </p:txBody>
+      </p:sp>
+      <p:sp>
+        <p:nvSpPr>
+          <p:cNvPr id="8" name="Rounded Rectangle 7"/>
+          <p:cNvSpPr/>
+          <p:nvPr/>
+        </p:nvSpPr>
+        <p:spPr>
+          <a:xfrm>
+            <a:off x="4364736" y="1874519"/>
+            <a:ext cx="3459480" cy="1600200"/>
+          </a:xfrm>
+          <a:prstGeom prst="roundRect">
+            <a:avLst>
+              <a:gd name="adj" fmla="val 3000"/>
+            </a:avLst>
+          </a:prstGeom>
+          <a:solidFill>
+            <a:srgbClr val="101620"/>
+          </a:solidFill>
+          <a:ln w="19050">
+            <a:solidFill>
+              <a:srgbClr val="002A80"/>
+            </a:solidFill>
+          </a:ln>
+          <a:effectLst/>
+        </p:spPr>
+        <p:style>
+          <a:lnRef idx="1">
+            <a:schemeClr val="accent1"/>
+          </a:lnRef>
+          <a:fillRef idx="3">
+            <a:schemeClr val="accent1"/>
+          </a:fillRef>
+          <a:effectRef idx="2">
+            <a:schemeClr val="accent1"/>
+          </a:effectRef>
+          <a:fontRef idx="minor">
+            <a:schemeClr val="lt1"/>
+          </a:fontRef>
+        </p:style>
+        <p:txBody>
           <a:bodyPr rtlCol="0" anchor="ctr"/>
           <a:lstStyle/>
           <a:p/>
@@ -14484,14 +15488,957 @@
       </p:sp>
       <p:sp>
         <p:nvSpPr>
-          <p:cNvPr id="20" name="TextBox 19"/>
+          <p:cNvPr id="9" name="Oval 8"/>
+          <p:cNvSpPr/>
+          <p:nvPr/>
+        </p:nvSpPr>
+        <p:spPr>
+          <a:xfrm>
+            <a:off x="7092696" y="2057400"/>
+            <a:ext cx="548640" cy="548640"/>
+          </a:xfrm>
+          <a:prstGeom prst="ellipse">
+            <a:avLst/>
+          </a:prstGeom>
+          <a:solidFill>
+            <a:srgbClr val="022349"/>
+          </a:solidFill>
+          <a:ln w="19050">
+            <a:solidFill>
+              <a:srgbClr val="487CFF"/>
+            </a:solidFill>
+          </a:ln>
+          <a:effectLst/>
+        </p:spPr>
+        <p:style>
+          <a:lnRef idx="1">
+            <a:schemeClr val="accent1"/>
+          </a:lnRef>
+          <a:fillRef idx="3">
+            <a:schemeClr val="accent1"/>
+          </a:fillRef>
+          <a:effectRef idx="2">
+            <a:schemeClr val="accent1"/>
+          </a:effectRef>
+          <a:fontRef idx="minor">
+            <a:schemeClr val="lt1"/>
+          </a:fontRef>
+        </p:style>
+        <p:txBody>
+          <a:bodyPr rtlCol="0" anchor="ctr" lIns="0" rIns="0" tIns="0" bIns="0"/>
+          <a:lstStyle/>
+          <a:p>
+            <a:pPr rtl="1" algn="ctr" marL="0" indent="0">
+              <a:lnSpc>
+                <a:spcPct val="108000"/>
+              </a:lnSpc>
+              <a:buNone/>
+            </a:pPr>
+            <a:r>
+              <a:rPr sz="1700" b="1" i="0" lang="he-IL">
+                <a:solidFill>
+                  <a:srgbClr val="F2F5FA"/>
+                </a:solidFill>
+                <a:latin typeface="Arial"/>
+                <a:cs typeface="Arial"/>
+              </a:rPr>
+              <a:t>📝</a:t>
+            </a:r>
+          </a:p>
+        </p:txBody>
+      </p:sp>
+      <p:sp>
+        <p:nvSpPr>
+          <p:cNvPr id="10" name="TextBox 9"/>
           <p:cNvSpPr txBox="1"/>
           <p:nvPr/>
         </p:nvSpPr>
         <p:spPr>
           <a:xfrm>
-            <a:off x="4059936" y="3264408"/>
-            <a:ext cx="1783080" cy="566928"/>
+            <a:off x="4547616" y="2112263"/>
+            <a:ext cx="2499360" cy="365760"/>
+          </a:xfrm>
+          <a:prstGeom prst="rect">
+            <a:avLst/>
+          </a:prstGeom>
+          <a:noFill/>
+        </p:spPr>
+        <p:txBody>
+          <a:bodyPr wrap="square" lIns="0" rIns="0" tIns="0" bIns="0" anchor="t" rtlCol="0">
+            <a:spAutoFit/>
+          </a:bodyPr>
+          <a:lstStyle/>
+          <a:p>
+            <a:pPr rtl="1" algn="r" marL="0" indent="0">
+              <a:lnSpc>
+                <a:spcPct val="108000"/>
+              </a:lnSpc>
+              <a:buNone/>
+            </a:pPr>
+            <a:r>
+              <a:rPr sz="1650" b="1" i="0" lang="he-IL">
+                <a:solidFill>
+                  <a:srgbClr val="EBEDF0"/>
+                </a:solidFill>
+                <a:latin typeface="Arial"/>
+                <a:cs typeface="Arial"/>
+              </a:rPr>
+              <a:t>מסכמים וממשיכים</a:t>
+            </a:r>
+          </a:p>
+        </p:txBody>
+      </p:sp>
+      <p:sp>
+        <p:nvSpPr>
+          <p:cNvPr id="11" name="TextBox 10"/>
+          <p:cNvSpPr txBox="1"/>
+          <p:nvPr/>
+        </p:nvSpPr>
+        <p:spPr>
+          <a:xfrm>
+            <a:off x="4547616" y="2624327"/>
+            <a:ext cx="3093720" cy="731520"/>
+          </a:xfrm>
+          <a:prstGeom prst="rect">
+            <a:avLst/>
+          </a:prstGeom>
+          <a:noFill/>
+        </p:spPr>
+        <p:txBody>
+          <a:bodyPr wrap="square" lIns="0" rIns="0" tIns="0" bIns="0" anchor="t" rtlCol="0">
+            <a:spAutoFit/>
+          </a:bodyPr>
+          <a:lstStyle/>
+          <a:p>
+            <a:pPr rtl="1" algn="r" marL="0" indent="0">
+              <a:lnSpc>
+                <a:spcPct val="108000"/>
+              </a:lnSpc>
+              <a:buNone/>
+            </a:pPr>
+            <a:r>
+              <a:rPr sz="1350" b="0" i="0" lang="he-IL">
+                <a:solidFill>
+                  <a:srgbClr val="EBEDF0"/>
+                </a:solidFill>
+                <a:latin typeface="Arial"/>
+                <a:cs typeface="Arial"/>
+              </a:rPr>
+              <a:t>"סכם את השיחה ב-10 שורות", ומדביקים בשיחה חדשה.</a:t>
+            </a:r>
+          </a:p>
+        </p:txBody>
+      </p:sp>
+      <p:sp>
+        <p:nvSpPr>
+          <p:cNvPr id="12" name="Rounded Rectangle 11"/>
+          <p:cNvSpPr/>
+          <p:nvPr/>
+        </p:nvSpPr>
+        <p:spPr>
+          <a:xfrm>
+            <a:off x="658368" y="1874519"/>
+            <a:ext cx="3459480" cy="1600200"/>
+          </a:xfrm>
+          <a:prstGeom prst="roundRect">
+            <a:avLst>
+              <a:gd name="adj" fmla="val 3000"/>
+            </a:avLst>
+          </a:prstGeom>
+          <a:solidFill>
+            <a:srgbClr val="101620"/>
+          </a:solidFill>
+          <a:ln w="19050">
+            <a:solidFill>
+              <a:srgbClr val="002A80"/>
+            </a:solidFill>
+          </a:ln>
+          <a:effectLst/>
+        </p:spPr>
+        <p:style>
+          <a:lnRef idx="1">
+            <a:schemeClr val="accent1"/>
+          </a:lnRef>
+          <a:fillRef idx="3">
+            <a:schemeClr val="accent1"/>
+          </a:fillRef>
+          <a:effectRef idx="2">
+            <a:schemeClr val="accent1"/>
+          </a:effectRef>
+          <a:fontRef idx="minor">
+            <a:schemeClr val="lt1"/>
+          </a:fontRef>
+        </p:style>
+        <p:txBody>
+          <a:bodyPr rtlCol="0" anchor="ctr"/>
+          <a:lstStyle/>
+          <a:p/>
+        </p:txBody>
+      </p:sp>
+      <p:sp>
+        <p:nvSpPr>
+          <p:cNvPr id="13" name="Oval 12"/>
+          <p:cNvSpPr/>
+          <p:nvPr/>
+        </p:nvSpPr>
+        <p:spPr>
+          <a:xfrm>
+            <a:off x="3386328" y="2057400"/>
+            <a:ext cx="548640" cy="548640"/>
+          </a:xfrm>
+          <a:prstGeom prst="ellipse">
+            <a:avLst/>
+          </a:prstGeom>
+          <a:solidFill>
+            <a:srgbClr val="022349"/>
+          </a:solidFill>
+          <a:ln w="19050">
+            <a:solidFill>
+              <a:srgbClr val="487CFF"/>
+            </a:solidFill>
+          </a:ln>
+          <a:effectLst/>
+        </p:spPr>
+        <p:style>
+          <a:lnRef idx="1">
+            <a:schemeClr val="accent1"/>
+          </a:lnRef>
+          <a:fillRef idx="3">
+            <a:schemeClr val="accent1"/>
+          </a:fillRef>
+          <a:effectRef idx="2">
+            <a:schemeClr val="accent1"/>
+          </a:effectRef>
+          <a:fontRef idx="minor">
+            <a:schemeClr val="lt1"/>
+          </a:fontRef>
+        </p:style>
+        <p:txBody>
+          <a:bodyPr rtlCol="0" anchor="ctr" lIns="0" rIns="0" tIns="0" bIns="0"/>
+          <a:lstStyle/>
+          <a:p>
+            <a:pPr rtl="1" algn="ctr" marL="0" indent="0">
+              <a:lnSpc>
+                <a:spcPct val="108000"/>
+              </a:lnSpc>
+              <a:buNone/>
+            </a:pPr>
+            <a:r>
+              <a:rPr sz="1700" b="1" i="0" lang="he-IL">
+                <a:solidFill>
+                  <a:srgbClr val="F2F5FA"/>
+                </a:solidFill>
+                <a:latin typeface="Arial"/>
+                <a:cs typeface="Arial"/>
+              </a:rPr>
+              <a:t>✏️</a:t>
+            </a:r>
+          </a:p>
+        </p:txBody>
+      </p:sp>
+      <p:sp>
+        <p:nvSpPr>
+          <p:cNvPr id="14" name="TextBox 13"/>
+          <p:cNvSpPr txBox="1"/>
+          <p:nvPr/>
+        </p:nvSpPr>
+        <p:spPr>
+          <a:xfrm>
+            <a:off x="841248" y="2112263"/>
+            <a:ext cx="2499360" cy="365760"/>
+          </a:xfrm>
+          <a:prstGeom prst="rect">
+            <a:avLst/>
+          </a:prstGeom>
+          <a:noFill/>
+        </p:spPr>
+        <p:txBody>
+          <a:bodyPr wrap="square" lIns="0" rIns="0" tIns="0" bIns="0" anchor="t" rtlCol="0">
+            <a:spAutoFit/>
+          </a:bodyPr>
+          <a:lstStyle/>
+          <a:p>
+            <a:pPr rtl="1" algn="r" marL="0" indent="0">
+              <a:lnSpc>
+                <a:spcPct val="108000"/>
+              </a:lnSpc>
+              <a:buNone/>
+            </a:pPr>
+            <a:r>
+              <a:rPr sz="1650" b="1" i="0" lang="he-IL">
+                <a:solidFill>
+                  <a:srgbClr val="EBEDF0"/>
+                </a:solidFill>
+                <a:latin typeface="Arial"/>
+                <a:cs typeface="Arial"/>
+              </a:rPr>
+              <a:t>עורכים, לא מוסיפים</a:t>
+            </a:r>
+          </a:p>
+        </p:txBody>
+      </p:sp>
+      <p:sp>
+        <p:nvSpPr>
+          <p:cNvPr id="15" name="TextBox 14"/>
+          <p:cNvSpPr txBox="1"/>
+          <p:nvPr/>
+        </p:nvSpPr>
+        <p:spPr>
+          <a:xfrm>
+            <a:off x="841248" y="2624327"/>
+            <a:ext cx="3093720" cy="731520"/>
+          </a:xfrm>
+          <a:prstGeom prst="rect">
+            <a:avLst/>
+          </a:prstGeom>
+          <a:noFill/>
+        </p:spPr>
+        <p:txBody>
+          <a:bodyPr wrap="square" lIns="0" rIns="0" tIns="0" bIns="0" anchor="t" rtlCol="0">
+            <a:spAutoFit/>
+          </a:bodyPr>
+          <a:lstStyle/>
+          <a:p>
+            <a:pPr rtl="1" algn="r" marL="0" indent="0">
+              <a:lnSpc>
+                <a:spcPct val="108000"/>
+              </a:lnSpc>
+              <a:buNone/>
+            </a:pPr>
+            <a:r>
+              <a:rPr sz="1350" b="0" i="0" lang="he-IL">
+                <a:solidFill>
+                  <a:srgbClr val="EBEDF0"/>
+                </a:solidFill>
+                <a:latin typeface="Arial"/>
+                <a:cs typeface="Arial"/>
+              </a:rPr>
+              <a:t>טעיתם בהנחיה? לוחצים "ערוך" במקום לשלוח תיקון.</a:t>
+            </a:r>
+          </a:p>
+        </p:txBody>
+      </p:sp>
+      <p:sp>
+        <p:nvSpPr>
+          <p:cNvPr id="16" name="Rounded Rectangle 15"/>
+          <p:cNvSpPr/>
+          <p:nvPr/>
+        </p:nvSpPr>
+        <p:spPr>
+          <a:xfrm>
+            <a:off x="8071104" y="3675887"/>
+            <a:ext cx="3459480" cy="1600200"/>
+          </a:xfrm>
+          <a:prstGeom prst="roundRect">
+            <a:avLst>
+              <a:gd name="adj" fmla="val 3000"/>
+            </a:avLst>
+          </a:prstGeom>
+          <a:solidFill>
+            <a:srgbClr val="101620"/>
+          </a:solidFill>
+          <a:ln w="19050">
+            <a:solidFill>
+              <a:srgbClr val="002A80"/>
+            </a:solidFill>
+          </a:ln>
+          <a:effectLst/>
+        </p:spPr>
+        <p:style>
+          <a:lnRef idx="1">
+            <a:schemeClr val="accent1"/>
+          </a:lnRef>
+          <a:fillRef idx="3">
+            <a:schemeClr val="accent1"/>
+          </a:fillRef>
+          <a:effectRef idx="2">
+            <a:schemeClr val="accent1"/>
+          </a:effectRef>
+          <a:fontRef idx="minor">
+            <a:schemeClr val="lt1"/>
+          </a:fontRef>
+        </p:style>
+        <p:txBody>
+          <a:bodyPr rtlCol="0" anchor="ctr"/>
+          <a:lstStyle/>
+          <a:p/>
+        </p:txBody>
+      </p:sp>
+      <p:sp>
+        <p:nvSpPr>
+          <p:cNvPr id="17" name="Oval 16"/>
+          <p:cNvSpPr/>
+          <p:nvPr/>
+        </p:nvSpPr>
+        <p:spPr>
+          <a:xfrm>
+            <a:off x="10799064" y="3858768"/>
+            <a:ext cx="548640" cy="548640"/>
+          </a:xfrm>
+          <a:prstGeom prst="ellipse">
+            <a:avLst/>
+          </a:prstGeom>
+          <a:solidFill>
+            <a:srgbClr val="022349"/>
+          </a:solidFill>
+          <a:ln w="19050">
+            <a:solidFill>
+              <a:srgbClr val="487CFF"/>
+            </a:solidFill>
+          </a:ln>
+          <a:effectLst/>
+        </p:spPr>
+        <p:style>
+          <a:lnRef idx="1">
+            <a:schemeClr val="accent1"/>
+          </a:lnRef>
+          <a:fillRef idx="3">
+            <a:schemeClr val="accent1"/>
+          </a:fillRef>
+          <a:effectRef idx="2">
+            <a:schemeClr val="accent1"/>
+          </a:effectRef>
+          <a:fontRef idx="minor">
+            <a:schemeClr val="lt1"/>
+          </a:fontRef>
+        </p:style>
+        <p:txBody>
+          <a:bodyPr rtlCol="0" anchor="ctr" lIns="0" rIns="0" tIns="0" bIns="0"/>
+          <a:lstStyle/>
+          <a:p>
+            <a:pPr rtl="1" algn="ctr" marL="0" indent="0">
+              <a:lnSpc>
+                <a:spcPct val="108000"/>
+              </a:lnSpc>
+              <a:buNone/>
+            </a:pPr>
+            <a:r>
+              <a:rPr sz="1700" b="1" i="0" lang="he-IL">
+                <a:solidFill>
+                  <a:srgbClr val="F2F5FA"/>
+                </a:solidFill>
+                <a:latin typeface="Arial"/>
+                <a:cs typeface="Arial"/>
+              </a:rPr>
+              <a:t>✂️</a:t>
+            </a:r>
+          </a:p>
+        </p:txBody>
+      </p:sp>
+      <p:sp>
+        <p:nvSpPr>
+          <p:cNvPr id="18" name="TextBox 17"/>
+          <p:cNvSpPr txBox="1"/>
+          <p:nvPr/>
+        </p:nvSpPr>
+        <p:spPr>
+          <a:xfrm>
+            <a:off x="8253984" y="3913631"/>
+            <a:ext cx="2499360" cy="365760"/>
+          </a:xfrm>
+          <a:prstGeom prst="rect">
+            <a:avLst/>
+          </a:prstGeom>
+          <a:noFill/>
+        </p:spPr>
+        <p:txBody>
+          <a:bodyPr wrap="square" lIns="0" rIns="0" tIns="0" bIns="0" anchor="t" rtlCol="0">
+            <a:spAutoFit/>
+          </a:bodyPr>
+          <a:lstStyle/>
+          <a:p>
+            <a:pPr rtl="1" algn="r" marL="0" indent="0">
+              <a:lnSpc>
+                <a:spcPct val="108000"/>
+              </a:lnSpc>
+              <a:buNone/>
+            </a:pPr>
+            <a:r>
+              <a:rPr sz="1650" b="1" i="0" lang="he-IL">
+                <a:solidFill>
+                  <a:srgbClr val="EBEDF0"/>
+                </a:solidFill>
+                <a:latin typeface="Arial"/>
+                <a:cs typeface="Arial"/>
+              </a:rPr>
+              <a:t>רק הקטע הרלוונטי</a:t>
+            </a:r>
+          </a:p>
+        </p:txBody>
+      </p:sp>
+      <p:sp>
+        <p:nvSpPr>
+          <p:cNvPr id="19" name="TextBox 18"/>
+          <p:cNvSpPr txBox="1"/>
+          <p:nvPr/>
+        </p:nvSpPr>
+        <p:spPr>
+          <a:xfrm>
+            <a:off x="8253984" y="4425696"/>
+            <a:ext cx="3093720" cy="731520"/>
+          </a:xfrm>
+          <a:prstGeom prst="rect">
+            <a:avLst/>
+          </a:prstGeom>
+          <a:noFill/>
+        </p:spPr>
+        <p:txBody>
+          <a:bodyPr wrap="square" lIns="0" rIns="0" tIns="0" bIns="0" anchor="t" rtlCol="0">
+            <a:spAutoFit/>
+          </a:bodyPr>
+          <a:lstStyle/>
+          <a:p>
+            <a:pPr rtl="1" algn="r" marL="0" indent="0">
+              <a:lnSpc>
+                <a:spcPct val="108000"/>
+              </a:lnSpc>
+              <a:buNone/>
+            </a:pPr>
+            <a:r>
+              <a:rPr sz="1350" b="0" i="0" lang="he-IL">
+                <a:solidFill>
+                  <a:srgbClr val="EBEDF0"/>
+                </a:solidFill>
+                <a:latin typeface="Arial"/>
+                <a:cs typeface="Arial"/>
+              </a:rPr>
+              <a:t>לא את כל הקובץ של 80 עמודים. רק את הפרק שצריך.</a:t>
+            </a:r>
+          </a:p>
+        </p:txBody>
+      </p:sp>
+      <p:sp>
+        <p:nvSpPr>
+          <p:cNvPr id="20" name="Rounded Rectangle 19"/>
+          <p:cNvSpPr/>
+          <p:nvPr/>
+        </p:nvSpPr>
+        <p:spPr>
+          <a:xfrm>
+            <a:off x="4364736" y="3675887"/>
+            <a:ext cx="3459480" cy="1600200"/>
+          </a:xfrm>
+          <a:prstGeom prst="roundRect">
+            <a:avLst>
+              <a:gd name="adj" fmla="val 3000"/>
+            </a:avLst>
+          </a:prstGeom>
+          <a:solidFill>
+            <a:srgbClr val="101620"/>
+          </a:solidFill>
+          <a:ln w="19050">
+            <a:solidFill>
+              <a:srgbClr val="002A80"/>
+            </a:solidFill>
+          </a:ln>
+          <a:effectLst/>
+        </p:spPr>
+        <p:style>
+          <a:lnRef idx="1">
+            <a:schemeClr val="accent1"/>
+          </a:lnRef>
+          <a:fillRef idx="3">
+            <a:schemeClr val="accent1"/>
+          </a:fillRef>
+          <a:effectRef idx="2">
+            <a:schemeClr val="accent1"/>
+          </a:effectRef>
+          <a:fontRef idx="minor">
+            <a:schemeClr val="lt1"/>
+          </a:fontRef>
+        </p:style>
+        <p:txBody>
+          <a:bodyPr rtlCol="0" anchor="ctr"/>
+          <a:lstStyle/>
+          <a:p/>
+        </p:txBody>
+      </p:sp>
+      <p:sp>
+        <p:nvSpPr>
+          <p:cNvPr id="21" name="Oval 20"/>
+          <p:cNvSpPr/>
+          <p:nvPr/>
+        </p:nvSpPr>
+        <p:spPr>
+          <a:xfrm>
+            <a:off x="7092696" y="3858768"/>
+            <a:ext cx="548640" cy="548640"/>
+          </a:xfrm>
+          <a:prstGeom prst="ellipse">
+            <a:avLst/>
+          </a:prstGeom>
+          <a:solidFill>
+            <a:srgbClr val="022349"/>
+          </a:solidFill>
+          <a:ln w="19050">
+            <a:solidFill>
+              <a:srgbClr val="487CFF"/>
+            </a:solidFill>
+          </a:ln>
+          <a:effectLst/>
+        </p:spPr>
+        <p:style>
+          <a:lnRef idx="1">
+            <a:schemeClr val="accent1"/>
+          </a:lnRef>
+          <a:fillRef idx="3">
+            <a:schemeClr val="accent1"/>
+          </a:fillRef>
+          <a:effectRef idx="2">
+            <a:schemeClr val="accent1"/>
+          </a:effectRef>
+          <a:fontRef idx="minor">
+            <a:schemeClr val="lt1"/>
+          </a:fontRef>
+        </p:style>
+        <p:txBody>
+          <a:bodyPr rtlCol="0" anchor="ctr" lIns="0" rIns="0" tIns="0" bIns="0"/>
+          <a:lstStyle/>
+          <a:p>
+            <a:pPr rtl="1" algn="ctr" marL="0" indent="0">
+              <a:lnSpc>
+                <a:spcPct val="108000"/>
+              </a:lnSpc>
+              <a:buNone/>
+            </a:pPr>
+            <a:r>
+              <a:rPr sz="1700" b="1" i="0" lang="he-IL">
+                <a:solidFill>
+                  <a:srgbClr val="F2F5FA"/>
+                </a:solidFill>
+                <a:latin typeface="Arial"/>
+                <a:cs typeface="Arial"/>
+              </a:rPr>
+              <a:t>📐</a:t>
+            </a:r>
+          </a:p>
+        </p:txBody>
+      </p:sp>
+      <p:sp>
+        <p:nvSpPr>
+          <p:cNvPr id="22" name="TextBox 21"/>
+          <p:cNvSpPr txBox="1"/>
+          <p:nvPr/>
+        </p:nvSpPr>
+        <p:spPr>
+          <a:xfrm>
+            <a:off x="4547616" y="3913631"/>
+            <a:ext cx="2499360" cy="365760"/>
+          </a:xfrm>
+          <a:prstGeom prst="rect">
+            <a:avLst/>
+          </a:prstGeom>
+          <a:noFill/>
+        </p:spPr>
+        <p:txBody>
+          <a:bodyPr wrap="square" lIns="0" rIns="0" tIns="0" bIns="0" anchor="t" rtlCol="0">
+            <a:spAutoFit/>
+          </a:bodyPr>
+          <a:lstStyle/>
+          <a:p>
+            <a:pPr rtl="1" algn="r" marL="0" indent="0">
+              <a:lnSpc>
+                <a:spcPct val="108000"/>
+              </a:lnSpc>
+              <a:buNone/>
+            </a:pPr>
+            <a:r>
+              <a:rPr sz="1650" b="1" i="0" lang="he-IL">
+                <a:solidFill>
+                  <a:srgbClr val="EBEDF0"/>
+                </a:solidFill>
+                <a:latin typeface="Arial"/>
+                <a:cs typeface="Arial"/>
+              </a:rPr>
+              <a:t>מבקשים קצר</a:t>
+            </a:r>
+          </a:p>
+        </p:txBody>
+      </p:sp>
+      <p:sp>
+        <p:nvSpPr>
+          <p:cNvPr id="23" name="TextBox 22"/>
+          <p:cNvSpPr txBox="1"/>
+          <p:nvPr/>
+        </p:nvSpPr>
+        <p:spPr>
+          <a:xfrm>
+            <a:off x="4547616" y="4425696"/>
+            <a:ext cx="3093720" cy="731520"/>
+          </a:xfrm>
+          <a:prstGeom prst="rect">
+            <a:avLst/>
+          </a:prstGeom>
+          <a:noFill/>
+        </p:spPr>
+        <p:txBody>
+          <a:bodyPr wrap="square" lIns="0" rIns="0" tIns="0" bIns="0" anchor="t" rtlCol="0">
+            <a:spAutoFit/>
+          </a:bodyPr>
+          <a:lstStyle/>
+          <a:p>
+            <a:pPr rtl="1" algn="r" marL="0" indent="0">
+              <a:lnSpc>
+                <a:spcPct val="108000"/>
+              </a:lnSpc>
+              <a:buNone/>
+            </a:pPr>
+            <a:r>
+              <a:rPr sz="1350" b="0" i="0" lang="he-IL">
+                <a:solidFill>
+                  <a:srgbClr val="EBEDF0"/>
+                </a:solidFill>
+                <a:latin typeface="Arial"/>
+                <a:cs typeface="Arial"/>
+              </a:rPr>
+              <a:t>"עד 5 שורות, בלי הקדמה". תשובה קצרה = פחות טוקנים.</a:t>
+            </a:r>
+          </a:p>
+        </p:txBody>
+      </p:sp>
+      <p:sp>
+        <p:nvSpPr>
+          <p:cNvPr id="24" name="Rounded Rectangle 23"/>
+          <p:cNvSpPr/>
+          <p:nvPr/>
+        </p:nvSpPr>
+        <p:spPr>
+          <a:xfrm>
+            <a:off x="658368" y="3675887"/>
+            <a:ext cx="3459480" cy="1600200"/>
+          </a:xfrm>
+          <a:prstGeom prst="roundRect">
+            <a:avLst>
+              <a:gd name="adj" fmla="val 3000"/>
+            </a:avLst>
+          </a:prstGeom>
+          <a:solidFill>
+            <a:srgbClr val="101620"/>
+          </a:solidFill>
+          <a:ln w="19050">
+            <a:solidFill>
+              <a:srgbClr val="002A80"/>
+            </a:solidFill>
+          </a:ln>
+          <a:effectLst/>
+        </p:spPr>
+        <p:style>
+          <a:lnRef idx="1">
+            <a:schemeClr val="accent1"/>
+          </a:lnRef>
+          <a:fillRef idx="3">
+            <a:schemeClr val="accent1"/>
+          </a:fillRef>
+          <a:effectRef idx="2">
+            <a:schemeClr val="accent1"/>
+          </a:effectRef>
+          <a:fontRef idx="minor">
+            <a:schemeClr val="lt1"/>
+          </a:fontRef>
+        </p:style>
+        <p:txBody>
+          <a:bodyPr rtlCol="0" anchor="ctr"/>
+          <a:lstStyle/>
+          <a:p/>
+        </p:txBody>
+      </p:sp>
+      <p:sp>
+        <p:nvSpPr>
+          <p:cNvPr id="25" name="Oval 24"/>
+          <p:cNvSpPr/>
+          <p:nvPr/>
+        </p:nvSpPr>
+        <p:spPr>
+          <a:xfrm>
+            <a:off x="3386328" y="3858768"/>
+            <a:ext cx="548640" cy="548640"/>
+          </a:xfrm>
+          <a:prstGeom prst="ellipse">
+            <a:avLst/>
+          </a:prstGeom>
+          <a:solidFill>
+            <a:srgbClr val="022349"/>
+          </a:solidFill>
+          <a:ln w="19050">
+            <a:solidFill>
+              <a:srgbClr val="487CFF"/>
+            </a:solidFill>
+          </a:ln>
+          <a:effectLst/>
+        </p:spPr>
+        <p:style>
+          <a:lnRef idx="1">
+            <a:schemeClr val="accent1"/>
+          </a:lnRef>
+          <a:fillRef idx="3">
+            <a:schemeClr val="accent1"/>
+          </a:fillRef>
+          <a:effectRef idx="2">
+            <a:schemeClr val="accent1"/>
+          </a:effectRef>
+          <a:fontRef idx="minor">
+            <a:schemeClr val="lt1"/>
+          </a:fontRef>
+        </p:style>
+        <p:txBody>
+          <a:bodyPr rtlCol="0" anchor="ctr" lIns="0" rIns="0" tIns="0" bIns="0"/>
+          <a:lstStyle/>
+          <a:p>
+            <a:pPr rtl="1" algn="ctr" marL="0" indent="0">
+              <a:lnSpc>
+                <a:spcPct val="108000"/>
+              </a:lnSpc>
+              <a:buNone/>
+            </a:pPr>
+            <a:r>
+              <a:rPr sz="1700" b="1" i="0" lang="he-IL">
+                <a:solidFill>
+                  <a:srgbClr val="F2F5FA"/>
+                </a:solidFill>
+                <a:latin typeface="Arial"/>
+                <a:cs typeface="Arial"/>
+              </a:rPr>
+              <a:t>⚡</a:t>
+            </a:r>
+          </a:p>
+        </p:txBody>
+      </p:sp>
+      <p:sp>
+        <p:nvSpPr>
+          <p:cNvPr id="26" name="TextBox 25"/>
+          <p:cNvSpPr txBox="1"/>
+          <p:nvPr/>
+        </p:nvSpPr>
+        <p:spPr>
+          <a:xfrm>
+            <a:off x="841248" y="3913631"/>
+            <a:ext cx="2499360" cy="365760"/>
+          </a:xfrm>
+          <a:prstGeom prst="rect">
+            <a:avLst/>
+          </a:prstGeom>
+          <a:noFill/>
+        </p:spPr>
+        <p:txBody>
+          <a:bodyPr wrap="square" lIns="0" rIns="0" tIns="0" bIns="0" anchor="t" rtlCol="0">
+            <a:spAutoFit/>
+          </a:bodyPr>
+          <a:lstStyle/>
+          <a:p>
+            <a:pPr rtl="1" algn="r" marL="0" indent="0">
+              <a:lnSpc>
+                <a:spcPct val="108000"/>
+              </a:lnSpc>
+              <a:buNone/>
+            </a:pPr>
+            <a:r>
+              <a:rPr sz="1650" b="1" i="0" lang="he-IL">
+                <a:solidFill>
+                  <a:srgbClr val="EBEDF0"/>
+                </a:solidFill>
+                <a:latin typeface="Arial"/>
+                <a:cs typeface="Arial"/>
+              </a:rPr>
+              <a:t>מודל מהיר למשימה קלה</a:t>
+            </a:r>
+          </a:p>
+        </p:txBody>
+      </p:sp>
+      <p:sp>
+        <p:nvSpPr>
+          <p:cNvPr id="27" name="TextBox 26"/>
+          <p:cNvSpPr txBox="1"/>
+          <p:nvPr/>
+        </p:nvSpPr>
+        <p:spPr>
+          <a:xfrm>
+            <a:off x="841248" y="4425696"/>
+            <a:ext cx="3093720" cy="731520"/>
+          </a:xfrm>
+          <a:prstGeom prst="rect">
+            <a:avLst/>
+          </a:prstGeom>
+          <a:noFill/>
+        </p:spPr>
+        <p:txBody>
+          <a:bodyPr wrap="square" lIns="0" rIns="0" tIns="0" bIns="0" anchor="t" rtlCol="0">
+            <a:spAutoFit/>
+          </a:bodyPr>
+          <a:lstStyle/>
+          <a:p>
+            <a:pPr rtl="1" algn="r" marL="0" indent="0">
+              <a:lnSpc>
+                <a:spcPct val="108000"/>
+              </a:lnSpc>
+              <a:buNone/>
+            </a:pPr>
+            <a:r>
+              <a:rPr sz="1350" b="0" i="0" lang="he-IL">
+                <a:solidFill>
+                  <a:srgbClr val="EBEDF0"/>
+                </a:solidFill>
+                <a:latin typeface="Arial"/>
+                <a:cs typeface="Arial"/>
+              </a:rPr>
+              <a:t>מודל "חושב" רק לבעיות קשות. הוא צורך הרבה יותר.</a:t>
+            </a:r>
+          </a:p>
+        </p:txBody>
+      </p:sp>
+      <p:sp>
+        <p:nvSpPr>
+          <p:cNvPr id="28" name="Rounded Rectangle 27"/>
+          <p:cNvSpPr/>
+          <p:nvPr/>
+        </p:nvSpPr>
+        <p:spPr>
+          <a:xfrm>
+            <a:off x="658368" y="5577840"/>
+            <a:ext cx="10872216" cy="594360"/>
+          </a:xfrm>
+          <a:prstGeom prst="roundRect">
+            <a:avLst>
+              <a:gd name="adj" fmla="val 3000"/>
+            </a:avLst>
+          </a:prstGeom>
+          <a:solidFill>
+            <a:srgbClr val="183A13"/>
+          </a:solidFill>
+          <a:ln>
+            <a:noFill/>
+          </a:ln>
+          <a:effectLst/>
+        </p:spPr>
+        <p:style>
+          <a:lnRef idx="1">
+            <a:schemeClr val="accent1"/>
+          </a:lnRef>
+          <a:fillRef idx="3">
+            <a:schemeClr val="accent1"/>
+          </a:fillRef>
+          <a:effectRef idx="2">
+            <a:schemeClr val="accent1"/>
+          </a:effectRef>
+          <a:fontRef idx="minor">
+            <a:schemeClr val="lt1"/>
+          </a:fontRef>
+        </p:style>
+        <p:txBody>
+          <a:bodyPr rtlCol="0" anchor="ctr"/>
+          <a:lstStyle/>
+          <a:p/>
+        </p:txBody>
+      </p:sp>
+      <p:sp>
+        <p:nvSpPr>
+          <p:cNvPr id="29" name="TextBox 28"/>
+          <p:cNvSpPr txBox="1"/>
+          <p:nvPr/>
+        </p:nvSpPr>
+        <p:spPr>
+          <a:xfrm>
+            <a:off x="886968" y="5577840"/>
+            <a:ext cx="10415016" cy="594360"/>
           </a:xfrm>
           <a:prstGeom prst="rect">
             <a:avLst/>
@@ -14511,28 +16458,1720 @@
               <a:buNone/>
             </a:pPr>
             <a:r>
-              <a:rPr sz="1400" b="1" i="0" lang="he-IL">
-                <a:solidFill>
-                  <a:srgbClr val="F2F5FA"/>
+              <a:rPr sz="1450" b="0" i="0" lang="he-IL">
+                <a:solidFill>
+                  <a:srgbClr val="EBEDF0"/>
                 </a:solidFill>
                 <a:latin typeface="Arial"/>
                 <a:cs typeface="Arial"/>
               </a:rPr>
-              <a:t>Wispr Flow</a:t>
-            </a:r>
-          </a:p>
-        </p:txBody>
-      </p:sp>
-      <p:sp>
-        <p:nvSpPr>
-          <p:cNvPr id="21" name="TextBox 20"/>
+              <a:t>🆓  בחשבון חינמי יש מכסה. מי שחוסך בטוקנים, עובד יותר שעות בלי לשלם.</a:t>
+            </a:r>
+          </a:p>
+        </p:txBody>
+      </p:sp>
+      <p:sp>
+        <p:nvSpPr>
+          <p:cNvPr id="30" name="TextBox 29"/>
           <p:cNvSpPr txBox="1"/>
           <p:nvPr/>
         </p:nvSpPr>
         <p:spPr>
           <a:xfrm>
-            <a:off x="768096" y="3264408"/>
-            <a:ext cx="3264408" cy="566928"/>
+            <a:off x="6675120" y="6473952"/>
+            <a:ext cx="4846320" cy="292608"/>
+          </a:xfrm>
+          <a:prstGeom prst="rect">
+            <a:avLst/>
+          </a:prstGeom>
+          <a:noFill/>
+        </p:spPr>
+        <p:txBody>
+          <a:bodyPr wrap="none" lIns="0" rIns="0" tIns="0" bIns="0">
+            <a:spAutoFit/>
+          </a:bodyPr>
+          <a:lstStyle/>
+          <a:p>
+            <a:pPr algn="r" rtl="1"/>
+            <a:r>
+              <a:rPr sz="1000">
+                <a:solidFill>
+                  <a:srgbClr val="8A96AA"/>
+                </a:solidFill>
+                <a:latin typeface="Arial"/>
+                <a:cs typeface="Arial"/>
+              </a:rPr>
+              <a:t>© נערך על ידי AI Finance</a:t>
+            </a:r>
+          </a:p>
+        </p:txBody>
+      </p:sp>
+    </p:spTree>
+  </p:cSld>
+  <p:clrMapOvr>
+    <a:masterClrMapping/>
+  </p:clrMapOvr>
+</p:sld>
+</file>
+
+<file path=ppt/slides/slide2010.xml><?xml version="1.0" encoding="utf-8"?>
+<p:sld xmlns:a="http://schemas.openxmlformats.org/drawingml/2006/main" xmlns:p="http://schemas.openxmlformats.org/presentationml/2006/main" xmlns:r="http://schemas.openxmlformats.org/officeDocument/2006/relationships">
+  <p:cSld>
+    <p:spTree>
+      <p:nvGrpSpPr>
+        <p:cNvPr id="1" name=""/>
+        <p:cNvGrpSpPr/>
+        <p:nvPr/>
+      </p:nvGrpSpPr>
+      <p:grpSpPr/>
+      <p:sp>
+        <p:nvSpPr>
+          <p:cNvPr id="2" name="Title"/>
+          <p:cNvSpPr txBox="1"/>
+          <p:nvPr/>
+        </p:nvSpPr>
+        <p:spPr>
+          <a:xfrm>
+            <a:off x="658368" y="502920"/>
+            <a:ext cx="10872216" cy="640080"/>
+          </a:xfrm>
+          <a:prstGeom prst="rect">
+            <a:avLst/>
+          </a:prstGeom>
+          <a:noFill/>
+        </p:spPr>
+        <p:txBody>
+          <a:bodyPr wrap="square" lIns="0" rIns="0" tIns="0" bIns="0" anchor="t" rtlCol="0">
+            <a:spAutoFit/>
+          </a:bodyPr>
+          <a:lstStyle/>
+          <a:p>
+            <a:pPr rtl="1" algn="r" marL="0" indent="0">
+              <a:lnSpc>
+                <a:spcPct val="108000"/>
+              </a:lnSpc>
+              <a:buNone/>
+            </a:pPr>
+            <a:r>
+              <a:rPr sz="3700" b="1" i="0" lang="he-IL">
+                <a:solidFill>
+                  <a:srgbClr val="F2F5FA"/>
+                </a:solidFill>
+                <a:latin typeface="Arial"/>
+                <a:cs typeface="Arial"/>
+              </a:rPr>
+              <a:t>⚡ 8 טריקים שחוסכים שעות</a:t>
+            </a:r>
+          </a:p>
+        </p:txBody>
+      </p:sp>
+      <p:sp>
+        <p:nvSpPr>
+          <p:cNvPr id="3" name="TextBox 2"/>
+          <p:cNvSpPr txBox="1"/>
+          <p:nvPr/>
+        </p:nvSpPr>
+        <p:spPr>
+          <a:xfrm>
+            <a:off x="658368" y="1280160"/>
+            <a:ext cx="10872216" cy="365760"/>
+          </a:xfrm>
+          <a:prstGeom prst="rect">
+            <a:avLst/>
+          </a:prstGeom>
+          <a:noFill/>
+        </p:spPr>
+        <p:txBody>
+          <a:bodyPr wrap="square" lIns="0" rIns="0" tIns="0" bIns="0" anchor="t" rtlCol="0">
+            <a:spAutoFit/>
+          </a:bodyPr>
+          <a:lstStyle/>
+          <a:p>
+            <a:pPr rtl="1" algn="r" marL="0" indent="0">
+              <a:lnSpc>
+                <a:spcPct val="108000"/>
+              </a:lnSpc>
+              <a:buNone/>
+            </a:pPr>
+            <a:r>
+              <a:rPr sz="1450" b="0" i="0" lang="he-IL">
+                <a:solidFill>
+                  <a:srgbClr val="FAC496"/>
+                </a:solidFill>
+                <a:latin typeface="Arial"/>
+                <a:cs typeface="Arial"/>
+              </a:rPr>
+              <a:t>מה שמשתמשים מנוסים עושים, ומתחילים לא יודעים</a:t>
+            </a:r>
+          </a:p>
+        </p:txBody>
+      </p:sp>
+      <p:sp>
+        <p:nvSpPr>
+          <p:cNvPr id="4" name="Rounded Rectangle 3"/>
+          <p:cNvSpPr/>
+          <p:nvPr/>
+        </p:nvSpPr>
+        <p:spPr>
+          <a:xfrm>
+            <a:off x="8997696" y="1874519"/>
+            <a:ext cx="2532888" cy="1600200"/>
+          </a:xfrm>
+          <a:prstGeom prst="roundRect">
+            <a:avLst>
+              <a:gd name="adj" fmla="val 3000"/>
+            </a:avLst>
+          </a:prstGeom>
+          <a:solidFill>
+            <a:srgbClr val="101620"/>
+          </a:solidFill>
+          <a:ln w="19050">
+            <a:solidFill>
+              <a:srgbClr val="002A80"/>
+            </a:solidFill>
+          </a:ln>
+          <a:effectLst/>
+        </p:spPr>
+        <p:style>
+          <a:lnRef idx="1">
+            <a:schemeClr val="accent1"/>
+          </a:lnRef>
+          <a:fillRef idx="3">
+            <a:schemeClr val="accent1"/>
+          </a:fillRef>
+          <a:effectRef idx="2">
+            <a:schemeClr val="accent1"/>
+          </a:effectRef>
+          <a:fontRef idx="minor">
+            <a:schemeClr val="lt1"/>
+          </a:fontRef>
+        </p:style>
+        <p:txBody>
+          <a:bodyPr rtlCol="0" anchor="ctr"/>
+          <a:lstStyle/>
+          <a:p/>
+        </p:txBody>
+      </p:sp>
+      <p:sp>
+        <p:nvSpPr>
+          <p:cNvPr id="5" name="Oval 4"/>
+          <p:cNvSpPr/>
+          <p:nvPr/>
+        </p:nvSpPr>
+        <p:spPr>
+          <a:xfrm>
+            <a:off x="10799064" y="2057400"/>
+            <a:ext cx="548640" cy="548640"/>
+          </a:xfrm>
+          <a:prstGeom prst="ellipse">
+            <a:avLst/>
+          </a:prstGeom>
+          <a:solidFill>
+            <a:srgbClr val="022349"/>
+          </a:solidFill>
+          <a:ln w="19050">
+            <a:solidFill>
+              <a:srgbClr val="487CFF"/>
+            </a:solidFill>
+          </a:ln>
+          <a:effectLst/>
+        </p:spPr>
+        <p:style>
+          <a:lnRef idx="1">
+            <a:schemeClr val="accent1"/>
+          </a:lnRef>
+          <a:fillRef idx="3">
+            <a:schemeClr val="accent1"/>
+          </a:fillRef>
+          <a:effectRef idx="2">
+            <a:schemeClr val="accent1"/>
+          </a:effectRef>
+          <a:fontRef idx="minor">
+            <a:schemeClr val="lt1"/>
+          </a:fontRef>
+        </p:style>
+        <p:txBody>
+          <a:bodyPr rtlCol="0" anchor="ctr" lIns="0" rIns="0" tIns="0" bIns="0"/>
+          <a:lstStyle/>
+          <a:p>
+            <a:pPr rtl="1" algn="ctr" marL="0" indent="0">
+              <a:lnSpc>
+                <a:spcPct val="108000"/>
+              </a:lnSpc>
+              <a:buNone/>
+            </a:pPr>
+            <a:r>
+              <a:rPr sz="1700" b="1" i="0" lang="he-IL">
+                <a:solidFill>
+                  <a:srgbClr val="F2F5FA"/>
+                </a:solidFill>
+                <a:latin typeface="Arial"/>
+                <a:cs typeface="Arial"/>
+              </a:rPr>
+              <a:t>⚙️</a:t>
+            </a:r>
+          </a:p>
+        </p:txBody>
+      </p:sp>
+      <p:sp>
+        <p:nvSpPr>
+          <p:cNvPr id="6" name="TextBox 5"/>
+          <p:cNvSpPr txBox="1"/>
+          <p:nvPr/>
+        </p:nvSpPr>
+        <p:spPr>
+          <a:xfrm>
+            <a:off x="9180576" y="2112263"/>
+            <a:ext cx="1572768" cy="365760"/>
+          </a:xfrm>
+          <a:prstGeom prst="rect">
+            <a:avLst/>
+          </a:prstGeom>
+          <a:noFill/>
+        </p:spPr>
+        <p:txBody>
+          <a:bodyPr wrap="square" lIns="0" rIns="0" tIns="0" bIns="0" anchor="t" rtlCol="0">
+            <a:spAutoFit/>
+          </a:bodyPr>
+          <a:lstStyle/>
+          <a:p>
+            <a:pPr rtl="1" algn="r" marL="0" indent="0">
+              <a:lnSpc>
+                <a:spcPct val="108000"/>
+              </a:lnSpc>
+              <a:buNone/>
+            </a:pPr>
+            <a:r>
+              <a:rPr sz="1550" b="1" i="0" lang="he-IL">
+                <a:solidFill>
+                  <a:srgbClr val="EBEDF0"/>
+                </a:solidFill>
+                <a:latin typeface="Arial"/>
+                <a:cs typeface="Arial"/>
+              </a:rPr>
+              <a:t>הוראות קבועות</a:t>
+            </a:r>
+          </a:p>
+        </p:txBody>
+      </p:sp>
+      <p:sp>
+        <p:nvSpPr>
+          <p:cNvPr id="7" name="TextBox 6"/>
+          <p:cNvSpPr txBox="1"/>
+          <p:nvPr/>
+        </p:nvSpPr>
+        <p:spPr>
+          <a:xfrm>
+            <a:off x="9180576" y="2624327"/>
+            <a:ext cx="2167128" cy="731520"/>
+          </a:xfrm>
+          <a:prstGeom prst="rect">
+            <a:avLst/>
+          </a:prstGeom>
+          <a:noFill/>
+        </p:spPr>
+        <p:txBody>
+          <a:bodyPr wrap="square" lIns="0" rIns="0" tIns="0" bIns="0" anchor="t" rtlCol="0">
+            <a:spAutoFit/>
+          </a:bodyPr>
+          <a:lstStyle/>
+          <a:p>
+            <a:pPr rtl="1" algn="r" marL="0" indent="0">
+              <a:lnSpc>
+                <a:spcPct val="108000"/>
+              </a:lnSpc>
+              <a:buNone/>
+            </a:pPr>
+            <a:r>
+              <a:rPr sz="1300" b="0" i="0" lang="he-IL">
+                <a:solidFill>
+                  <a:srgbClr val="EBEDF0"/>
+                </a:solidFill>
+                <a:latin typeface="Arial"/>
+                <a:cs typeface="Arial"/>
+              </a:rPr>
+              <a:t>בהגדרות: מי אתם ואיך לכתוב. פעם אחת, לתמיד.</a:t>
+            </a:r>
+          </a:p>
+        </p:txBody>
+      </p:sp>
+      <p:sp>
+        <p:nvSpPr>
+          <p:cNvPr id="8" name="Rounded Rectangle 7"/>
+          <p:cNvSpPr/>
+          <p:nvPr/>
+        </p:nvSpPr>
+        <p:spPr>
+          <a:xfrm>
+            <a:off x="6217920" y="1874519"/>
+            <a:ext cx="2532888" cy="1600200"/>
+          </a:xfrm>
+          <a:prstGeom prst="roundRect">
+            <a:avLst>
+              <a:gd name="adj" fmla="val 3000"/>
+            </a:avLst>
+          </a:prstGeom>
+          <a:solidFill>
+            <a:srgbClr val="101620"/>
+          </a:solidFill>
+          <a:ln w="19050">
+            <a:solidFill>
+              <a:srgbClr val="002A80"/>
+            </a:solidFill>
+          </a:ln>
+          <a:effectLst/>
+        </p:spPr>
+        <p:style>
+          <a:lnRef idx="1">
+            <a:schemeClr val="accent1"/>
+          </a:lnRef>
+          <a:fillRef idx="3">
+            <a:schemeClr val="accent1"/>
+          </a:fillRef>
+          <a:effectRef idx="2">
+            <a:schemeClr val="accent1"/>
+          </a:effectRef>
+          <a:fontRef idx="minor">
+            <a:schemeClr val="lt1"/>
+          </a:fontRef>
+        </p:style>
+        <p:txBody>
+          <a:bodyPr rtlCol="0" anchor="ctr"/>
+          <a:lstStyle/>
+          <a:p/>
+        </p:txBody>
+      </p:sp>
+      <p:sp>
+        <p:nvSpPr>
+          <p:cNvPr id="9" name="Oval 8"/>
+          <p:cNvSpPr/>
+          <p:nvPr/>
+        </p:nvSpPr>
+        <p:spPr>
+          <a:xfrm>
+            <a:off x="8019288" y="2057400"/>
+            <a:ext cx="548640" cy="548640"/>
+          </a:xfrm>
+          <a:prstGeom prst="ellipse">
+            <a:avLst/>
+          </a:prstGeom>
+          <a:solidFill>
+            <a:srgbClr val="022349"/>
+          </a:solidFill>
+          <a:ln w="19050">
+            <a:solidFill>
+              <a:srgbClr val="487CFF"/>
+            </a:solidFill>
+          </a:ln>
+          <a:effectLst/>
+        </p:spPr>
+        <p:style>
+          <a:lnRef idx="1">
+            <a:schemeClr val="accent1"/>
+          </a:lnRef>
+          <a:fillRef idx="3">
+            <a:schemeClr val="accent1"/>
+          </a:fillRef>
+          <a:effectRef idx="2">
+            <a:schemeClr val="accent1"/>
+          </a:effectRef>
+          <a:fontRef idx="minor">
+            <a:schemeClr val="lt1"/>
+          </a:fontRef>
+        </p:style>
+        <p:txBody>
+          <a:bodyPr rtlCol="0" anchor="ctr" lIns="0" rIns="0" tIns="0" bIns="0"/>
+          <a:lstStyle/>
+          <a:p>
+            <a:pPr rtl="1" algn="ctr" marL="0" indent="0">
+              <a:lnSpc>
+                <a:spcPct val="108000"/>
+              </a:lnSpc>
+              <a:buNone/>
+            </a:pPr>
+            <a:r>
+              <a:rPr sz="1700" b="1" i="0" lang="he-IL">
+                <a:solidFill>
+                  <a:srgbClr val="F2F5FA"/>
+                </a:solidFill>
+                <a:latin typeface="Arial"/>
+                <a:cs typeface="Arial"/>
+              </a:rPr>
+              <a:t>🏦</a:t>
+            </a:r>
+          </a:p>
+        </p:txBody>
+      </p:sp>
+      <p:sp>
+        <p:nvSpPr>
+          <p:cNvPr id="10" name="TextBox 9"/>
+          <p:cNvSpPr txBox="1"/>
+          <p:nvPr/>
+        </p:nvSpPr>
+        <p:spPr>
+          <a:xfrm>
+            <a:off x="6400800" y="2112263"/>
+            <a:ext cx="1572768" cy="365760"/>
+          </a:xfrm>
+          <a:prstGeom prst="rect">
+            <a:avLst/>
+          </a:prstGeom>
+          <a:noFill/>
+        </p:spPr>
+        <p:txBody>
+          <a:bodyPr wrap="square" lIns="0" rIns="0" tIns="0" bIns="0" anchor="t" rtlCol="0">
+            <a:spAutoFit/>
+          </a:bodyPr>
+          <a:lstStyle/>
+          <a:p>
+            <a:pPr rtl="1" algn="r" marL="0" indent="0">
+              <a:lnSpc>
+                <a:spcPct val="108000"/>
+              </a:lnSpc>
+              <a:buNone/>
+            </a:pPr>
+            <a:r>
+              <a:rPr sz="1550" b="1" i="0" lang="he-IL">
+                <a:solidFill>
+                  <a:srgbClr val="EBEDF0"/>
+                </a:solidFill>
+                <a:latin typeface="Arial"/>
+                <a:cs typeface="Arial"/>
+              </a:rPr>
+              <a:t>בנק הנחיות</a:t>
+            </a:r>
+          </a:p>
+        </p:txBody>
+      </p:sp>
+      <p:sp>
+        <p:nvSpPr>
+          <p:cNvPr id="11" name="TextBox 10"/>
+          <p:cNvSpPr txBox="1"/>
+          <p:nvPr/>
+        </p:nvSpPr>
+        <p:spPr>
+          <a:xfrm>
+            <a:off x="6400800" y="2624327"/>
+            <a:ext cx="2167128" cy="731520"/>
+          </a:xfrm>
+          <a:prstGeom prst="rect">
+            <a:avLst/>
+          </a:prstGeom>
+          <a:noFill/>
+        </p:spPr>
+        <p:txBody>
+          <a:bodyPr wrap="square" lIns="0" rIns="0" tIns="0" bIns="0" anchor="t" rtlCol="0">
+            <a:spAutoFit/>
+          </a:bodyPr>
+          <a:lstStyle/>
+          <a:p>
+            <a:pPr rtl="1" algn="r" marL="0" indent="0">
+              <a:lnSpc>
+                <a:spcPct val="108000"/>
+              </a:lnSpc>
+              <a:buNone/>
+            </a:pPr>
+            <a:r>
+              <a:rPr sz="1300" b="0" i="0" lang="he-IL">
+                <a:solidFill>
+                  <a:srgbClr val="EBEDF0"/>
+                </a:solidFill>
+                <a:latin typeface="Arial"/>
+                <a:cs typeface="Arial"/>
+              </a:rPr>
+              <a:t>מסמך אחד עם ההנחיות שעבדו. מעתיקים ומשנים.</a:t>
+            </a:r>
+          </a:p>
+        </p:txBody>
+      </p:sp>
+      <p:sp>
+        <p:nvSpPr>
+          <p:cNvPr id="12" name="Rounded Rectangle 11"/>
+          <p:cNvSpPr/>
+          <p:nvPr/>
+        </p:nvSpPr>
+        <p:spPr>
+          <a:xfrm>
+            <a:off x="3438144" y="1874519"/>
+            <a:ext cx="2532888" cy="1600200"/>
+          </a:xfrm>
+          <a:prstGeom prst="roundRect">
+            <a:avLst>
+              <a:gd name="adj" fmla="val 3000"/>
+            </a:avLst>
+          </a:prstGeom>
+          <a:solidFill>
+            <a:srgbClr val="101620"/>
+          </a:solidFill>
+          <a:ln w="19050">
+            <a:solidFill>
+              <a:srgbClr val="002A80"/>
+            </a:solidFill>
+          </a:ln>
+          <a:effectLst/>
+        </p:spPr>
+        <p:style>
+          <a:lnRef idx="1">
+            <a:schemeClr val="accent1"/>
+          </a:lnRef>
+          <a:fillRef idx="3">
+            <a:schemeClr val="accent1"/>
+          </a:fillRef>
+          <a:effectRef idx="2">
+            <a:schemeClr val="accent1"/>
+          </a:effectRef>
+          <a:fontRef idx="minor">
+            <a:schemeClr val="lt1"/>
+          </a:fontRef>
+        </p:style>
+        <p:txBody>
+          <a:bodyPr rtlCol="0" anchor="ctr"/>
+          <a:lstStyle/>
+          <a:p/>
+        </p:txBody>
+      </p:sp>
+      <p:sp>
+        <p:nvSpPr>
+          <p:cNvPr id="13" name="Oval 12"/>
+          <p:cNvSpPr/>
+          <p:nvPr/>
+        </p:nvSpPr>
+        <p:spPr>
+          <a:xfrm>
+            <a:off x="5239512" y="2057400"/>
+            <a:ext cx="548640" cy="548640"/>
+          </a:xfrm>
+          <a:prstGeom prst="ellipse">
+            <a:avLst/>
+          </a:prstGeom>
+          <a:solidFill>
+            <a:srgbClr val="022349"/>
+          </a:solidFill>
+          <a:ln w="19050">
+            <a:solidFill>
+              <a:srgbClr val="487CFF"/>
+            </a:solidFill>
+          </a:ln>
+          <a:effectLst/>
+        </p:spPr>
+        <p:style>
+          <a:lnRef idx="1">
+            <a:schemeClr val="accent1"/>
+          </a:lnRef>
+          <a:fillRef idx="3">
+            <a:schemeClr val="accent1"/>
+          </a:fillRef>
+          <a:effectRef idx="2">
+            <a:schemeClr val="accent1"/>
+          </a:effectRef>
+          <a:fontRef idx="minor">
+            <a:schemeClr val="lt1"/>
+          </a:fontRef>
+        </p:style>
+        <p:txBody>
+          <a:bodyPr rtlCol="0" anchor="ctr" lIns="0" rIns="0" tIns="0" bIns="0"/>
+          <a:lstStyle/>
+          <a:p>
+            <a:pPr rtl="1" algn="ctr" marL="0" indent="0">
+              <a:lnSpc>
+                <a:spcPct val="108000"/>
+              </a:lnSpc>
+              <a:buNone/>
+            </a:pPr>
+            <a:r>
+              <a:rPr sz="1700" b="1" i="0" lang="he-IL">
+                <a:solidFill>
+                  <a:srgbClr val="F2F5FA"/>
+                </a:solidFill>
+                <a:latin typeface="Arial"/>
+                <a:cs typeface="Arial"/>
+              </a:rPr>
+              <a:t>🎙️</a:t>
+            </a:r>
+          </a:p>
+        </p:txBody>
+      </p:sp>
+      <p:sp>
+        <p:nvSpPr>
+          <p:cNvPr id="14" name="TextBox 13"/>
+          <p:cNvSpPr txBox="1"/>
+          <p:nvPr/>
+        </p:nvSpPr>
+        <p:spPr>
+          <a:xfrm>
+            <a:off x="3621024" y="2112263"/>
+            <a:ext cx="1572768" cy="365760"/>
+          </a:xfrm>
+          <a:prstGeom prst="rect">
+            <a:avLst/>
+          </a:prstGeom>
+          <a:noFill/>
+        </p:spPr>
+        <p:txBody>
+          <a:bodyPr wrap="square" lIns="0" rIns="0" tIns="0" bIns="0" anchor="t" rtlCol="0">
+            <a:spAutoFit/>
+          </a:bodyPr>
+          <a:lstStyle/>
+          <a:p>
+            <a:pPr rtl="1" algn="r" marL="0" indent="0">
+              <a:lnSpc>
+                <a:spcPct val="108000"/>
+              </a:lnSpc>
+              <a:buNone/>
+            </a:pPr>
+            <a:r>
+              <a:rPr sz="1550" b="1" i="0" lang="he-IL">
+                <a:solidFill>
+                  <a:srgbClr val="EBEDF0"/>
+                </a:solidFill>
+                <a:latin typeface="Arial"/>
+                <a:cs typeface="Arial"/>
+              </a:rPr>
+              <a:t>מדברים</a:t>
+            </a:r>
+          </a:p>
+        </p:txBody>
+      </p:sp>
+      <p:sp>
+        <p:nvSpPr>
+          <p:cNvPr id="15" name="TextBox 14"/>
+          <p:cNvSpPr txBox="1"/>
+          <p:nvPr/>
+        </p:nvSpPr>
+        <p:spPr>
+          <a:xfrm>
+            <a:off x="3621024" y="2624327"/>
+            <a:ext cx="2167128" cy="731520"/>
+          </a:xfrm>
+          <a:prstGeom prst="rect">
+            <a:avLst/>
+          </a:prstGeom>
+          <a:noFill/>
+        </p:spPr>
+        <p:txBody>
+          <a:bodyPr wrap="square" lIns="0" rIns="0" tIns="0" bIns="0" anchor="t" rtlCol="0">
+            <a:spAutoFit/>
+          </a:bodyPr>
+          <a:lstStyle/>
+          <a:p>
+            <a:pPr rtl="1" algn="r" marL="0" indent="0">
+              <a:lnSpc>
+                <a:spcPct val="108000"/>
+              </a:lnSpc>
+              <a:buNone/>
+            </a:pPr>
+            <a:r>
+              <a:rPr sz="1300" b="0" i="0" lang="he-IL">
+                <a:solidFill>
+                  <a:srgbClr val="EBEDF0"/>
+                </a:solidFill>
+                <a:latin typeface="Arial"/>
+                <a:cs typeface="Arial"/>
+              </a:rPr>
+              <a:t>הכתבה קולית: פי 3 מהר מהקלדה.</a:t>
+            </a:r>
+          </a:p>
+        </p:txBody>
+      </p:sp>
+      <p:sp>
+        <p:nvSpPr>
+          <p:cNvPr id="16" name="Rounded Rectangle 15"/>
+          <p:cNvSpPr/>
+          <p:nvPr/>
+        </p:nvSpPr>
+        <p:spPr>
+          <a:xfrm>
+            <a:off x="658368" y="1874519"/>
+            <a:ext cx="2532888" cy="1600200"/>
+          </a:xfrm>
+          <a:prstGeom prst="roundRect">
+            <a:avLst>
+              <a:gd name="adj" fmla="val 3000"/>
+            </a:avLst>
+          </a:prstGeom>
+          <a:solidFill>
+            <a:srgbClr val="101620"/>
+          </a:solidFill>
+          <a:ln w="19050">
+            <a:solidFill>
+              <a:srgbClr val="002A80"/>
+            </a:solidFill>
+          </a:ln>
+          <a:effectLst/>
+        </p:spPr>
+        <p:style>
+          <a:lnRef idx="1">
+            <a:schemeClr val="accent1"/>
+          </a:lnRef>
+          <a:fillRef idx="3">
+            <a:schemeClr val="accent1"/>
+          </a:fillRef>
+          <a:effectRef idx="2">
+            <a:schemeClr val="accent1"/>
+          </a:effectRef>
+          <a:fontRef idx="minor">
+            <a:schemeClr val="lt1"/>
+          </a:fontRef>
+        </p:style>
+        <p:txBody>
+          <a:bodyPr rtlCol="0" anchor="ctr"/>
+          <a:lstStyle/>
+          <a:p/>
+        </p:txBody>
+      </p:sp>
+      <p:sp>
+        <p:nvSpPr>
+          <p:cNvPr id="17" name="Oval 16"/>
+          <p:cNvSpPr/>
+          <p:nvPr/>
+        </p:nvSpPr>
+        <p:spPr>
+          <a:xfrm>
+            <a:off x="2459736" y="2057400"/>
+            <a:ext cx="548640" cy="548640"/>
+          </a:xfrm>
+          <a:prstGeom prst="ellipse">
+            <a:avLst/>
+          </a:prstGeom>
+          <a:solidFill>
+            <a:srgbClr val="022349"/>
+          </a:solidFill>
+          <a:ln w="19050">
+            <a:solidFill>
+              <a:srgbClr val="487CFF"/>
+            </a:solidFill>
+          </a:ln>
+          <a:effectLst/>
+        </p:spPr>
+        <p:style>
+          <a:lnRef idx="1">
+            <a:schemeClr val="accent1"/>
+          </a:lnRef>
+          <a:fillRef idx="3">
+            <a:schemeClr val="accent1"/>
+          </a:fillRef>
+          <a:effectRef idx="2">
+            <a:schemeClr val="accent1"/>
+          </a:effectRef>
+          <a:fontRef idx="minor">
+            <a:schemeClr val="lt1"/>
+          </a:fontRef>
+        </p:style>
+        <p:txBody>
+          <a:bodyPr rtlCol="0" anchor="ctr" lIns="0" rIns="0" tIns="0" bIns="0"/>
+          <a:lstStyle/>
+          <a:p>
+            <a:pPr rtl="1" algn="ctr" marL="0" indent="0">
+              <a:lnSpc>
+                <a:spcPct val="108000"/>
+              </a:lnSpc>
+              <a:buNone/>
+            </a:pPr>
+            <a:r>
+              <a:rPr sz="1700" b="1" i="0" lang="he-IL">
+                <a:solidFill>
+                  <a:srgbClr val="F2F5FA"/>
+                </a:solidFill>
+                <a:latin typeface="Arial"/>
+                <a:cs typeface="Arial"/>
+              </a:rPr>
+              <a:t>📸</a:t>
+            </a:r>
+          </a:p>
+        </p:txBody>
+      </p:sp>
+      <p:sp>
+        <p:nvSpPr>
+          <p:cNvPr id="18" name="TextBox 17"/>
+          <p:cNvSpPr txBox="1"/>
+          <p:nvPr/>
+        </p:nvSpPr>
+        <p:spPr>
+          <a:xfrm>
+            <a:off x="841248" y="2112263"/>
+            <a:ext cx="1572768" cy="365760"/>
+          </a:xfrm>
+          <a:prstGeom prst="rect">
+            <a:avLst/>
+          </a:prstGeom>
+          <a:noFill/>
+        </p:spPr>
+        <p:txBody>
+          <a:bodyPr wrap="square" lIns="0" rIns="0" tIns="0" bIns="0" anchor="t" rtlCol="0">
+            <a:spAutoFit/>
+          </a:bodyPr>
+          <a:lstStyle/>
+          <a:p>
+            <a:pPr rtl="1" algn="r" marL="0" indent="0">
+              <a:lnSpc>
+                <a:spcPct val="108000"/>
+              </a:lnSpc>
+              <a:buNone/>
+            </a:pPr>
+            <a:r>
+              <a:rPr sz="1550" b="1" i="0" lang="he-IL">
+                <a:solidFill>
+                  <a:srgbClr val="EBEDF0"/>
+                </a:solidFill>
+                <a:latin typeface="Arial"/>
+                <a:cs typeface="Arial"/>
+              </a:rPr>
+              <a:t>מצלמים מסך</a:t>
+            </a:r>
+          </a:p>
+        </p:txBody>
+      </p:sp>
+      <p:sp>
+        <p:nvSpPr>
+          <p:cNvPr id="19" name="TextBox 18"/>
+          <p:cNvSpPr txBox="1"/>
+          <p:nvPr/>
+        </p:nvSpPr>
+        <p:spPr>
+          <a:xfrm>
+            <a:off x="841248" y="2624327"/>
+            <a:ext cx="2167128" cy="731520"/>
+          </a:xfrm>
+          <a:prstGeom prst="rect">
+            <a:avLst/>
+          </a:prstGeom>
+          <a:noFill/>
+        </p:spPr>
+        <p:txBody>
+          <a:bodyPr wrap="square" lIns="0" rIns="0" tIns="0" bIns="0" anchor="t" rtlCol="0">
+            <a:spAutoFit/>
+          </a:bodyPr>
+          <a:lstStyle/>
+          <a:p>
+            <a:pPr rtl="1" algn="r" marL="0" indent="0">
+              <a:lnSpc>
+                <a:spcPct val="108000"/>
+              </a:lnSpc>
+              <a:buNone/>
+            </a:pPr>
+            <a:r>
+              <a:rPr sz="1300" b="0" i="0" lang="he-IL">
+                <a:solidFill>
+                  <a:srgbClr val="EBEDF0"/>
+                </a:solidFill>
+                <a:latin typeface="Arial"/>
+                <a:cs typeface="Arial"/>
+              </a:rPr>
+              <a:t>במקום להסביר שגיאה, מדביקים תמונה.</a:t>
+            </a:r>
+          </a:p>
+        </p:txBody>
+      </p:sp>
+      <p:sp>
+        <p:nvSpPr>
+          <p:cNvPr id="20" name="Rounded Rectangle 19"/>
+          <p:cNvSpPr/>
+          <p:nvPr/>
+        </p:nvSpPr>
+        <p:spPr>
+          <a:xfrm>
+            <a:off x="8997696" y="3675887"/>
+            <a:ext cx="2532888" cy="1600200"/>
+          </a:xfrm>
+          <a:prstGeom prst="roundRect">
+            <a:avLst>
+              <a:gd name="adj" fmla="val 3000"/>
+            </a:avLst>
+          </a:prstGeom>
+          <a:solidFill>
+            <a:srgbClr val="101620"/>
+          </a:solidFill>
+          <a:ln w="19050">
+            <a:solidFill>
+              <a:srgbClr val="002A80"/>
+            </a:solidFill>
+          </a:ln>
+          <a:effectLst/>
+        </p:spPr>
+        <p:style>
+          <a:lnRef idx="1">
+            <a:schemeClr val="accent1"/>
+          </a:lnRef>
+          <a:fillRef idx="3">
+            <a:schemeClr val="accent1"/>
+          </a:fillRef>
+          <a:effectRef idx="2">
+            <a:schemeClr val="accent1"/>
+          </a:effectRef>
+          <a:fontRef idx="minor">
+            <a:schemeClr val="lt1"/>
+          </a:fontRef>
+        </p:style>
+        <p:txBody>
+          <a:bodyPr rtlCol="0" anchor="ctr"/>
+          <a:lstStyle/>
+          <a:p/>
+        </p:txBody>
+      </p:sp>
+      <p:sp>
+        <p:nvSpPr>
+          <p:cNvPr id="21" name="Oval 20"/>
+          <p:cNvSpPr/>
+          <p:nvPr/>
+        </p:nvSpPr>
+        <p:spPr>
+          <a:xfrm>
+            <a:off x="10799064" y="3858768"/>
+            <a:ext cx="548640" cy="548640"/>
+          </a:xfrm>
+          <a:prstGeom prst="ellipse">
+            <a:avLst/>
+          </a:prstGeom>
+          <a:solidFill>
+            <a:srgbClr val="022349"/>
+          </a:solidFill>
+          <a:ln w="19050">
+            <a:solidFill>
+              <a:srgbClr val="487CFF"/>
+            </a:solidFill>
+          </a:ln>
+          <a:effectLst/>
+        </p:spPr>
+        <p:style>
+          <a:lnRef idx="1">
+            <a:schemeClr val="accent1"/>
+          </a:lnRef>
+          <a:fillRef idx="3">
+            <a:schemeClr val="accent1"/>
+          </a:fillRef>
+          <a:effectRef idx="2">
+            <a:schemeClr val="accent1"/>
+          </a:effectRef>
+          <a:fontRef idx="minor">
+            <a:schemeClr val="lt1"/>
+          </a:fontRef>
+        </p:style>
+        <p:txBody>
+          <a:bodyPr rtlCol="0" anchor="ctr" lIns="0" rIns="0" tIns="0" bIns="0"/>
+          <a:lstStyle/>
+          <a:p>
+            <a:pPr rtl="1" algn="ctr" marL="0" indent="0">
+              <a:lnSpc>
+                <a:spcPct val="108000"/>
+              </a:lnSpc>
+              <a:buNone/>
+            </a:pPr>
+            <a:r>
+              <a:rPr sz="1700" b="1" i="0" lang="he-IL">
+                <a:solidFill>
+                  <a:srgbClr val="F2F5FA"/>
+                </a:solidFill>
+                <a:latin typeface="Arial"/>
+                <a:cs typeface="Arial"/>
+              </a:rPr>
+              <a:t>🔀</a:t>
+            </a:r>
+          </a:p>
+        </p:txBody>
+      </p:sp>
+      <p:sp>
+        <p:nvSpPr>
+          <p:cNvPr id="22" name="TextBox 21"/>
+          <p:cNvSpPr txBox="1"/>
+          <p:nvPr/>
+        </p:nvSpPr>
+        <p:spPr>
+          <a:xfrm>
+            <a:off x="9180576" y="3913631"/>
+            <a:ext cx="1572768" cy="365760"/>
+          </a:xfrm>
+          <a:prstGeom prst="rect">
+            <a:avLst/>
+          </a:prstGeom>
+          <a:noFill/>
+        </p:spPr>
+        <p:txBody>
+          <a:bodyPr wrap="square" lIns="0" rIns="0" tIns="0" bIns="0" anchor="t" rtlCol="0">
+            <a:spAutoFit/>
+          </a:bodyPr>
+          <a:lstStyle/>
+          <a:p>
+            <a:pPr rtl="1" algn="r" marL="0" indent="0">
+              <a:lnSpc>
+                <a:spcPct val="108000"/>
+              </a:lnSpc>
+              <a:buNone/>
+            </a:pPr>
+            <a:r>
+              <a:rPr sz="1550" b="1" i="0" lang="he-IL">
+                <a:solidFill>
+                  <a:srgbClr val="EBEDF0"/>
+                </a:solidFill>
+                <a:latin typeface="Arial"/>
+                <a:cs typeface="Arial"/>
+              </a:rPr>
+              <a:t>3 גרסאות</a:t>
+            </a:r>
+          </a:p>
+        </p:txBody>
+      </p:sp>
+      <p:sp>
+        <p:nvSpPr>
+          <p:cNvPr id="23" name="TextBox 22"/>
+          <p:cNvSpPr txBox="1"/>
+          <p:nvPr/>
+        </p:nvSpPr>
+        <p:spPr>
+          <a:xfrm>
+            <a:off x="9180576" y="4425696"/>
+            <a:ext cx="2167128" cy="731520"/>
+          </a:xfrm>
+          <a:prstGeom prst="rect">
+            <a:avLst/>
+          </a:prstGeom>
+          <a:noFill/>
+        </p:spPr>
+        <p:txBody>
+          <a:bodyPr wrap="square" lIns="0" rIns="0" tIns="0" bIns="0" anchor="t" rtlCol="0">
+            <a:spAutoFit/>
+          </a:bodyPr>
+          <a:lstStyle/>
+          <a:p>
+            <a:pPr rtl="1" algn="r" marL="0" indent="0">
+              <a:lnSpc>
+                <a:spcPct val="108000"/>
+              </a:lnSpc>
+              <a:buNone/>
+            </a:pPr>
+            <a:r>
+              <a:rPr sz="1300" b="0" i="0" lang="he-IL">
+                <a:solidFill>
+                  <a:srgbClr val="EBEDF0"/>
+                </a:solidFill>
+                <a:latin typeface="Arial"/>
+                <a:cs typeface="Arial"/>
+              </a:rPr>
+              <a:t>"תן 3 גרסאות שונות", ובוחרים.</a:t>
+            </a:r>
+          </a:p>
+        </p:txBody>
+      </p:sp>
+      <p:sp>
+        <p:nvSpPr>
+          <p:cNvPr id="24" name="Rounded Rectangle 23"/>
+          <p:cNvSpPr/>
+          <p:nvPr/>
+        </p:nvSpPr>
+        <p:spPr>
+          <a:xfrm>
+            <a:off x="6217920" y="3675887"/>
+            <a:ext cx="2532888" cy="1600200"/>
+          </a:xfrm>
+          <a:prstGeom prst="roundRect">
+            <a:avLst>
+              <a:gd name="adj" fmla="val 3000"/>
+            </a:avLst>
+          </a:prstGeom>
+          <a:solidFill>
+            <a:srgbClr val="101620"/>
+          </a:solidFill>
+          <a:ln w="19050">
+            <a:solidFill>
+              <a:srgbClr val="002A80"/>
+            </a:solidFill>
+          </a:ln>
+          <a:effectLst/>
+        </p:spPr>
+        <p:style>
+          <a:lnRef idx="1">
+            <a:schemeClr val="accent1"/>
+          </a:lnRef>
+          <a:fillRef idx="3">
+            <a:schemeClr val="accent1"/>
+          </a:fillRef>
+          <a:effectRef idx="2">
+            <a:schemeClr val="accent1"/>
+          </a:effectRef>
+          <a:fontRef idx="minor">
+            <a:schemeClr val="lt1"/>
+          </a:fontRef>
+        </p:style>
+        <p:txBody>
+          <a:bodyPr rtlCol="0" anchor="ctr"/>
+          <a:lstStyle/>
+          <a:p/>
+        </p:txBody>
+      </p:sp>
+      <p:sp>
+        <p:nvSpPr>
+          <p:cNvPr id="25" name="Oval 24"/>
+          <p:cNvSpPr/>
+          <p:nvPr/>
+        </p:nvSpPr>
+        <p:spPr>
+          <a:xfrm>
+            <a:off x="8019288" y="3858768"/>
+            <a:ext cx="548640" cy="548640"/>
+          </a:xfrm>
+          <a:prstGeom prst="ellipse">
+            <a:avLst/>
+          </a:prstGeom>
+          <a:solidFill>
+            <a:srgbClr val="022349"/>
+          </a:solidFill>
+          <a:ln w="19050">
+            <a:solidFill>
+              <a:srgbClr val="487CFF"/>
+            </a:solidFill>
+          </a:ln>
+          <a:effectLst/>
+        </p:spPr>
+        <p:style>
+          <a:lnRef idx="1">
+            <a:schemeClr val="accent1"/>
+          </a:lnRef>
+          <a:fillRef idx="3">
+            <a:schemeClr val="accent1"/>
+          </a:fillRef>
+          <a:effectRef idx="2">
+            <a:schemeClr val="accent1"/>
+          </a:effectRef>
+          <a:fontRef idx="minor">
+            <a:schemeClr val="lt1"/>
+          </a:fontRef>
+        </p:style>
+        <p:txBody>
+          <a:bodyPr rtlCol="0" anchor="ctr" lIns="0" rIns="0" tIns="0" bIns="0"/>
+          <a:lstStyle/>
+          <a:p>
+            <a:pPr rtl="1" algn="ctr" marL="0" indent="0">
+              <a:lnSpc>
+                <a:spcPct val="108000"/>
+              </a:lnSpc>
+              <a:buNone/>
+            </a:pPr>
+            <a:r>
+              <a:rPr sz="1700" b="1" i="0" lang="he-IL">
+                <a:solidFill>
+                  <a:srgbClr val="F2F5FA"/>
+                </a:solidFill>
+                <a:latin typeface="Arial"/>
+                <a:cs typeface="Arial"/>
+              </a:rPr>
+              <a:t>📊</a:t>
+            </a:r>
+          </a:p>
+        </p:txBody>
+      </p:sp>
+      <p:sp>
+        <p:nvSpPr>
+          <p:cNvPr id="26" name="TextBox 25"/>
+          <p:cNvSpPr txBox="1"/>
+          <p:nvPr/>
+        </p:nvSpPr>
+        <p:spPr>
+          <a:xfrm>
+            <a:off x="6400800" y="3913631"/>
+            <a:ext cx="1572768" cy="365760"/>
+          </a:xfrm>
+          <a:prstGeom prst="rect">
+            <a:avLst/>
+          </a:prstGeom>
+          <a:noFill/>
+        </p:spPr>
+        <p:txBody>
+          <a:bodyPr wrap="square" lIns="0" rIns="0" tIns="0" bIns="0" anchor="t" rtlCol="0">
+            <a:spAutoFit/>
+          </a:bodyPr>
+          <a:lstStyle/>
+          <a:p>
+            <a:pPr rtl="1" algn="r" marL="0" indent="0">
+              <a:lnSpc>
+                <a:spcPct val="108000"/>
+              </a:lnSpc>
+              <a:buNone/>
+            </a:pPr>
+            <a:r>
+              <a:rPr sz="1550" b="1" i="0" lang="he-IL">
+                <a:solidFill>
+                  <a:srgbClr val="EBEDF0"/>
+                </a:solidFill>
+                <a:latin typeface="Arial"/>
+                <a:cs typeface="Arial"/>
+              </a:rPr>
+              <a:t>ישר לאקסל</a:t>
+            </a:r>
+          </a:p>
+        </p:txBody>
+      </p:sp>
+      <p:sp>
+        <p:nvSpPr>
+          <p:cNvPr id="27" name="TextBox 26"/>
+          <p:cNvSpPr txBox="1"/>
+          <p:nvPr/>
+        </p:nvSpPr>
+        <p:spPr>
+          <a:xfrm>
+            <a:off x="6400800" y="4425696"/>
+            <a:ext cx="2167128" cy="731520"/>
+          </a:xfrm>
+          <a:prstGeom prst="rect">
+            <a:avLst/>
+          </a:prstGeom>
+          <a:noFill/>
+        </p:spPr>
+        <p:txBody>
+          <a:bodyPr wrap="square" lIns="0" rIns="0" tIns="0" bIns="0" anchor="t" rtlCol="0">
+            <a:spAutoFit/>
+          </a:bodyPr>
+          <a:lstStyle/>
+          <a:p>
+            <a:pPr rtl="1" algn="r" marL="0" indent="0">
+              <a:lnSpc>
+                <a:spcPct val="108000"/>
+              </a:lnSpc>
+              <a:buNone/>
+            </a:pPr>
+            <a:r>
+              <a:rPr sz="1300" b="0" i="0" lang="he-IL">
+                <a:solidFill>
+                  <a:srgbClr val="EBEDF0"/>
+                </a:solidFill>
+                <a:latin typeface="Arial"/>
+                <a:cs typeface="Arial"/>
+              </a:rPr>
+              <a:t>"בטבלה שאפשר להדביק באקסל".</a:t>
+            </a:r>
+          </a:p>
+        </p:txBody>
+      </p:sp>
+      <p:sp>
+        <p:nvSpPr>
+          <p:cNvPr id="28" name="Rounded Rectangle 27"/>
+          <p:cNvSpPr/>
+          <p:nvPr/>
+        </p:nvSpPr>
+        <p:spPr>
+          <a:xfrm>
+            <a:off x="3438144" y="3675887"/>
+            <a:ext cx="2532888" cy="1600200"/>
+          </a:xfrm>
+          <a:prstGeom prst="roundRect">
+            <a:avLst>
+              <a:gd name="adj" fmla="val 3000"/>
+            </a:avLst>
+          </a:prstGeom>
+          <a:solidFill>
+            <a:srgbClr val="101620"/>
+          </a:solidFill>
+          <a:ln w="19050">
+            <a:solidFill>
+              <a:srgbClr val="002A80"/>
+            </a:solidFill>
+          </a:ln>
+          <a:effectLst/>
+        </p:spPr>
+        <p:style>
+          <a:lnRef idx="1">
+            <a:schemeClr val="accent1"/>
+          </a:lnRef>
+          <a:fillRef idx="3">
+            <a:schemeClr val="accent1"/>
+          </a:fillRef>
+          <a:effectRef idx="2">
+            <a:schemeClr val="accent1"/>
+          </a:effectRef>
+          <a:fontRef idx="minor">
+            <a:schemeClr val="lt1"/>
+          </a:fontRef>
+        </p:style>
+        <p:txBody>
+          <a:bodyPr rtlCol="0" anchor="ctr"/>
+          <a:lstStyle/>
+          <a:p/>
+        </p:txBody>
+      </p:sp>
+      <p:sp>
+        <p:nvSpPr>
+          <p:cNvPr id="29" name="Oval 28"/>
+          <p:cNvSpPr/>
+          <p:nvPr/>
+        </p:nvSpPr>
+        <p:spPr>
+          <a:xfrm>
+            <a:off x="5239512" y="3858768"/>
+            <a:ext cx="548640" cy="548640"/>
+          </a:xfrm>
+          <a:prstGeom prst="ellipse">
+            <a:avLst/>
+          </a:prstGeom>
+          <a:solidFill>
+            <a:srgbClr val="022349"/>
+          </a:solidFill>
+          <a:ln w="19050">
+            <a:solidFill>
+              <a:srgbClr val="487CFF"/>
+            </a:solidFill>
+          </a:ln>
+          <a:effectLst/>
+        </p:spPr>
+        <p:style>
+          <a:lnRef idx="1">
+            <a:schemeClr val="accent1"/>
+          </a:lnRef>
+          <a:fillRef idx="3">
+            <a:schemeClr val="accent1"/>
+          </a:fillRef>
+          <a:effectRef idx="2">
+            <a:schemeClr val="accent1"/>
+          </a:effectRef>
+          <a:fontRef idx="minor">
+            <a:schemeClr val="lt1"/>
+          </a:fontRef>
+        </p:style>
+        <p:txBody>
+          <a:bodyPr rtlCol="0" anchor="ctr" lIns="0" rIns="0" tIns="0" bIns="0"/>
+          <a:lstStyle/>
+          <a:p>
+            <a:pPr rtl="1" algn="ctr" marL="0" indent="0">
+              <a:lnSpc>
+                <a:spcPct val="108000"/>
+              </a:lnSpc>
+              <a:buNone/>
+            </a:pPr>
+            <a:r>
+              <a:rPr sz="1700" b="1" i="0" lang="he-IL">
+                <a:solidFill>
+                  <a:srgbClr val="F2F5FA"/>
+                </a:solidFill>
+                <a:latin typeface="Arial"/>
+                <a:cs typeface="Arial"/>
+              </a:rPr>
+              <a:t>❓</a:t>
+            </a:r>
+          </a:p>
+        </p:txBody>
+      </p:sp>
+      <p:sp>
+        <p:nvSpPr>
+          <p:cNvPr id="30" name="TextBox 29"/>
+          <p:cNvSpPr txBox="1"/>
+          <p:nvPr/>
+        </p:nvSpPr>
+        <p:spPr>
+          <a:xfrm>
+            <a:off x="3621024" y="3913631"/>
+            <a:ext cx="1572768" cy="365760"/>
+          </a:xfrm>
+          <a:prstGeom prst="rect">
+            <a:avLst/>
+          </a:prstGeom>
+          <a:noFill/>
+        </p:spPr>
+        <p:txBody>
+          <a:bodyPr wrap="square" lIns="0" rIns="0" tIns="0" bIns="0" anchor="t" rtlCol="0">
+            <a:spAutoFit/>
+          </a:bodyPr>
+          <a:lstStyle/>
+          <a:p>
+            <a:pPr rtl="1" algn="r" marL="0" indent="0">
+              <a:lnSpc>
+                <a:spcPct val="108000"/>
+              </a:lnSpc>
+              <a:buNone/>
+            </a:pPr>
+            <a:r>
+              <a:rPr sz="1550" b="1" i="0" lang="he-IL">
+                <a:solidFill>
+                  <a:srgbClr val="EBEDF0"/>
+                </a:solidFill>
+                <a:latin typeface="Arial"/>
+                <a:cs typeface="Arial"/>
+              </a:rPr>
+              <a:t>שאל לפני</a:t>
+            </a:r>
+          </a:p>
+        </p:txBody>
+      </p:sp>
+      <p:sp>
+        <p:nvSpPr>
+          <p:cNvPr id="31" name="TextBox 30"/>
+          <p:cNvSpPr txBox="1"/>
+          <p:nvPr/>
+        </p:nvSpPr>
+        <p:spPr>
+          <a:xfrm>
+            <a:off x="3621024" y="4425696"/>
+            <a:ext cx="2167128" cy="731520"/>
+          </a:xfrm>
+          <a:prstGeom prst="rect">
+            <a:avLst/>
+          </a:prstGeom>
+          <a:noFill/>
+        </p:spPr>
+        <p:txBody>
+          <a:bodyPr wrap="square" lIns="0" rIns="0" tIns="0" bIns="0" anchor="t" rtlCol="0">
+            <a:spAutoFit/>
+          </a:bodyPr>
+          <a:lstStyle/>
+          <a:p>
+            <a:pPr rtl="1" algn="r" marL="0" indent="0">
+              <a:lnSpc>
+                <a:spcPct val="108000"/>
+              </a:lnSpc>
+              <a:buNone/>
+            </a:pPr>
+            <a:r>
+              <a:rPr sz="1300" b="0" i="0" lang="he-IL">
+                <a:solidFill>
+                  <a:srgbClr val="EBEDF0"/>
+                </a:solidFill>
+                <a:latin typeface="Arial"/>
+                <a:cs typeface="Arial"/>
+              </a:rPr>
+              <a:t>"לפני שאתה עונה, מה חסר לך?"</a:t>
+            </a:r>
+          </a:p>
+        </p:txBody>
+      </p:sp>
+      <p:sp>
+        <p:nvSpPr>
+          <p:cNvPr id="32" name="Rounded Rectangle 31"/>
+          <p:cNvSpPr/>
+          <p:nvPr/>
+        </p:nvSpPr>
+        <p:spPr>
+          <a:xfrm>
+            <a:off x="658368" y="3675887"/>
+            <a:ext cx="2532888" cy="1600200"/>
+          </a:xfrm>
+          <a:prstGeom prst="roundRect">
+            <a:avLst>
+              <a:gd name="adj" fmla="val 3000"/>
+            </a:avLst>
+          </a:prstGeom>
+          <a:solidFill>
+            <a:srgbClr val="101620"/>
+          </a:solidFill>
+          <a:ln w="19050">
+            <a:solidFill>
+              <a:srgbClr val="002A80"/>
+            </a:solidFill>
+          </a:ln>
+          <a:effectLst/>
+        </p:spPr>
+        <p:style>
+          <a:lnRef idx="1">
+            <a:schemeClr val="accent1"/>
+          </a:lnRef>
+          <a:fillRef idx="3">
+            <a:schemeClr val="accent1"/>
+          </a:fillRef>
+          <a:effectRef idx="2">
+            <a:schemeClr val="accent1"/>
+          </a:effectRef>
+          <a:fontRef idx="minor">
+            <a:schemeClr val="lt1"/>
+          </a:fontRef>
+        </p:style>
+        <p:txBody>
+          <a:bodyPr rtlCol="0" anchor="ctr"/>
+          <a:lstStyle/>
+          <a:p/>
+        </p:txBody>
+      </p:sp>
+      <p:sp>
+        <p:nvSpPr>
+          <p:cNvPr id="33" name="Oval 32"/>
+          <p:cNvSpPr/>
+          <p:nvPr/>
+        </p:nvSpPr>
+        <p:spPr>
+          <a:xfrm>
+            <a:off x="2459736" y="3858768"/>
+            <a:ext cx="548640" cy="548640"/>
+          </a:xfrm>
+          <a:prstGeom prst="ellipse">
+            <a:avLst/>
+          </a:prstGeom>
+          <a:solidFill>
+            <a:srgbClr val="022349"/>
+          </a:solidFill>
+          <a:ln w="19050">
+            <a:solidFill>
+              <a:srgbClr val="487CFF"/>
+            </a:solidFill>
+          </a:ln>
+          <a:effectLst/>
+        </p:spPr>
+        <p:style>
+          <a:lnRef idx="1">
+            <a:schemeClr val="accent1"/>
+          </a:lnRef>
+          <a:fillRef idx="3">
+            <a:schemeClr val="accent1"/>
+          </a:fillRef>
+          <a:effectRef idx="2">
+            <a:schemeClr val="accent1"/>
+          </a:effectRef>
+          <a:fontRef idx="minor">
+            <a:schemeClr val="lt1"/>
+          </a:fontRef>
+        </p:style>
+        <p:txBody>
+          <a:bodyPr rtlCol="0" anchor="ctr" lIns="0" rIns="0" tIns="0" bIns="0"/>
+          <a:lstStyle/>
+          <a:p>
+            <a:pPr rtl="1" algn="ctr" marL="0" indent="0">
+              <a:lnSpc>
+                <a:spcPct val="108000"/>
+              </a:lnSpc>
+              <a:buNone/>
+            </a:pPr>
+            <a:r>
+              <a:rPr sz="1700" b="1" i="0" lang="he-IL">
+                <a:solidFill>
+                  <a:srgbClr val="F2F5FA"/>
+                </a:solidFill>
+                <a:latin typeface="Arial"/>
+                <a:cs typeface="Arial"/>
+              </a:rPr>
+              <a:t>🔁</a:t>
+            </a:r>
+          </a:p>
+        </p:txBody>
+      </p:sp>
+      <p:sp>
+        <p:nvSpPr>
+          <p:cNvPr id="34" name="TextBox 33"/>
+          <p:cNvSpPr txBox="1"/>
+          <p:nvPr/>
+        </p:nvSpPr>
+        <p:spPr>
+          <a:xfrm>
+            <a:off x="841248" y="3913631"/>
+            <a:ext cx="1572768" cy="365760"/>
+          </a:xfrm>
+          <a:prstGeom prst="rect">
+            <a:avLst/>
+          </a:prstGeom>
+          <a:noFill/>
+        </p:spPr>
+        <p:txBody>
+          <a:bodyPr wrap="square" lIns="0" rIns="0" tIns="0" bIns="0" anchor="t" rtlCol="0">
+            <a:spAutoFit/>
+          </a:bodyPr>
+          <a:lstStyle/>
+          <a:p>
+            <a:pPr rtl="1" algn="r" marL="0" indent="0">
+              <a:lnSpc>
+                <a:spcPct val="108000"/>
+              </a:lnSpc>
+              <a:buNone/>
+            </a:pPr>
+            <a:r>
+              <a:rPr sz="1550" b="1" i="0" lang="he-IL">
+                <a:solidFill>
+                  <a:srgbClr val="EBEDF0"/>
+                </a:solidFill>
+                <a:latin typeface="Arial"/>
+                <a:cs typeface="Arial"/>
+              </a:rPr>
+              <a:t>שומרים כ-Gem</a:t>
+            </a:r>
+          </a:p>
+        </p:txBody>
+      </p:sp>
+      <p:sp>
+        <p:nvSpPr>
+          <p:cNvPr id="35" name="TextBox 34"/>
+          <p:cNvSpPr txBox="1"/>
+          <p:nvPr/>
+        </p:nvSpPr>
+        <p:spPr>
+          <a:xfrm>
+            <a:off x="841248" y="4425696"/>
+            <a:ext cx="2167128" cy="731520"/>
+          </a:xfrm>
+          <a:prstGeom prst="rect">
+            <a:avLst/>
+          </a:prstGeom>
+          <a:noFill/>
+        </p:spPr>
+        <p:txBody>
+          <a:bodyPr wrap="square" lIns="0" rIns="0" tIns="0" bIns="0" anchor="t" rtlCol="0">
+            <a:spAutoFit/>
+          </a:bodyPr>
+          <a:lstStyle/>
+          <a:p>
+            <a:pPr rtl="1" algn="r" marL="0" indent="0">
+              <a:lnSpc>
+                <a:spcPct val="108000"/>
+              </a:lnSpc>
+              <a:buNone/>
+            </a:pPr>
+            <a:r>
+              <a:rPr sz="1300" b="0" i="0" lang="he-IL">
+                <a:solidFill>
+                  <a:srgbClr val="EBEDF0"/>
+                </a:solidFill>
+                <a:latin typeface="Arial"/>
+                <a:cs typeface="Arial"/>
+              </a:rPr>
+              <a:t>משימה שחוזרת? עוזר קבוע (מפגש 4).</a:t>
+            </a:r>
+          </a:p>
+        </p:txBody>
+      </p:sp>
+      <p:sp>
+        <p:nvSpPr>
+          <p:cNvPr id="36" name="Rounded Rectangle 35"/>
+          <p:cNvSpPr/>
+          <p:nvPr/>
+        </p:nvSpPr>
+        <p:spPr>
+          <a:xfrm>
+            <a:off x="658368" y="5577840"/>
+            <a:ext cx="10872216" cy="594360"/>
+          </a:xfrm>
+          <a:prstGeom prst="roundRect">
+            <a:avLst>
+              <a:gd name="adj" fmla="val 3000"/>
+            </a:avLst>
+          </a:prstGeom>
+          <a:solidFill>
+            <a:srgbClr val="183A13"/>
+          </a:solidFill>
+          <a:ln>
+            <a:noFill/>
+          </a:ln>
+          <a:effectLst/>
+        </p:spPr>
+        <p:style>
+          <a:lnRef idx="1">
+            <a:schemeClr val="accent1"/>
+          </a:lnRef>
+          <a:fillRef idx="3">
+            <a:schemeClr val="accent1"/>
+          </a:fillRef>
+          <a:effectRef idx="2">
+            <a:schemeClr val="accent1"/>
+          </a:effectRef>
+          <a:fontRef idx="minor">
+            <a:schemeClr val="lt1"/>
+          </a:fontRef>
+        </p:style>
+        <p:txBody>
+          <a:bodyPr rtlCol="0" anchor="ctr"/>
+          <a:lstStyle/>
+          <a:p/>
+        </p:txBody>
+      </p:sp>
+      <p:sp>
+        <p:nvSpPr>
+          <p:cNvPr id="37" name="TextBox 36"/>
+          <p:cNvSpPr txBox="1"/>
+          <p:nvPr/>
+        </p:nvSpPr>
+        <p:spPr>
+          <a:xfrm>
+            <a:off x="886968" y="5577840"/>
+            <a:ext cx="10415016" cy="594360"/>
           </a:xfrm>
           <a:prstGeom prst="rect">
             <a:avLst/>
@@ -14545,20 +18184,1180 @@
           </a:bodyPr>
           <a:lstStyle/>
           <a:p>
-            <a:pPr rtl="1" algn="l" marL="0" indent="0">
-              <a:lnSpc>
-                <a:spcPct val="108000"/>
-              </a:lnSpc>
-              <a:buNone/>
-            </a:pPr>
-            <a:r>
-              <a:rPr sz="1300" b="0" i="0" lang="he-IL">
-                <a:solidFill>
-                  <a:srgbClr val="6296FF"/>
+            <a:pPr rtl="1" algn="r" marL="0" indent="0">
+              <a:lnSpc>
+                <a:spcPct val="108000"/>
+              </a:lnSpc>
+              <a:buNone/>
+            </a:pPr>
+            <a:r>
+              <a:rPr sz="1450" b="0" i="0" lang="he-IL">
+                <a:solidFill>
+                  <a:srgbClr val="EBEDF0"/>
                 </a:solidFill>
                 <a:latin typeface="Arial"/>
                 <a:cs typeface="Arial"/>
               </a:rPr>
+              <a:t>🎯  בחרו טריק אחד ונסו אותו כבר השבוע. כתבו בצ'אט איזה.</a:t>
+            </a:r>
+          </a:p>
+        </p:txBody>
+      </p:sp>
+      <p:sp>
+        <p:nvSpPr>
+          <p:cNvPr id="38" name="TextBox 37"/>
+          <p:cNvSpPr txBox="1"/>
+          <p:nvPr/>
+        </p:nvSpPr>
+        <p:spPr>
+          <a:xfrm>
+            <a:off x="6675120" y="6473952"/>
+            <a:ext cx="4846320" cy="292608"/>
+          </a:xfrm>
+          <a:prstGeom prst="rect">
+            <a:avLst/>
+          </a:prstGeom>
+          <a:noFill/>
+        </p:spPr>
+        <p:txBody>
+          <a:bodyPr wrap="none" lIns="0" rIns="0" tIns="0" bIns="0">
+            <a:spAutoFit/>
+          </a:bodyPr>
+          <a:lstStyle/>
+          <a:p>
+            <a:pPr algn="r" rtl="1"/>
+            <a:r>
+              <a:rPr sz="1000">
+                <a:solidFill>
+                  <a:srgbClr val="8A96AA"/>
+                </a:solidFill>
+                <a:latin typeface="Arial"/>
+                <a:cs typeface="Arial"/>
+              </a:rPr>
+              <a:t>© נערך על ידי AI Finance</a:t>
+            </a:r>
+          </a:p>
+        </p:txBody>
+      </p:sp>
+    </p:spTree>
+  </p:cSld>
+  <p:clrMapOvr>
+    <a:masterClrMapping/>
+  </p:clrMapOvr>
+</p:sld>
+</file>
+
+<file path=ppt/slides/slide2011.xml><?xml version="1.0" encoding="utf-8"?>
+<p:sld xmlns:a="http://schemas.openxmlformats.org/drawingml/2006/main" xmlns:p="http://schemas.openxmlformats.org/presentationml/2006/main" xmlns:r="http://schemas.openxmlformats.org/officeDocument/2006/relationships">
+  <p:cSld>
+    <p:spTree>
+      <p:nvGrpSpPr>
+        <p:cNvPr id="1" name=""/>
+        <p:cNvGrpSpPr/>
+        <p:nvPr/>
+      </p:nvGrpSpPr>
+      <p:grpSpPr/>
+      <p:sp>
+        <p:nvSpPr>
+          <p:cNvPr id="2" name="Title"/>
+          <p:cNvSpPr txBox="1"/>
+          <p:nvPr/>
+        </p:nvSpPr>
+        <p:spPr>
+          <a:xfrm>
+            <a:off x="658368" y="502920"/>
+            <a:ext cx="10872216" cy="640080"/>
+          </a:xfrm>
+          <a:prstGeom prst="rect">
+            <a:avLst/>
+          </a:prstGeom>
+          <a:noFill/>
+        </p:spPr>
+        <p:txBody>
+          <a:bodyPr wrap="square" lIns="0" rIns="0" tIns="0" bIns="0" anchor="t" rtlCol="0">
+            <a:spAutoFit/>
+          </a:bodyPr>
+          <a:lstStyle/>
+          <a:p>
+            <a:pPr rtl="1" algn="r" marL="0" indent="0">
+              <a:lnSpc>
+                <a:spcPct val="108000"/>
+              </a:lnSpc>
+              <a:buNone/>
+            </a:pPr>
+            <a:r>
+              <a:rPr sz="3700" b="1" i="0" lang="he-IL">
+                <a:solidFill>
+                  <a:srgbClr val="F2F5FA"/>
+                </a:solidFill>
+                <a:latin typeface="Arial"/>
+                <a:cs typeface="Arial"/>
+              </a:rPr>
+              <a:t>🧰 ארגז הכלים של היום</a:t>
+            </a:r>
+          </a:p>
+        </p:txBody>
+      </p:sp>
+      <p:sp>
+        <p:nvSpPr>
+          <p:cNvPr id="3" name="TextBox 2"/>
+          <p:cNvSpPr txBox="1"/>
+          <p:nvPr/>
+        </p:nvSpPr>
+        <p:spPr>
+          <a:xfrm>
+            <a:off x="658368" y="1280160"/>
+            <a:ext cx="10872216" cy="365760"/>
+          </a:xfrm>
+          <a:prstGeom prst="rect">
+            <a:avLst/>
+          </a:prstGeom>
+          <a:noFill/>
+        </p:spPr>
+        <p:txBody>
+          <a:bodyPr wrap="square" lIns="0" rIns="0" tIns="0" bIns="0" anchor="t" rtlCol="0">
+            <a:spAutoFit/>
+          </a:bodyPr>
+          <a:lstStyle/>
+          <a:p>
+            <a:pPr rtl="1" algn="r" marL="0" indent="0">
+              <a:lnSpc>
+                <a:spcPct val="108000"/>
+              </a:lnSpc>
+              <a:buNone/>
+            </a:pPr>
+            <a:r>
+              <a:rPr sz="1450" b="0" i="0" lang="he-IL">
+                <a:solidFill>
+                  <a:srgbClr val="FAC496"/>
+                </a:solidFill>
+                <a:latin typeface="Arial"/>
+                <a:cs typeface="Arial"/>
+              </a:rPr>
+              <a:t>הקישורים להעתקה. חלקם נותנים לכם קרדיטים או ניסיון חינם</a:t>
+            </a:r>
+          </a:p>
+        </p:txBody>
+      </p:sp>
+      <p:sp>
+        <p:nvSpPr>
+          <p:cNvPr id="4" name="Rounded Rectangle 3"/>
+          <p:cNvSpPr/>
+          <p:nvPr/>
+        </p:nvSpPr>
+        <p:spPr>
+          <a:xfrm>
+            <a:off x="6208776" y="1874519"/>
+            <a:ext cx="5321808" cy="566928"/>
+          </a:xfrm>
+          <a:prstGeom prst="roundRect">
+            <a:avLst>
+              <a:gd name="adj" fmla="val 25000"/>
+            </a:avLst>
+          </a:prstGeom>
+          <a:solidFill>
+            <a:srgbClr val="022349"/>
+          </a:solidFill>
+          <a:ln w="19050">
+            <a:solidFill>
+              <a:srgbClr val="487CFF"/>
+            </a:solidFill>
+          </a:ln>
+          <a:effectLst/>
+        </p:spPr>
+        <p:style>
+          <a:lnRef idx="1">
+            <a:schemeClr val="accent1"/>
+          </a:lnRef>
+          <a:fillRef idx="3">
+            <a:schemeClr val="accent1"/>
+          </a:fillRef>
+          <a:effectRef idx="2">
+            <a:schemeClr val="accent1"/>
+          </a:effectRef>
+          <a:fontRef idx="minor">
+            <a:schemeClr val="lt1"/>
+          </a:fontRef>
+        </p:style>
+        <p:txBody>
+          <a:bodyPr rtlCol="0" anchor="ctr"/>
+          <a:lstStyle/>
+          <a:p/>
+        </p:txBody>
+      </p:sp>
+      <p:sp>
+        <p:nvSpPr>
+          <p:cNvPr id="5" name="TextBox 4"/>
+          <p:cNvSpPr txBox="1"/>
+          <p:nvPr/>
+        </p:nvSpPr>
+        <p:spPr>
+          <a:xfrm>
+            <a:off x="9610344" y="1874519"/>
+            <a:ext cx="1783080" cy="566928"/>
+          </a:xfrm>
+          <a:prstGeom prst="rect">
+            <a:avLst/>
+          </a:prstGeom>
+          <a:noFill/>
+        </p:spPr>
+        <p:txBody>
+          <a:bodyPr wrap="square" lIns="0" rIns="0" tIns="0" bIns="0" anchor="ctr" rtlCol="0">
+            <a:spAutoFit/>
+          </a:bodyPr>
+          <a:lstStyle/>
+          <a:p>
+            <a:pPr rtl="1" algn="r" marL="0" indent="0">
+              <a:lnSpc>
+                <a:spcPct val="108000"/>
+              </a:lnSpc>
+              <a:buNone/>
+            </a:pPr>
+            <a:r>
+              <a:rPr sz="1400" b="1" i="0" lang="he-IL">
+                <a:solidFill>
+                  <a:srgbClr val="F2F5FA"/>
+                </a:solidFill>
+                <a:latin typeface="Arial"/>
+                <a:cs typeface="Arial"/>
+              </a:rPr>
+              <a:t>ChatGPT</a:t>
+            </a:r>
+          </a:p>
+        </p:txBody>
+      </p:sp>
+      <p:sp>
+        <p:nvSpPr>
+          <p:cNvPr id="6" name="TextBox 5"/>
+          <p:cNvSpPr txBox="1"/>
+          <p:nvPr/>
+        </p:nvSpPr>
+        <p:spPr>
+          <a:xfrm>
+            <a:off x="6318504" y="1874519"/>
+            <a:ext cx="3264408" cy="566928"/>
+          </a:xfrm>
+          <a:prstGeom prst="rect">
+            <a:avLst/>
+          </a:prstGeom>
+          <a:noFill/>
+        </p:spPr>
+        <p:txBody>
+          <a:bodyPr wrap="square" lIns="0" rIns="0" tIns="0" bIns="0" anchor="ctr" rtlCol="0">
+            <a:spAutoFit/>
+          </a:bodyPr>
+          <a:lstStyle/>
+          <a:p>
+            <a:pPr rtl="1" algn="l" marL="0" indent="0">
+              <a:lnSpc>
+                <a:spcPct val="108000"/>
+              </a:lnSpc>
+              <a:buNone/>
+            </a:pPr>
+            <a:r>
+              <a:rPr sz="1300" b="0" i="0" lang="he-IL">
+                <a:solidFill>
+                  <a:srgbClr val="6296FF"/>
+                </a:solidFill>
+                <a:latin typeface="Arial"/>
+                <a:cs typeface="Arial"/>
+              </a:rPr>
+              <a:t>chatgpt.com</a:t>
+            </a:r>
+          </a:p>
+        </p:txBody>
+      </p:sp>
+      <p:sp>
+        <p:nvSpPr>
+          <p:cNvPr id="7" name="Rounded Rectangle 6"/>
+          <p:cNvSpPr/>
+          <p:nvPr/>
+        </p:nvSpPr>
+        <p:spPr>
+          <a:xfrm>
+            <a:off x="6208776" y="2569463"/>
+            <a:ext cx="5321808" cy="566928"/>
+          </a:xfrm>
+          <a:prstGeom prst="roundRect">
+            <a:avLst>
+              <a:gd name="adj" fmla="val 25000"/>
+            </a:avLst>
+          </a:prstGeom>
+          <a:solidFill>
+            <a:srgbClr val="022349"/>
+          </a:solidFill>
+          <a:ln w="19050">
+            <a:solidFill>
+              <a:srgbClr val="487CFF"/>
+            </a:solidFill>
+          </a:ln>
+          <a:effectLst/>
+        </p:spPr>
+        <p:style>
+          <a:lnRef idx="1">
+            <a:schemeClr val="accent1"/>
+          </a:lnRef>
+          <a:fillRef idx="3">
+            <a:schemeClr val="accent1"/>
+          </a:fillRef>
+          <a:effectRef idx="2">
+            <a:schemeClr val="accent1"/>
+          </a:effectRef>
+          <a:fontRef idx="minor">
+            <a:schemeClr val="lt1"/>
+          </a:fontRef>
+        </p:style>
+        <p:txBody>
+          <a:bodyPr rtlCol="0" anchor="ctr"/>
+          <a:lstStyle/>
+          <a:p/>
+        </p:txBody>
+      </p:sp>
+      <p:sp>
+        <p:nvSpPr>
+          <p:cNvPr id="8" name="TextBox 7"/>
+          <p:cNvSpPr txBox="1"/>
+          <p:nvPr/>
+        </p:nvSpPr>
+        <p:spPr>
+          <a:xfrm>
+            <a:off x="9610344" y="2569463"/>
+            <a:ext cx="1783080" cy="566928"/>
+          </a:xfrm>
+          <a:prstGeom prst="rect">
+            <a:avLst/>
+          </a:prstGeom>
+          <a:noFill/>
+        </p:spPr>
+        <p:txBody>
+          <a:bodyPr wrap="square" lIns="0" rIns="0" tIns="0" bIns="0" anchor="ctr" rtlCol="0">
+            <a:spAutoFit/>
+          </a:bodyPr>
+          <a:lstStyle/>
+          <a:p>
+            <a:pPr rtl="1" algn="r" marL="0" indent="0">
+              <a:lnSpc>
+                <a:spcPct val="108000"/>
+              </a:lnSpc>
+              <a:buNone/>
+            </a:pPr>
+            <a:r>
+              <a:rPr sz="1400" b="1" i="0" lang="he-IL">
+                <a:solidFill>
+                  <a:srgbClr val="F2F5FA"/>
+                </a:solidFill>
+                <a:latin typeface="Arial"/>
+                <a:cs typeface="Arial"/>
+              </a:rPr>
+              <a:t>Claude</a:t>
+            </a:r>
+          </a:p>
+        </p:txBody>
+      </p:sp>
+      <p:sp>
+        <p:nvSpPr>
+          <p:cNvPr id="9" name="TextBox 8"/>
+          <p:cNvSpPr txBox="1"/>
+          <p:nvPr/>
+        </p:nvSpPr>
+        <p:spPr>
+          <a:xfrm>
+            <a:off x="6318504" y="2569463"/>
+            <a:ext cx="3264408" cy="566928"/>
+          </a:xfrm>
+          <a:prstGeom prst="rect">
+            <a:avLst/>
+          </a:prstGeom>
+          <a:noFill/>
+        </p:spPr>
+        <p:txBody>
+          <a:bodyPr wrap="square" lIns="0" rIns="0" tIns="0" bIns="0" anchor="ctr" rtlCol="0">
+            <a:spAutoFit/>
+          </a:bodyPr>
+          <a:lstStyle/>
+          <a:p>
+            <a:pPr rtl="1" algn="l" marL="0" indent="0">
+              <a:lnSpc>
+                <a:spcPct val="108000"/>
+              </a:lnSpc>
+              <a:buNone/>
+            </a:pPr>
+            <a:r>
+              <a:rPr sz="1300" b="0" i="0" lang="he-IL">
+                <a:solidFill>
+                  <a:srgbClr val="6296FF"/>
+                </a:solidFill>
+                <a:latin typeface="Arial"/>
+                <a:cs typeface="Arial"/>
+              </a:rPr>
+              <a:t>claude.ai</a:t>
+            </a:r>
+          </a:p>
+        </p:txBody>
+      </p:sp>
+      <p:sp>
+        <p:nvSpPr>
+          <p:cNvPr id="10" name="Rounded Rectangle 9"/>
+          <p:cNvSpPr/>
+          <p:nvPr/>
+        </p:nvSpPr>
+        <p:spPr>
+          <a:xfrm>
+            <a:off x="6208776" y="3264408"/>
+            <a:ext cx="5321808" cy="566928"/>
+          </a:xfrm>
+          <a:prstGeom prst="roundRect">
+            <a:avLst>
+              <a:gd name="adj" fmla="val 25000"/>
+            </a:avLst>
+          </a:prstGeom>
+          <a:solidFill>
+            <a:srgbClr val="022349"/>
+          </a:solidFill>
+          <a:ln w="19050">
+            <a:solidFill>
+              <a:srgbClr val="487CFF"/>
+            </a:solidFill>
+          </a:ln>
+          <a:effectLst/>
+        </p:spPr>
+        <p:style>
+          <a:lnRef idx="1">
+            <a:schemeClr val="accent1"/>
+          </a:lnRef>
+          <a:fillRef idx="3">
+            <a:schemeClr val="accent1"/>
+          </a:fillRef>
+          <a:effectRef idx="2">
+            <a:schemeClr val="accent1"/>
+          </a:effectRef>
+          <a:fontRef idx="minor">
+            <a:schemeClr val="lt1"/>
+          </a:fontRef>
+        </p:style>
+        <p:txBody>
+          <a:bodyPr rtlCol="0" anchor="ctr"/>
+          <a:lstStyle/>
+          <a:p/>
+        </p:txBody>
+      </p:sp>
+      <p:sp>
+        <p:nvSpPr>
+          <p:cNvPr id="11" name="TextBox 10"/>
+          <p:cNvSpPr txBox="1"/>
+          <p:nvPr/>
+        </p:nvSpPr>
+        <p:spPr>
+          <a:xfrm>
+            <a:off x="9610344" y="3264408"/>
+            <a:ext cx="1783080" cy="566928"/>
+          </a:xfrm>
+          <a:prstGeom prst="rect">
+            <a:avLst/>
+          </a:prstGeom>
+          <a:noFill/>
+        </p:spPr>
+        <p:txBody>
+          <a:bodyPr wrap="square" lIns="0" rIns="0" tIns="0" bIns="0" anchor="ctr" rtlCol="0">
+            <a:spAutoFit/>
+          </a:bodyPr>
+          <a:lstStyle/>
+          <a:p>
+            <a:pPr rtl="1" algn="r" marL="0" indent="0">
+              <a:lnSpc>
+                <a:spcPct val="108000"/>
+              </a:lnSpc>
+              <a:buNone/>
+            </a:pPr>
+            <a:r>
+              <a:rPr sz="1400" b="1" i="0" lang="he-IL">
+                <a:solidFill>
+                  <a:srgbClr val="F2F5FA"/>
+                </a:solidFill>
+                <a:latin typeface="Arial"/>
+                <a:cs typeface="Arial"/>
+              </a:rPr>
+              <a:t>Gemini</a:t>
+            </a:r>
+          </a:p>
+        </p:txBody>
+      </p:sp>
+      <p:sp>
+        <p:nvSpPr>
+          <p:cNvPr id="12" name="TextBox 11"/>
+          <p:cNvSpPr txBox="1"/>
+          <p:nvPr/>
+        </p:nvSpPr>
+        <p:spPr>
+          <a:xfrm>
+            <a:off x="6318504" y="3264408"/>
+            <a:ext cx="3264408" cy="566928"/>
+          </a:xfrm>
+          <a:prstGeom prst="rect">
+            <a:avLst/>
+          </a:prstGeom>
+          <a:noFill/>
+        </p:spPr>
+        <p:txBody>
+          <a:bodyPr wrap="square" lIns="0" rIns="0" tIns="0" bIns="0" anchor="ctr" rtlCol="0">
+            <a:spAutoFit/>
+          </a:bodyPr>
+          <a:lstStyle/>
+          <a:p>
+            <a:pPr rtl="1" algn="l" marL="0" indent="0">
+              <a:lnSpc>
+                <a:spcPct val="108000"/>
+              </a:lnSpc>
+              <a:buNone/>
+            </a:pPr>
+            <a:r>
+              <a:rPr sz="1300" b="0" i="0" lang="he-IL">
+                <a:solidFill>
+                  <a:srgbClr val="6296FF"/>
+                </a:solidFill>
+                <a:latin typeface="Arial"/>
+                <a:cs typeface="Arial"/>
+              </a:rPr>
+              <a:t>gemini.google.com</a:t>
+            </a:r>
+          </a:p>
+        </p:txBody>
+      </p:sp>
+      <p:sp>
+        <p:nvSpPr>
+          <p:cNvPr id="13" name="Rounded Rectangle 12"/>
+          <p:cNvSpPr/>
+          <p:nvPr/>
+        </p:nvSpPr>
+        <p:spPr>
+          <a:xfrm>
+            <a:off x="6208776" y="3959352"/>
+            <a:ext cx="5321808" cy="566928"/>
+          </a:xfrm>
+          <a:prstGeom prst="roundRect">
+            <a:avLst>
+              <a:gd name="adj" fmla="val 25000"/>
+            </a:avLst>
+          </a:prstGeom>
+          <a:solidFill>
+            <a:srgbClr val="022349"/>
+          </a:solidFill>
+          <a:ln w="19050">
+            <a:solidFill>
+              <a:srgbClr val="487CFF"/>
+            </a:solidFill>
+          </a:ln>
+          <a:effectLst/>
+        </p:spPr>
+        <p:style>
+          <a:lnRef idx="1">
+            <a:schemeClr val="accent1"/>
+          </a:lnRef>
+          <a:fillRef idx="3">
+            <a:schemeClr val="accent1"/>
+          </a:fillRef>
+          <a:effectRef idx="2">
+            <a:schemeClr val="accent1"/>
+          </a:effectRef>
+          <a:fontRef idx="minor">
+            <a:schemeClr val="lt1"/>
+          </a:fontRef>
+        </p:style>
+        <p:txBody>
+          <a:bodyPr rtlCol="0" anchor="ctr"/>
+          <a:lstStyle/>
+          <a:p/>
+        </p:txBody>
+      </p:sp>
+      <p:sp>
+        <p:nvSpPr>
+          <p:cNvPr id="14" name="TextBox 13"/>
+          <p:cNvSpPr txBox="1"/>
+          <p:nvPr/>
+        </p:nvSpPr>
+        <p:spPr>
+          <a:xfrm>
+            <a:off x="9610344" y="3959352"/>
+            <a:ext cx="1783080" cy="566928"/>
+          </a:xfrm>
+          <a:prstGeom prst="rect">
+            <a:avLst/>
+          </a:prstGeom>
+          <a:noFill/>
+        </p:spPr>
+        <p:txBody>
+          <a:bodyPr wrap="square" lIns="0" rIns="0" tIns="0" bIns="0" anchor="ctr" rtlCol="0">
+            <a:spAutoFit/>
+          </a:bodyPr>
+          <a:lstStyle/>
+          <a:p>
+            <a:pPr rtl="1" algn="r" marL="0" indent="0">
+              <a:lnSpc>
+                <a:spcPct val="108000"/>
+              </a:lnSpc>
+              <a:buNone/>
+            </a:pPr>
+            <a:r>
+              <a:rPr sz="1400" b="1" i="0" lang="he-IL">
+                <a:solidFill>
+                  <a:srgbClr val="F2F5FA"/>
+                </a:solidFill>
+                <a:latin typeface="Arial"/>
+                <a:cs typeface="Arial"/>
+              </a:rPr>
+              <a:t>Copilot</a:t>
+            </a:r>
+          </a:p>
+        </p:txBody>
+      </p:sp>
+      <p:sp>
+        <p:nvSpPr>
+          <p:cNvPr id="15" name="TextBox 14"/>
+          <p:cNvSpPr txBox="1"/>
+          <p:nvPr/>
+        </p:nvSpPr>
+        <p:spPr>
+          <a:xfrm>
+            <a:off x="6318504" y="3959352"/>
+            <a:ext cx="3264408" cy="566928"/>
+          </a:xfrm>
+          <a:prstGeom prst="rect">
+            <a:avLst/>
+          </a:prstGeom>
+          <a:noFill/>
+        </p:spPr>
+        <p:txBody>
+          <a:bodyPr wrap="square" lIns="0" rIns="0" tIns="0" bIns="0" anchor="ctr" rtlCol="0">
+            <a:spAutoFit/>
+          </a:bodyPr>
+          <a:lstStyle/>
+          <a:p>
+            <a:pPr rtl="1" algn="l" marL="0" indent="0">
+              <a:lnSpc>
+                <a:spcPct val="108000"/>
+              </a:lnSpc>
+              <a:buNone/>
+            </a:pPr>
+            <a:r>
+              <a:rPr sz="1300" b="0" i="0" lang="he-IL">
+                <a:solidFill>
+                  <a:srgbClr val="6296FF"/>
+                </a:solidFill>
+                <a:latin typeface="Arial"/>
+                <a:cs typeface="Arial"/>
+              </a:rPr>
+              <a:t>copilot.microsoft.com</a:t>
+            </a:r>
+          </a:p>
+        </p:txBody>
+      </p:sp>
+      <p:sp>
+        <p:nvSpPr>
+          <p:cNvPr id="16" name="Rounded Rectangle 15"/>
+          <p:cNvSpPr/>
+          <p:nvPr/>
+        </p:nvSpPr>
+        <p:spPr>
+          <a:xfrm>
+            <a:off x="658368" y="1874519"/>
+            <a:ext cx="5321808" cy="566928"/>
+          </a:xfrm>
+          <a:prstGeom prst="roundRect">
+            <a:avLst>
+              <a:gd name="adj" fmla="val 25000"/>
+            </a:avLst>
+          </a:prstGeom>
+          <a:solidFill>
+            <a:srgbClr val="022349"/>
+          </a:solidFill>
+          <a:ln w="19050">
+            <a:solidFill>
+              <a:srgbClr val="487CFF"/>
+            </a:solidFill>
+          </a:ln>
+          <a:effectLst/>
+        </p:spPr>
+        <p:style>
+          <a:lnRef idx="1">
+            <a:schemeClr val="accent1"/>
+          </a:lnRef>
+          <a:fillRef idx="3">
+            <a:schemeClr val="accent1"/>
+          </a:fillRef>
+          <a:effectRef idx="2">
+            <a:schemeClr val="accent1"/>
+          </a:effectRef>
+          <a:fontRef idx="minor">
+            <a:schemeClr val="lt1"/>
+          </a:fontRef>
+        </p:style>
+        <p:txBody>
+          <a:bodyPr rtlCol="0" anchor="ctr"/>
+          <a:lstStyle/>
+          <a:p/>
+        </p:txBody>
+      </p:sp>
+      <p:sp>
+        <p:nvSpPr>
+          <p:cNvPr id="17" name="TextBox 16"/>
+          <p:cNvSpPr txBox="1"/>
+          <p:nvPr/>
+        </p:nvSpPr>
+        <p:spPr>
+          <a:xfrm>
+            <a:off x="4059936" y="1874519"/>
+            <a:ext cx="1783080" cy="566928"/>
+          </a:xfrm>
+          <a:prstGeom prst="rect">
+            <a:avLst/>
+          </a:prstGeom>
+          <a:noFill/>
+        </p:spPr>
+        <p:txBody>
+          <a:bodyPr wrap="square" lIns="0" rIns="0" tIns="0" bIns="0" anchor="ctr" rtlCol="0">
+            <a:spAutoFit/>
+          </a:bodyPr>
+          <a:lstStyle/>
+          <a:p>
+            <a:pPr rtl="1" algn="r" marL="0" indent="0">
+              <a:lnSpc>
+                <a:spcPct val="108000"/>
+              </a:lnSpc>
+              <a:buNone/>
+            </a:pPr>
+            <a:r>
+              <a:rPr sz="1400" b="1" i="0" lang="he-IL">
+                <a:solidFill>
+                  <a:srgbClr val="F2F5FA"/>
+                </a:solidFill>
+                <a:latin typeface="Arial"/>
+                <a:cs typeface="Arial"/>
+              </a:rPr>
+              <a:t>DeepSeek</a:t>
+            </a:r>
+          </a:p>
+        </p:txBody>
+      </p:sp>
+      <p:sp>
+        <p:nvSpPr>
+          <p:cNvPr id="18" name="TextBox 17"/>
+          <p:cNvSpPr txBox="1"/>
+          <p:nvPr/>
+        </p:nvSpPr>
+        <p:spPr>
+          <a:xfrm>
+            <a:off x="768096" y="1874519"/>
+            <a:ext cx="3264408" cy="566928"/>
+          </a:xfrm>
+          <a:prstGeom prst="rect">
+            <a:avLst/>
+          </a:prstGeom>
+          <a:noFill/>
+        </p:spPr>
+        <p:txBody>
+          <a:bodyPr wrap="square" lIns="0" rIns="0" tIns="0" bIns="0" anchor="ctr" rtlCol="0">
+            <a:spAutoFit/>
+          </a:bodyPr>
+          <a:lstStyle/>
+          <a:p>
+            <a:pPr rtl="1" algn="l" marL="0" indent="0">
+              <a:lnSpc>
+                <a:spcPct val="108000"/>
+              </a:lnSpc>
+              <a:buNone/>
+            </a:pPr>
+            <a:r>
+              <a:rPr sz="1300" b="0" i="0" lang="he-IL">
+                <a:solidFill>
+                  <a:srgbClr val="6296FF"/>
+                </a:solidFill>
+                <a:latin typeface="Arial"/>
+                <a:cs typeface="Arial"/>
+              </a:rPr>
+              <a:t>chat.deepseek.com</a:t>
+            </a:r>
+          </a:p>
+        </p:txBody>
+      </p:sp>
+      <p:sp>
+        <p:nvSpPr>
+          <p:cNvPr id="19" name="Rounded Rectangle 18"/>
+          <p:cNvSpPr/>
+          <p:nvPr/>
+        </p:nvSpPr>
+        <p:spPr>
+          <a:xfrm>
+            <a:off x="658368" y="2569463"/>
+            <a:ext cx="5321808" cy="566928"/>
+          </a:xfrm>
+          <a:prstGeom prst="roundRect">
+            <a:avLst>
+              <a:gd name="adj" fmla="val 25000"/>
+            </a:avLst>
+          </a:prstGeom>
+          <a:solidFill>
+            <a:srgbClr val="022349"/>
+          </a:solidFill>
+          <a:ln w="19050">
+            <a:solidFill>
+              <a:srgbClr val="487CFF"/>
+            </a:solidFill>
+          </a:ln>
+          <a:effectLst/>
+        </p:spPr>
+        <p:style>
+          <a:lnRef idx="1">
+            <a:schemeClr val="accent1"/>
+          </a:lnRef>
+          <a:fillRef idx="3">
+            <a:schemeClr val="accent1"/>
+          </a:fillRef>
+          <a:effectRef idx="2">
+            <a:schemeClr val="accent1"/>
+          </a:effectRef>
+          <a:fontRef idx="minor">
+            <a:schemeClr val="lt1"/>
+          </a:fontRef>
+        </p:style>
+        <p:txBody>
+          <a:bodyPr rtlCol="0" anchor="ctr"/>
+          <a:lstStyle/>
+          <a:p/>
+        </p:txBody>
+      </p:sp>
+      <p:sp>
+        <p:nvSpPr>
+          <p:cNvPr id="20" name="TextBox 19"/>
+          <p:cNvSpPr txBox="1"/>
+          <p:nvPr/>
+        </p:nvSpPr>
+        <p:spPr>
+          <a:xfrm>
+            <a:off x="4059936" y="2569463"/>
+            <a:ext cx="1783080" cy="566928"/>
+          </a:xfrm>
+          <a:prstGeom prst="rect">
+            <a:avLst/>
+          </a:prstGeom>
+          <a:noFill/>
+        </p:spPr>
+        <p:txBody>
+          <a:bodyPr wrap="square" lIns="0" rIns="0" tIns="0" bIns="0" anchor="ctr" rtlCol="0">
+            <a:spAutoFit/>
+          </a:bodyPr>
+          <a:lstStyle/>
+          <a:p>
+            <a:pPr rtl="1" algn="r" marL="0" indent="0">
+              <a:lnSpc>
+                <a:spcPct val="108000"/>
+              </a:lnSpc>
+              <a:buNone/>
+            </a:pPr>
+            <a:r>
+              <a:rPr sz="1400" b="1" i="0" lang="he-IL">
+                <a:solidFill>
+                  <a:srgbClr val="F2F5FA"/>
+                </a:solidFill>
+                <a:latin typeface="Arial"/>
+                <a:cs typeface="Arial"/>
+              </a:rPr>
+              <a:t>Perplexity</a:t>
+            </a:r>
+          </a:p>
+        </p:txBody>
+      </p:sp>
+      <p:sp>
+        <p:nvSpPr>
+          <p:cNvPr id="21" name="TextBox 20"/>
+          <p:cNvSpPr txBox="1"/>
+          <p:nvPr/>
+        </p:nvSpPr>
+        <p:spPr>
+          <a:xfrm>
+            <a:off x="768096" y="2569463"/>
+            <a:ext cx="3264408" cy="566928"/>
+          </a:xfrm>
+          <a:prstGeom prst="rect">
+            <a:avLst/>
+          </a:prstGeom>
+          <a:noFill/>
+        </p:spPr>
+        <p:txBody>
+          <a:bodyPr wrap="square" lIns="0" rIns="0" tIns="0" bIns="0" anchor="ctr" rtlCol="0">
+            <a:spAutoFit/>
+          </a:bodyPr>
+          <a:lstStyle/>
+          <a:p>
+            <a:pPr rtl="1" algn="l" marL="0" indent="0">
+              <a:lnSpc>
+                <a:spcPct val="108000"/>
+              </a:lnSpc>
+              <a:buNone/>
+            </a:pPr>
+            <a:r>
+              <a:rPr sz="1300" b="0" i="0" lang="he-IL">
+                <a:solidFill>
+                  <a:srgbClr val="6296FF"/>
+                </a:solidFill>
+                <a:latin typeface="Arial"/>
+                <a:cs typeface="Arial"/>
+              </a:rPr>
+              <a:t>perplexity.ai</a:t>
+            </a:r>
+          </a:p>
+        </p:txBody>
+      </p:sp>
+      <p:sp>
+        <p:nvSpPr>
+          <p:cNvPr id="22" name="Rounded Rectangle 21"/>
+          <p:cNvSpPr/>
+          <p:nvPr/>
+        </p:nvSpPr>
+        <p:spPr>
+          <a:xfrm>
+            <a:off x="658368" y="3264408"/>
+            <a:ext cx="5321808" cy="566928"/>
+          </a:xfrm>
+          <a:prstGeom prst="roundRect">
+            <a:avLst>
+              <a:gd name="adj" fmla="val 25000"/>
+            </a:avLst>
+          </a:prstGeom>
+          <a:solidFill>
+            <a:srgbClr val="022349"/>
+          </a:solidFill>
+          <a:ln w="19050">
+            <a:solidFill>
+              <a:srgbClr val="487CFF"/>
+            </a:solidFill>
+          </a:ln>
+          <a:effectLst/>
+        </p:spPr>
+        <p:style>
+          <a:lnRef idx="1">
+            <a:schemeClr val="accent1"/>
+          </a:lnRef>
+          <a:fillRef idx="3">
+            <a:schemeClr val="accent1"/>
+          </a:fillRef>
+          <a:effectRef idx="2">
+            <a:schemeClr val="accent1"/>
+          </a:effectRef>
+          <a:fontRef idx="minor">
+            <a:schemeClr val="lt1"/>
+          </a:fontRef>
+        </p:style>
+        <p:txBody>
+          <a:bodyPr rtlCol="0" anchor="ctr"/>
+          <a:lstStyle/>
+          <a:p/>
+        </p:txBody>
+      </p:sp>
+      <p:sp>
+        <p:nvSpPr>
+          <p:cNvPr id="23" name="TextBox 22"/>
+          <p:cNvSpPr txBox="1"/>
+          <p:nvPr/>
+        </p:nvSpPr>
+        <p:spPr>
+          <a:xfrm>
+            <a:off x="4059936" y="3264408"/>
+            <a:ext cx="1783080" cy="566928"/>
+          </a:xfrm>
+          <a:prstGeom prst="rect">
+            <a:avLst/>
+          </a:prstGeom>
+          <a:noFill/>
+        </p:spPr>
+        <p:txBody>
+          <a:bodyPr wrap="square" lIns="0" rIns="0" tIns="0" bIns="0" anchor="ctr" rtlCol="0">
+            <a:spAutoFit/>
+          </a:bodyPr>
+          <a:lstStyle/>
+          <a:p>
+            <a:pPr rtl="1" algn="r" marL="0" indent="0">
+              <a:lnSpc>
+                <a:spcPct val="108000"/>
+              </a:lnSpc>
+              <a:buNone/>
+            </a:pPr>
+            <a:r>
+              <a:rPr sz="1400" b="1" i="0" lang="he-IL">
+                <a:solidFill>
+                  <a:srgbClr val="F2F5FA"/>
+                </a:solidFill>
+                <a:latin typeface="Arial"/>
+                <a:cs typeface="Arial"/>
+              </a:rPr>
+              <a:t>NotebookLM</a:t>
+            </a:r>
+          </a:p>
+        </p:txBody>
+      </p:sp>
+      <p:sp>
+        <p:nvSpPr>
+          <p:cNvPr id="24" name="TextBox 23"/>
+          <p:cNvSpPr txBox="1"/>
+          <p:nvPr/>
+        </p:nvSpPr>
+        <p:spPr>
+          <a:xfrm>
+            <a:off x="768096" y="3264408"/>
+            <a:ext cx="3264408" cy="566928"/>
+          </a:xfrm>
+          <a:prstGeom prst="rect">
+            <a:avLst/>
+          </a:prstGeom>
+          <a:noFill/>
+        </p:spPr>
+        <p:txBody>
+          <a:bodyPr wrap="square" lIns="0" rIns="0" tIns="0" bIns="0" anchor="ctr" rtlCol="0">
+            <a:spAutoFit/>
+          </a:bodyPr>
+          <a:lstStyle/>
+          <a:p>
+            <a:pPr rtl="1" algn="l" marL="0" indent="0">
+              <a:lnSpc>
+                <a:spcPct val="108000"/>
+              </a:lnSpc>
+              <a:buNone/>
+            </a:pPr>
+            <a:r>
+              <a:rPr sz="1300" b="0" i="0" lang="he-IL">
+                <a:solidFill>
+                  <a:srgbClr val="6296FF"/>
+                </a:solidFill>
+                <a:latin typeface="Arial"/>
+                <a:cs typeface="Arial"/>
+              </a:rPr>
+              <a:t>notebooklm.google.com</a:t>
+            </a:r>
+          </a:p>
+        </p:txBody>
+      </p:sp>
+      <p:sp>
+        <p:nvSpPr>
+          <p:cNvPr id="25" name="Rounded Rectangle 24"/>
+          <p:cNvSpPr/>
+          <p:nvPr/>
+        </p:nvSpPr>
+        <p:spPr>
+          <a:xfrm>
+            <a:off x="658368" y="3959352"/>
+            <a:ext cx="5321808" cy="566928"/>
+          </a:xfrm>
+          <a:prstGeom prst="roundRect">
+            <a:avLst>
+              <a:gd name="adj" fmla="val 25000"/>
+            </a:avLst>
+          </a:prstGeom>
+          <a:solidFill>
+            <a:srgbClr val="022349"/>
+          </a:solidFill>
+          <a:ln w="19050">
+            <a:solidFill>
+              <a:srgbClr val="487CFF"/>
+            </a:solidFill>
+          </a:ln>
+          <a:effectLst/>
+        </p:spPr>
+        <p:style>
+          <a:lnRef idx="1">
+            <a:schemeClr val="accent1"/>
+          </a:lnRef>
+          <a:fillRef idx="3">
+            <a:schemeClr val="accent1"/>
+          </a:fillRef>
+          <a:effectRef idx="2">
+            <a:schemeClr val="accent1"/>
+          </a:effectRef>
+          <a:fontRef idx="minor">
+            <a:schemeClr val="lt1"/>
+          </a:fontRef>
+        </p:style>
+        <p:txBody>
+          <a:bodyPr rtlCol="0" anchor="ctr"/>
+          <a:lstStyle/>
+          <a:p/>
+        </p:txBody>
+      </p:sp>
+      <p:sp>
+        <p:nvSpPr>
+          <p:cNvPr id="26" name="TextBox 25"/>
+          <p:cNvSpPr txBox="1"/>
+          <p:nvPr/>
+        </p:nvSpPr>
+        <p:spPr>
+          <a:xfrm>
+            <a:off x="4059936" y="3959352"/>
+            <a:ext cx="1783080" cy="566928"/>
+          </a:xfrm>
+          <a:prstGeom prst="rect">
+            <a:avLst/>
+          </a:prstGeom>
+          <a:noFill/>
+        </p:spPr>
+        <p:txBody>
+          <a:bodyPr wrap="square" lIns="0" rIns="0" tIns="0" bIns="0" anchor="ctr" rtlCol="0">
+            <a:spAutoFit/>
+          </a:bodyPr>
+          <a:lstStyle/>
+          <a:p>
+            <a:pPr rtl="1" algn="r" marL="0" indent="0">
+              <a:lnSpc>
+                <a:spcPct val="108000"/>
+              </a:lnSpc>
+              <a:buNone/>
+            </a:pPr>
+            <a:r>
+              <a:rPr sz="1400" b="1" i="0" lang="he-IL">
+                <a:solidFill>
+                  <a:srgbClr val="F2F5FA"/>
+                </a:solidFill>
+                <a:latin typeface="Arial"/>
+                <a:cs typeface="Arial"/>
+              </a:rPr>
+              <a:t>Wispr Flow</a:t>
+            </a:r>
+          </a:p>
+        </p:txBody>
+      </p:sp>
+      <p:sp>
+        <p:nvSpPr>
+          <p:cNvPr id="27" name="TextBox 26"/>
+          <p:cNvSpPr txBox="1"/>
+          <p:nvPr/>
+        </p:nvSpPr>
+        <p:spPr>
+          <a:xfrm>
+            <a:off x="768096" y="3959352"/>
+            <a:ext cx="3264408" cy="566928"/>
+          </a:xfrm>
+          <a:prstGeom prst="rect">
+            <a:avLst/>
+          </a:prstGeom>
+          <a:noFill/>
+        </p:spPr>
+        <p:txBody>
+          <a:bodyPr wrap="square" lIns="0" rIns="0" tIns="0" bIns="0" anchor="ctr" rtlCol="0">
+            <a:spAutoFit/>
+          </a:bodyPr>
+          <a:lstStyle/>
+          <a:p>
+            <a:pPr rtl="1" algn="l" marL="0" indent="0">
+              <a:lnSpc>
+                <a:spcPct val="108000"/>
+              </a:lnSpc>
+              <a:buNone/>
+            </a:pPr>
+            <a:r>
+              <a:rPr sz="1300" b="0" i="0" lang="he-IL">
+                <a:solidFill>
+                  <a:srgbClr val="6296FF"/>
+                </a:solidFill>
+                <a:latin typeface="Arial"/>
+                <a:cs typeface="Arial"/>
+              </a:rPr>
               <a:t>wisprflow.ai</a:t>
             </a:r>
           </a:p>
@@ -14566,7 +19365,7 @@
       </p:sp>
       <p:sp>
         <p:nvSpPr>
-          <p:cNvPr id="22" name="Rounded Rectangle 21"/>
+          <p:cNvPr id="28" name="Rounded Rectangle 27"/>
           <p:cNvSpPr/>
           <p:nvPr/>
         </p:nvSpPr>
@@ -14610,7 +19409,7 @@
       </p:sp>
       <p:sp>
         <p:nvSpPr>
-          <p:cNvPr id="23" name="TextBox 22"/>
+          <p:cNvPr id="29" name="TextBox 28"/>
           <p:cNvSpPr txBox="1"/>
           <p:nvPr/>
         </p:nvSpPr>
@@ -14651,7 +19450,7 @@
       </p:sp>
       <p:sp>
         <p:nvSpPr>
-          <p:cNvPr id="24" name="TextBox 23"/>
+          <p:cNvPr id="30" name="TextBox 29"/>
           <p:cNvSpPr txBox="1"/>
           <p:nvPr/>
         </p:nvSpPr>
@@ -23811,607 +28610,6 @@
 </p:sld>
 </file>
 
-<file path=ppt/slides/slide904.xml><?xml version="1.0" encoding="utf-8"?>
-<p:sld xmlns:a="http://schemas.openxmlformats.org/drawingml/2006/main" xmlns:r="http://schemas.openxmlformats.org/officeDocument/2006/relationships" xmlns:p="http://schemas.openxmlformats.org/presentationml/2006/main">
-  <p:cSld name="Slide 4">
-    <p:spTree>
-      <p:nvGrpSpPr>
-        <p:cNvPr id="1" name=""/>
-        <p:cNvGrpSpPr/>
-        <p:nvPr/>
-      </p:nvGrpSpPr>
-      <p:grpSpPr>
-        <a:xfrm>
-          <a:off x="0" y="0"/>
-          <a:ext cx="0" cy="0"/>
-          <a:chOff x="0" y="0"/>
-          <a:chExt cx="0" cy="0"/>
-        </a:xfrm>
-      </p:grpSpPr>
-      <p:sp>
-        <p:nvSpPr>
-          <p:cNvPr id="2" name="Text 0"/>
-          <p:cNvSpPr/>
-          <p:nvPr/>
-        </p:nvSpPr>
-        <p:spPr>
-          <a:xfrm>
-            <a:off x="661475" y="1418431"/>
-            <a:ext cx="10868745" cy="614263"/>
-          </a:xfrm>
-          <a:prstGeom prst="rect">
-            <a:avLst/>
-          </a:prstGeom>
-          <a:noFill/>
-          <a:ln/>
-        </p:spPr>
-        <p:txBody>
-          <a:bodyPr wrap="none" lIns="0" tIns="0" rIns="0" bIns="0" rtlCol="0" anchor="t"/>
-          <a:lstStyle/>
-          <a:p>
-            <a:pPr rtl="1" algn="r" indent="0" marL="0">
-              <a:lnSpc>
-                <a:spcPct val="108000"/>
-              </a:lnSpc>
-              <a:buNone/>
-            </a:pPr>
-            <a:r>
-              <a:rPr lang="he-IL" altLang="en-US" sz="3700" b="1" spc="-74" kern="0" dirty="0">
-                <a:solidFill>
-                  <a:srgbClr val="F2F5FA"/>
-                </a:solidFill>
-                <a:latin typeface="Arial" pitchFamily="34" charset="0"/>
-                <a:ea typeface="Arial" pitchFamily="34" charset="-122"/>
-                <a:cs typeface="Arial" pitchFamily="34" charset="-120"/>
-              </a:rPr>
-              <a:t>ההבדל על המסך</a:t>
-            </a:r>
-            <a:endParaRPr lang="he-IL" sz="3700" dirty="0"/>
-          </a:p>
-        </p:txBody>
-      </p:sp>
-      <p:sp>
-        <p:nvSpPr>
-          <p:cNvPr id="3" name="Shape 1"/>
-          <p:cNvSpPr/>
-          <p:nvPr/>
-        </p:nvSpPr>
-        <p:spPr>
-          <a:xfrm>
-            <a:off x="661475" y="2410718"/>
-            <a:ext cx="10868745" cy="1687016"/>
-          </a:xfrm>
-          <a:prstGeom prst="roundRect">
-            <a:avLst>
-              <a:gd name="adj" fmla="val 4706"/>
-            </a:avLst>
-          </a:prstGeom>
-          <a:solidFill>
-            <a:srgbClr val="101620"/>
-          </a:solidFill>
-          <a:ln w="19050">
-            <a:solidFill>
-              <a:srgbClr val="002A80"/>
-            </a:solidFill>
-            <a:prstDash val="solid"/>
-          </a:ln>
-        </p:spPr>
-        <p:txBody>
-          <a:bodyPr/>
-          <a:p/>
-        </p:txBody>
-      </p:sp>
-      <p:sp>
-        <p:nvSpPr>
-          <p:cNvPr id="4" name="Shape 2"/>
-          <p:cNvSpPr/>
-          <p:nvPr/>
-        </p:nvSpPr>
-        <p:spPr>
-          <a:xfrm>
-            <a:off x="6095848" y="2429768"/>
-            <a:ext cx="5415323" cy="1648916"/>
-          </a:xfrm>
-          <a:custGeom>
-            <a:avLst/>
-            <a:gdLst/>
-            <a:ahLst/>
-            <a:cxnLst/>
-            <a:rect l="l" t="t" r="r" b="b"/>
-            <a:pathLst>
-              <a:path w="5415323" h="1648916">
-                <a:moveTo>
-                  <a:pt x="66156" y="0"/>
-                </a:moveTo>
-                <a:lnTo>
-                  <a:pt x="5415323" y="0"/>
-                </a:lnTo>
-                <a:lnTo>
-                  <a:pt x="5415323" y="1648916"/>
-                </a:lnTo>
-                <a:lnTo>
-                  <a:pt x="66156" y="1648916"/>
-                </a:lnTo>
-                <a:arcTo hR="66158" wR="66156" stAng="5400000" swAng="5400000"/>
-                <a:lnTo>
-                  <a:pt x="0" y="66158"/>
-                </a:lnTo>
-                <a:arcTo hR="66158" wR="66156" stAng="10800000" swAng="5400000"/>
-                <a:close/>
-              </a:path>
-            </a:pathLst>
-          </a:custGeom>
-          <a:solidFill>
-            <a:srgbClr val="101620"/>
-          </a:solidFill>
-          <a:ln/>
-        </p:spPr>
-        <p:txBody>
-          <a:bodyPr/>
-          <a:p/>
-        </p:txBody>
-      </p:sp>
-      <p:sp>
-        <p:nvSpPr>
-          <p:cNvPr id="5" name="Text 3"/>
-          <p:cNvSpPr/>
-          <p:nvPr/>
-        </p:nvSpPr>
-        <p:spPr>
-          <a:xfrm>
-            <a:off x="6284854" y="2618780"/>
-            <a:ext cx="5037309" cy="307082"/>
-          </a:xfrm>
-          <a:prstGeom prst="rect">
-            <a:avLst/>
-          </a:prstGeom>
-          <a:noFill/>
-          <a:ln/>
-        </p:spPr>
-        <p:txBody>
-          <a:bodyPr wrap="none" lIns="0" tIns="0" rIns="0" bIns="0" rtlCol="0" anchor="t"/>
-          <a:lstStyle/>
-          <a:p>
-            <a:pPr rtl="1" algn="r" indent="0" marL="0">
-              <a:lnSpc>
-                <a:spcPct val="108000"/>
-              </a:lnSpc>
-              <a:buNone/>
-            </a:pPr>
-            <a:r>
-              <a:rPr lang="he-IL" altLang="en-US" sz="1850" b="1" spc="-37" kern="0" dirty="0">
-                <a:solidFill>
-                  <a:srgbClr val="EBEDF0"/>
-                </a:solidFill>
-                <a:latin typeface="Arial" pitchFamily="34" charset="0"/>
-                <a:ea typeface="Arial" pitchFamily="34" charset="-122"/>
-                <a:cs typeface="Arial" pitchFamily="34" charset="-120"/>
-              </a:rPr>
-              <a:t>הנחיה א׳</a:t>
-            </a:r>
-            <a:endParaRPr lang="he-IL" sz="1850" dirty="0"/>
-          </a:p>
-        </p:txBody>
-      </p:sp>
-      <p:sp>
-        <p:nvSpPr>
-          <p:cNvPr id="6" name="Text 4"/>
-          <p:cNvSpPr/>
-          <p:nvPr/>
-        </p:nvSpPr>
-        <p:spPr>
-          <a:xfrm>
-            <a:off x="6284854" y="3039269"/>
-            <a:ext cx="5037309" cy="604738"/>
-          </a:xfrm>
-          <a:prstGeom prst="rect">
-            <a:avLst/>
-          </a:prstGeom>
-          <a:noFill/>
-          <a:ln/>
-        </p:spPr>
-        <p:txBody>
-          <a:bodyPr wrap="square" lIns="0" tIns="0" rIns="0" bIns="0" rtlCol="0" anchor="t"/>
-          <a:lstStyle/>
-          <a:p>
-            <a:pPr rtl="1" algn="r" indent="0" marL="0">
-              <a:lnSpc>
-                <a:spcPct val="108000"/>
-              </a:lnSpc>
-              <a:spcAft>
-                <a:spcPts val="850"/>
-              </a:spcAft>
-              <a:buNone/>
-            </a:pPr>
-            <a:r>
-              <a:rPr lang="he-IL" altLang="en-US" sz="1450" dirty="0">
-                <a:solidFill>
-                  <a:srgbClr val="EBEDF0"/>
-                </a:solidFill>
-                <a:latin typeface="Arial" pitchFamily="34" charset="0"/>
-                <a:ea typeface="Arial" pitchFamily="34" charset="-122"/>
-                <a:cs typeface="Arial" pitchFamily="34" charset="-120"/>
-              </a:rPr>
-              <a:t>מייל גנרי חסר ערך</a:t>
-            </a:r>
-            <a:endParaRPr lang="he-IL" sz="1450" dirty="0"/>
-          </a:p>
-          <a:p>
-            <a:pPr rtl="1" algn="r" indent="0" marL="0">
-              <a:lnSpc>
-                <a:spcPct val="108000"/>
-              </a:lnSpc>
-              <a:buNone/>
-            </a:pPr>
-            <a:r>
-              <a:rPr lang="he-IL" altLang="en-US" sz="1450" dirty="0">
-                <a:solidFill>
-                  <a:srgbClr val="EBEDF0"/>
-                </a:solidFill>
-                <a:latin typeface="Arial" pitchFamily="34" charset="0"/>
-                <a:ea typeface="Arial" pitchFamily="34" charset="-122"/>
-                <a:cs typeface="Arial" pitchFamily="34" charset="-120"/>
-              </a:rPr>
-              <a:t>"שלום, אנא שלם את חשבונך. תודה."</a:t>
-            </a:r>
-            <a:endParaRPr lang="he-IL" sz="1450" dirty="0"/>
-          </a:p>
-        </p:txBody>
-      </p:sp>
-      <p:sp>
-        <p:nvSpPr>
-          <p:cNvPr id="7" name="Shape 5"/>
-          <p:cNvSpPr/>
-          <p:nvPr/>
-        </p:nvSpPr>
-        <p:spPr>
-          <a:xfrm>
-            <a:off x="680524" y="2429768"/>
-            <a:ext cx="5415323" cy="1648916"/>
-          </a:xfrm>
-          <a:custGeom>
-            <a:avLst/>
-            <a:gdLst/>
-            <a:ahLst/>
-            <a:cxnLst/>
-            <a:rect l="l" t="t" r="r" b="b"/>
-            <a:pathLst>
-              <a:path w="5415323" h="1648916">
-                <a:moveTo>
-                  <a:pt x="0" y="0"/>
-                </a:moveTo>
-                <a:lnTo>
-                  <a:pt x="5349167" y="0"/>
-                </a:lnTo>
-                <a:arcTo hR="66158" wR="66156" stAng="16200000" swAng="5400000"/>
-                <a:lnTo>
-                  <a:pt x="5415323" y="1582758"/>
-                </a:lnTo>
-                <a:arcTo hR="66158" wR="66156" stAng="0" swAng="5400000"/>
-                <a:lnTo>
-                  <a:pt x="0" y="1648916"/>
-                </a:lnTo>
-                <a:lnTo>
-                  <a:pt x="0" y="0"/>
-                </a:lnTo>
-                <a:close/>
-              </a:path>
-            </a:pathLst>
-          </a:custGeom>
-          <a:solidFill>
-            <a:srgbClr val="101620"/>
-          </a:solidFill>
-          <a:ln/>
-        </p:spPr>
-        <p:txBody>
-          <a:bodyPr/>
-          <a:p/>
-        </p:txBody>
-      </p:sp>
-      <p:sp>
-        <p:nvSpPr>
-          <p:cNvPr id="8" name="Shape 6"/>
-          <p:cNvSpPr/>
-          <p:nvPr/>
-        </p:nvSpPr>
-        <p:spPr>
-          <a:xfrm>
-            <a:off x="680524" y="2429768"/>
-            <a:ext cx="25399" cy="1648916"/>
-          </a:xfrm>
-          <a:prstGeom prst="roundRect">
-            <a:avLst>
-              <a:gd name="adj" fmla="val 50001"/>
-            </a:avLst>
-          </a:prstGeom>
-          <a:solidFill>
-            <a:srgbClr val="002A80"/>
-          </a:solidFill>
-          <a:ln/>
-        </p:spPr>
-        <p:txBody>
-          <a:bodyPr/>
-          <a:p/>
-        </p:txBody>
-      </p:sp>
-      <p:sp>
-        <p:nvSpPr>
-          <p:cNvPr id="9" name="Text 7"/>
-          <p:cNvSpPr/>
-          <p:nvPr/>
-        </p:nvSpPr>
-        <p:spPr>
-          <a:xfrm>
-            <a:off x="869531" y="2618780"/>
-            <a:ext cx="5037309" cy="307082"/>
-          </a:xfrm>
-          <a:prstGeom prst="rect">
-            <a:avLst/>
-          </a:prstGeom>
-          <a:noFill/>
-          <a:ln/>
-        </p:spPr>
-        <p:txBody>
-          <a:bodyPr wrap="none" lIns="0" tIns="0" rIns="0" bIns="0" rtlCol="0" anchor="t"/>
-          <a:lstStyle/>
-          <a:p>
-            <a:pPr rtl="1" algn="r" indent="0" marL="0">
-              <a:lnSpc>
-                <a:spcPct val="108000"/>
-              </a:lnSpc>
-              <a:buNone/>
-            </a:pPr>
-            <a:r>
-              <a:rPr lang="he-IL" altLang="en-US" sz="1850" b="1" spc="-37" kern="0" dirty="0">
-                <a:solidFill>
-                  <a:srgbClr val="EBEDF0"/>
-                </a:solidFill>
-                <a:latin typeface="Arial" pitchFamily="34" charset="0"/>
-                <a:ea typeface="Arial" pitchFamily="34" charset="-122"/>
-                <a:cs typeface="Arial" pitchFamily="34" charset="-120"/>
-              </a:rPr>
-              <a:t>הנחיה ב׳</a:t>
-            </a:r>
-            <a:endParaRPr lang="he-IL" sz="1850" dirty="0"/>
-          </a:p>
-        </p:txBody>
-      </p:sp>
-      <p:sp>
-        <p:nvSpPr>
-          <p:cNvPr id="10" name="Text 8"/>
-          <p:cNvSpPr/>
-          <p:nvPr/>
-        </p:nvSpPr>
-        <p:spPr>
-          <a:xfrm>
-            <a:off x="869531" y="3039269"/>
-            <a:ext cx="5037309" cy="850404"/>
-          </a:xfrm>
-          <a:prstGeom prst="rect">
-            <a:avLst/>
-          </a:prstGeom>
-          <a:noFill/>
-          <a:ln/>
-        </p:spPr>
-        <p:txBody>
-          <a:bodyPr wrap="square" lIns="0" tIns="0" rIns="0" bIns="0" rtlCol="0" anchor="t"/>
-          <a:lstStyle/>
-          <a:p>
-            <a:pPr rtl="1" algn="r" indent="0" marL="0">
-              <a:lnSpc>
-                <a:spcPct val="108000"/>
-              </a:lnSpc>
-              <a:spcAft>
-                <a:spcPts val="850"/>
-              </a:spcAft>
-              <a:buNone/>
-            </a:pPr>
-            <a:r>
-              <a:rPr lang="he-IL" altLang="en-US" sz="1450" dirty="0">
-                <a:solidFill>
-                  <a:srgbClr val="EBEDF0"/>
-                </a:solidFill>
-                <a:latin typeface="Arial" pitchFamily="34" charset="0"/>
-                <a:ea typeface="Arial" pitchFamily="34" charset="-122"/>
-                <a:cs typeface="Arial" pitchFamily="34" charset="-120"/>
-              </a:rPr>
-              <a:t>מייל מוכן לשליחה</a:t>
-            </a:r>
-            <a:endParaRPr lang="he-IL" sz="1450" dirty="0"/>
-          </a:p>
-          <a:p>
-            <a:pPr rtl="1" algn="r" indent="0" marL="0">
-              <a:lnSpc>
-                <a:spcPct val="108000"/>
-              </a:lnSpc>
-              <a:buNone/>
-            </a:pPr>
-            <a:r>
-              <a:rPr lang="he-IL" altLang="en-US" sz="1450" dirty="0">
-                <a:solidFill>
-                  <a:srgbClr val="EBEDF0"/>
-                </a:solidFill>
-                <a:latin typeface="Arial" pitchFamily="34" charset="0"/>
-                <a:ea typeface="Arial" pitchFamily="34" charset="-122"/>
-                <a:cs typeface="Arial" pitchFamily="34" charset="-120"/>
-              </a:rPr>
-              <a:t>"שלום [שם], שמנו לב שחשבון מס׳ 1042 טרם שולם (30 יום). נשמח לסייע בפריסה נוחה — צרו קשר עד יום ה׳. בברכה, [שם]"</a:t>
-            </a:r>
-            <a:endParaRPr lang="he-IL" sz="1450" dirty="0"/>
-          </a:p>
-        </p:txBody>
-      </p:sp>
-      <p:sp>
-        <p:nvSpPr>
-          <p:cNvPr id="11" name="Text 9"/>
-          <p:cNvSpPr/>
-          <p:nvPr/>
-        </p:nvSpPr>
-        <p:spPr>
-          <a:xfrm>
-            <a:off x="51890" y="4310360"/>
-            <a:ext cx="11478330" cy="245666"/>
-          </a:xfrm>
-          <a:prstGeom prst="rect">
-            <a:avLst/>
-          </a:prstGeom>
-          <a:noFill/>
-          <a:ln/>
-        </p:spPr>
-        <p:txBody>
-          <a:bodyPr wrap="none" lIns="0" tIns="0" rIns="0" bIns="0" rtlCol="0" anchor="t"/>
-          <a:lstStyle/>
-          <a:p>
-            <a:pPr rtl="1" algn="r" indent="0" marL="0">
-              <a:lnSpc>
-                <a:spcPct val="108000"/>
-              </a:lnSpc>
-              <a:buNone/>
-            </a:pPr>
-            <a:r>
-              <a:rPr lang="he-IL" altLang="en-US" sz="1450" dirty="0">
-                <a:solidFill>
-                  <a:srgbClr val="EBEDF0"/>
-                </a:solidFill>
-                <a:latin typeface="Arial" pitchFamily="34" charset="0"/>
-                <a:ea typeface="Arial" pitchFamily="34" charset="-122"/>
-                <a:cs typeface="Arial" pitchFamily="34" charset="-120"/>
-              </a:rPr>
-              <a:t>אותו כלי, כמעט אותו מאמץ – פער עצום.</a:t>
-            </a:r>
-            <a:endParaRPr lang="he-IL" sz="1450" dirty="0"/>
-          </a:p>
-        </p:txBody>
-      </p:sp>
-      <p:sp>
-        <p:nvSpPr>
-          <p:cNvPr id="12" name="Text 10"/>
-          <p:cNvSpPr/>
-          <p:nvPr/>
-        </p:nvSpPr>
-        <p:spPr>
-          <a:xfrm>
-            <a:off x="51890" y="4981277"/>
-            <a:ext cx="11194869" cy="245666"/>
-          </a:xfrm>
-          <a:prstGeom prst="rect">
-            <a:avLst/>
-          </a:prstGeom>
-          <a:noFill/>
-          <a:ln/>
-        </p:spPr>
-        <p:txBody>
-          <a:bodyPr wrap="none" lIns="0" tIns="0" rIns="0" bIns="0" rtlCol="0" anchor="t"/>
-          <a:lstStyle/>
-          <a:p>
-            <a:pPr rtl="1" algn="r" indent="0" marL="0">
-              <a:lnSpc>
-                <a:spcPct val="108000"/>
-              </a:lnSpc>
-              <a:buNone/>
-            </a:pPr>
-            <a:r>
-              <a:rPr lang="he-IL" altLang="en-US" sz="1450" dirty="0">
-                <a:solidFill>
-                  <a:srgbClr val="EBEDF0"/>
-                </a:solidFill>
-                <a:latin typeface="Arial" pitchFamily="34" charset="0"/>
-                <a:ea typeface="Arial" pitchFamily="34" charset="-122"/>
-                <a:cs typeface="Arial" pitchFamily="34" charset="-120"/>
-              </a:rPr>
-              <a:t>המסקנה: ההנחיה היא </a:t>
-            </a:r>
-            <a:pPr rtl="1" algn="r" indent="0" marL="0">
-              <a:lnSpc>
-                <a:spcPct val="108000"/>
-              </a:lnSpc>
-              <a:buNone/>
-            </a:pPr>
-            <a:r>
-              <a:rPr lang="he-IL" altLang="en-US" sz="1450" b="1" dirty="0">
-                <a:solidFill>
-                  <a:srgbClr val="EBEDF0"/>
-                </a:solidFill>
-                <a:latin typeface="Arial" pitchFamily="34" charset="0"/>
-                <a:ea typeface="Arial" pitchFamily="34" charset="-122"/>
-                <a:cs typeface="Arial" pitchFamily="34" charset="-120"/>
-              </a:rPr>
-              <a:t>80% מהתוצאה.</a:t>
-            </a:r>
-            <a:endParaRPr lang="he-IL" sz="1450" dirty="0"/>
-          </a:p>
-        </p:txBody>
-      </p:sp>
-      <p:sp>
-        <p:nvSpPr>
-          <p:cNvPr id="13" name="Shape 11"/>
-          <p:cNvSpPr/>
-          <p:nvPr/>
-        </p:nvSpPr>
-        <p:spPr>
-          <a:xfrm>
-            <a:off x="11504821" y="4768652"/>
-            <a:ext cx="25399" cy="670917"/>
-          </a:xfrm>
-          <a:prstGeom prst="roundRect">
-            <a:avLst>
-              <a:gd name="adj" fmla="val 50001"/>
-            </a:avLst>
-          </a:prstGeom>
-          <a:solidFill>
-            <a:srgbClr val="6296FF"/>
-          </a:solidFill>
-          <a:ln/>
-        </p:spPr>
-        <p:txBody>
-          <a:bodyPr/>
-          <a:p/>
-        </p:txBody>
-      </p:sp>
-      <p:sp>
-        <p:nvSpPr>
-          <p:cNvPr id="14" name="TextBox 13"/>
-          <p:cNvSpPr txBox="1"/>
-          <p:nvPr/>
-        </p:nvSpPr>
-        <p:spPr>
-          <a:xfrm>
-            <a:off x="6675120" y="6473952"/>
-            <a:ext cx="4846320" cy="292608"/>
-          </a:xfrm>
-          <a:prstGeom prst="rect">
-            <a:avLst/>
-          </a:prstGeom>
-          <a:noFill/>
-        </p:spPr>
-        <p:txBody>
-          <a:bodyPr wrap="none" lIns="0" rIns="0" tIns="0" bIns="0">
-            <a:spAutoFit/>
-          </a:bodyPr>
-          <a:lstStyle/>
-          <a:p>
-            <a:pPr algn="r" rtl="1"/>
-            <a:r>
-              <a:rPr sz="1000">
-                <a:solidFill>
-                  <a:srgbClr val="8A96AA"/>
-                </a:solidFill>
-                <a:latin typeface="Arial"/>
-                <a:cs typeface="Arial"/>
-              </a:rPr>
-              <a:t>© נערך על ידי AI Finance</a:t>
-            </a:r>
-          </a:p>
-        </p:txBody>
-      </p:sp>
-    </p:spTree>
-  </p:cSld>
-  <p:clrMapOvr>
-    <a:masterClrMapping/>
-  </p:clrMapOvr>
-</p:sld>
-</file>
-
 <file path=ppt/slides/slide905.xml><?xml version="1.0" encoding="utf-8"?>
 <p:sld xmlns:a="http://schemas.openxmlformats.org/drawingml/2006/main" xmlns:r="http://schemas.openxmlformats.org/officeDocument/2006/relationships" xmlns:p="http://schemas.openxmlformats.org/presentationml/2006/main">
   <p:cSld name="Slide 5">

--- a/קורס בסיסי AI/שיעור 2/מצגת שיעור 2.pptx
+++ b/קורס בסיסי AI/שיעור 2/מצגת שיעור 2.pptx
@@ -1383,7 +1383,7 @@
           <a:p/>
           <a:p>
             <a:r>
-              <a:t>🏆 אפליקציית הקורס: פותחים את האתגר "מענה למייל עצבני".</a:t>
+              <a:t>🏆 פעילות: אתגר בצ'אט: "מענה למייל עצבני". מקריאים 3 הנחיות מהצ'אט, והכיתה מצביעה בצ'אט: 1, 2 או 3.</a:t>
             </a:r>
           </a:p>
           <a:p/>
@@ -1419,7 +1419,7 @@
           </a:p>
           <a:p>
             <a:r>
-              <a:t>ועכשיו אתגר באפליקציה: אחד המיילים לדוגמה הוא של לקוח עצבני. כתבו את ההנחיה שתוציא ממנו תשובה מושלמת. שלוש דקות.</a:t>
+              <a:t>ועכשיו אתגר: אחד המיילים לדוגמה הוא של לקוח עצבני. כתבו את ההנחיה שתוציא ממנו תשובה מושלמת, ושלחו אותה בצ'אט. שלוש דקות, ואז אקריא שלוש ונצביע.</a:t>
             </a:r>
           </a:p>
           <a:p/>
@@ -1756,7 +1756,7 @@
           <a:p/>
           <a:p>
             <a:r>
-              <a:t>🏆 אפליקציית הקורס: פותחים את האתגר "אפיון העסק שלי במשפט אחד".</a:t>
+              <a:t>🏆 פעילות: אתגר בצ'אט: "העסק שלי במשפט אחד". בוחרים 3 משפטים חדים ומקריאים אותם.</a:t>
             </a:r>
           </a:p>
           <a:p/>
@@ -1817,7 +1817,7 @@
           </a:p>
           <a:p>
             <a:r>
-              <a:t>ובסוף: כתבו באתגר את העסק שלכם במשפט אחד. הכי ברור וחד מנצח.</a:t>
+              <a:t>ובסוף: כתבו בצ'אט את העסק שלכם במשפט אחד. הכי ברור וחד מנצח.</a:t>
             </a:r>
           </a:p>
           <a:p/>
@@ -2026,7 +2026,7 @@
           </a:p>
           <a:p>
             <a:r>
-              <a:t>הם בצ'אט, בחוברת, ובארגז הכלים באפליקציה.</a:t>
+              <a:t>הם בצ'אט ובחוברת.</a:t>
             </a:r>
           </a:p>
           <a:p>
@@ -2352,7 +2352,7 @@
           <a:p/>
           <a:p>
             <a:r>
-              <a:t>🏆 אפליקציית הקורס: פותחים את המשחק ומפעילים את סבב החימום הראשון.</a:t>
+              <a:t>🏆 פעילות: פותחים את Prompt Lab ומפעילים את סבב החימום הראשון. גיבוי: אם המשחק לא עולה תוך דקה, ממשיכים בלי, ומבקשים בצ'אט: "כתבו את ההנחיה הכי גרועה ששלחתם פעם ל-AI".</a:t>
             </a:r>
           </a:p>
           <a:p/>
@@ -3631,7 +3631,7 @@
           <a:p/>
           <a:p>
             <a:r>
-              <a:t>🏆 אפליקציית הקורס: סבב "תקנו את ההנחיה": כל הנחיה חלשה מוצגת, והמשתתפים כותבים תיקון.</a:t>
+              <a:t>🏆 פעילות: סבב "תקנו את ההנחיה" בצ'אט: כל הנחיה חלשה מוצגת, והמשתתפים כותבים תיקון בצ'אט.</a:t>
             </a:r>
           </a:p>
           <a:p/>
@@ -3647,7 +3647,7 @@
           </a:p>
           <a:p>
             <a:r>
-              <a:t>(לפני שחושפים את הפתרון, מציגים כל הנחיה ושואלים: מה הבעיה? כתבו בצ'אט או במשחק)</a:t>
+              <a:t>(לפני שחושפים את הפתרון, מציגים כל הנחיה ושואלים: מה הבעיה? כתבו בצ'אט)</a:t>
             </a:r>
           </a:p>
           <a:p>
@@ -3776,7 +3776,7 @@
           <a:p/>
           <a:p>
             <a:r>
-              <a:t>🏆 אפליקציית הקורס: הצבעה: איזו תוצאה ניצחה, 1 או 2.</a:t>
+              <a:t>🏆 פעילות: הצבעה בצ'אט: כותבים 1 או 2.</a:t>
             </a:r>
           </a:p>
           <a:p/>
@@ -4419,7 +4419,7 @@
           <a:p/>
           <a:p>
             <a:r>
-              <a:t>🏆 אפליקציית הקורס: הצבעה: הנחיית הערב.</a:t>
+              <a:t>🏆 פעילות: הצבעה בצ'אט: מקריאים 3 הנחיות מועמדות, והכיתה כותבת 1, 2 או 3.</a:t>
             </a:r>
           </a:p>
           <a:p/>
@@ -4450,7 +4450,7 @@
           </a:p>
           <a:p>
             <a:r>
-              <a:t>ועכשיו הצבעה: מהי הנחיית הערב? המנצחת נכנסת לבנק של כולם, ואשלח אותה במייל.</a:t>
+              <a:t>ועכשיו הצבעה: מהי הנחיית הערב? אני מקריאה שלוש מועמדות, ואתם כותבים בצ'אט 1, 2 או 3. המנצחת נכנסת לבנק של כולם, ואשלח אותה במייל.</a:t>
             </a:r>
           </a:p>
           <a:p>
@@ -4634,7 +4634,7 @@
           <a:p/>
           <a:p>
             <a:r>
-              <a:t>🏆 אפליקציית הקורס: מציגים את התוצאות הסופיות והמנצחים במשחק.</a:t>
+              <a:t>🏆 פעילות: משתפים את לוח המובילים של Prompt Lab, ומכריזים גם על הנחיית הערב. גיבוי: אם המשחק לא פעל, מכריזים רק על הנחיית הערב.</a:t>
             </a:r>
           </a:p>
           <a:p/>
@@ -4670,7 +4670,7 @@
           </a:p>
           <a:p>
             <a:r>
-              <a:t>(משתפים את לוח התוצאות ומכריזים על המנצחים)</a:t>
+              <a:t>(משתפים את לוח המובילים של Prompt Lab ומכריזים על המנצחים. אם המשחק לא פעל: מכריזים על הנחיית הערב)</a:t>
             </a:r>
           </a:p>
           <a:p>
@@ -11227,7 +11227,7 @@
                 <a:latin typeface="Arial"/>
                 <a:cs typeface="Arial"/>
               </a:rPr>
-              <a:t>🏆  אתגר באפליקציה: "מענה למייל עצבני"</a:t>
+              <a:t>🏆  אתגר בצ'אט: "מענה למייל עצבני"</a:t>
             </a:r>
           </a:p>
         </p:txBody>
@@ -12996,7 +12996,7 @@
                 <a:latin typeface="Arial"/>
                 <a:cs typeface="Arial"/>
               </a:rPr>
-              <a:t>🏆  אתגר באפליקציה: "אפיון העסק שלי במשפט אחד". הכי ברור וחד מנצח.</a:t>
+              <a:t>🏆  אתגר בצ'אט: "העסק שלי במשפט אחד". הכי ברור וחד מנצח.</a:t>
             </a:r>
           </a:p>
         </p:txBody>
@@ -19443,7 +19443,7 @@
                 <a:latin typeface="Arial"/>
                 <a:cs typeface="Arial"/>
               </a:rPr>
-              <a:t>📋  כל הקישורים נמצאים גם בארגז הכלים באפליקציית הקורס ובחוברת.</a:t>
+              <a:t>📋  כל הקישורים נמצאים גם בחוברת.</a:t>
             </a:r>
           </a:p>
         </p:txBody>
@@ -40665,7 +40665,7 @@
                 <a:latin typeface="Arial"/>
                 <a:cs typeface="Arial"/>
               </a:rPr>
-              <a:t>הצבעה במשחק, והמנצחת נכנסת לבנק של כולם</a:t>
+              <a:t>הצבעה בצ'אט, והמנצחת נכנסת לבנק של כולם</a:t>
             </a:r>
           </a:p>
         </p:txBody>
